--- a/docs/Extraction_terminologique_v2.pptx
+++ b/docs/Extraction_terminologique_v2.pptx
@@ -5,7 +5,7 @@
     <p:sldMasterId id="2147483744" r:id="rId1"/>
   </p:sldMasterIdLst>
   <p:notesMasterIdLst>
-    <p:notesMasterId r:id="rId13"/>
+    <p:notesMasterId r:id="rId11"/>
   </p:notesMasterIdLst>
   <p:sldIdLst>
     <p:sldId id="256" r:id="rId2"/>
@@ -16,9 +16,7 @@
     <p:sldId id="262" r:id="rId7"/>
     <p:sldId id="263" r:id="rId8"/>
     <p:sldId id="264" r:id="rId9"/>
-    <p:sldId id="265" r:id="rId10"/>
-    <p:sldId id="266" r:id="rId11"/>
-    <p:sldId id="267" r:id="rId12"/>
+    <p:sldId id="267" r:id="rId10"/>
   </p:sldIdLst>
   <p:sldSz cx="12192000" cy="6858000"/>
   <p:notesSz cx="6858000" cy="9144000"/>
@@ -331,146 +329,6 @@
 </p:notes>
 </file>
 
-<file path=ppt/notesSlides/notesSlide10.xml><?xml version="1.0" encoding="utf-8"?>
-<p:notes xmlns:a="http://schemas.openxmlformats.org/drawingml/2006/main" xmlns:r="http://schemas.openxmlformats.org/officeDocument/2006/relationships" xmlns:p="http://schemas.openxmlformats.org/presentationml/2006/main">
-  <p:cSld>
-    <p:spTree>
-      <p:nvGrpSpPr>
-        <p:cNvPr id="1" name=""/>
-        <p:cNvGrpSpPr/>
-        <p:nvPr/>
-      </p:nvGrpSpPr>
-      <p:grpSpPr>
-        <a:xfrm>
-          <a:off x="0" y="0"/>
-          <a:ext cx="0" cy="0"/>
-          <a:chOff x="0" y="0"/>
-          <a:chExt cx="0" cy="0"/>
-        </a:xfrm>
-      </p:grpSpPr>
-      <p:sp>
-        <p:nvSpPr>
-          <p:cNvPr id="2" name="Slide Image Placeholder 1"/>
-          <p:cNvSpPr>
-            <a:spLocks noGrp="1" noRot="1" noChangeAspect="1"/>
-          </p:cNvSpPr>
-          <p:nvPr>
-            <p:ph type="sldImg" idx="2"/>
-          </p:nvPr>
-        </p:nvSpPr>
-        <p:spPr/>
-      </p:sp>
-      <p:sp>
-        <p:nvSpPr>
-          <p:cNvPr id="3" name="Notes Placeholder 2"/>
-          <p:cNvSpPr>
-            <a:spLocks noGrp="1"/>
-          </p:cNvSpPr>
-          <p:nvPr>
-            <p:ph type="body" sz="quarter" idx="3"/>
-          </p:nvPr>
-        </p:nvSpPr>
-        <p:spPr/>
-        <p:txBody>
-          <a:bodyPr/>
-          <a:lstStyle/>
-          <a:p>
-            <a:r>
-              <a:t>Sept phases sur huit sont terminées : conception, dictionnaires, extraction, scoring, intégration CLI, détection de variantes, benchmark. La version 1.2.0 est sur master mais n'a pas encore été taguée en release officielle. Il reste un point de performance à traiter avant une mise en production à grande échelle : deux passes de détection de variantes coûteuses en temps de calcul sur les très gros corpus.</a:t>
-            </a:r>
-          </a:p>
-        </p:txBody>
-      </p:sp>
-      <p:sp>
-        <p:nvSpPr>
-          <p:cNvPr id="4" name="Slide Number Placeholder 3"/>
-          <p:cNvSpPr>
-            <a:spLocks noGrp="1"/>
-          </p:cNvSpPr>
-          <p:nvPr>
-            <p:ph type="sldNum" sz="quarter" idx="5"/>
-          </p:nvPr>
-        </p:nvSpPr>
-        <p:spPr/>
-      </p:sp>
-    </p:spTree>
-  </p:cSld>
-  <p:clrMapOvr>
-    <a:masterClrMapping/>
-  </p:clrMapOvr>
-</p:notes>
-</file>
-
-<file path=ppt/notesSlides/notesSlide11.xml><?xml version="1.0" encoding="utf-8"?>
-<p:notes xmlns:a="http://schemas.openxmlformats.org/drawingml/2006/main" xmlns:r="http://schemas.openxmlformats.org/officeDocument/2006/relationships" xmlns:p="http://schemas.openxmlformats.org/presentationml/2006/main">
-  <p:cSld>
-    <p:spTree>
-      <p:nvGrpSpPr>
-        <p:cNvPr id="1" name=""/>
-        <p:cNvGrpSpPr/>
-        <p:nvPr/>
-      </p:nvGrpSpPr>
-      <p:grpSpPr>
-        <a:xfrm>
-          <a:off x="0" y="0"/>
-          <a:ext cx="0" cy="0"/>
-          <a:chOff x="0" y="0"/>
-          <a:chExt cx="0" cy="0"/>
-        </a:xfrm>
-      </p:grpSpPr>
-      <p:sp>
-        <p:nvSpPr>
-          <p:cNvPr id="2" name="Slide Image Placeholder 1"/>
-          <p:cNvSpPr>
-            <a:spLocks noGrp="1" noRot="1" noChangeAspect="1"/>
-          </p:cNvSpPr>
-          <p:nvPr>
-            <p:ph type="sldImg" idx="2"/>
-          </p:nvPr>
-        </p:nvSpPr>
-        <p:spPr/>
-      </p:sp>
-      <p:sp>
-        <p:nvSpPr>
-          <p:cNvPr id="3" name="Notes Placeholder 2"/>
-          <p:cNvSpPr>
-            <a:spLocks noGrp="1"/>
-          </p:cNvSpPr>
-          <p:nvPr>
-            <p:ph type="body" sz="quarter" idx="3"/>
-          </p:nvPr>
-        </p:nvSpPr>
-        <p:spPr/>
-        <p:txBody>
-          <a:bodyPr/>
-          <a:lstStyle/>
-          <a:p>
-            <a:r>
-              <a:t>Trois prochaines étapes : finaliser la release taguée officielle, traiter le point de performance sur la détection de variantes pour les très gros corpus, et le guide de curation est déjà rédigé et prêt à être utilisé. Merci, place aux questions.</a:t>
-            </a:r>
-          </a:p>
-        </p:txBody>
-      </p:sp>
-      <p:sp>
-        <p:nvSpPr>
-          <p:cNvPr id="4" name="Slide Number Placeholder 3"/>
-          <p:cNvSpPr>
-            <a:spLocks noGrp="1"/>
-          </p:cNvSpPr>
-          <p:nvPr>
-            <p:ph type="sldNum" sz="quarter" idx="5"/>
-          </p:nvPr>
-        </p:nvSpPr>
-        <p:spPr/>
-      </p:sp>
-    </p:spTree>
-  </p:cSld>
-  <p:clrMapOvr>
-    <a:masterClrMapping/>
-  </p:clrMapOvr>
-</p:notes>
-</file>
-
 <file path=ppt/notesSlides/notesSlide2.xml><?xml version="1.0" encoding="utf-8"?>
 <p:notes xmlns:a="http://schemas.openxmlformats.org/drawingml/2006/main" xmlns:r="http://schemas.openxmlformats.org/officeDocument/2006/relationships" xmlns:p="http://schemas.openxmlformats.org/presentationml/2006/main">
   <p:cSld>
@@ -1542,219 +1400,11 @@
             </a:r>
             <a:r>
               <a:rPr dirty="0"/>
-              <a:t> 28 minutes 39, sans incident. Sur 38 838 </a:t>
+              <a:t> 28 minutes 39, sans </a:t>
             </a:r>
             <a:r>
               <a:rPr dirty="0" err="1"/>
-              <a:t>candidats</a:t>
-            </a:r>
-            <a:r>
-              <a:rPr dirty="0"/>
-              <a:t> extraits, 225 </a:t>
-            </a:r>
-            <a:r>
-              <a:rPr dirty="0" err="1"/>
-              <a:t>étaient</a:t>
-            </a:r>
-            <a:r>
-              <a:rPr dirty="0"/>
-              <a:t> déjà dans le </a:t>
-            </a:r>
-            <a:r>
-              <a:rPr dirty="0" err="1"/>
-              <a:t>vocabulaire</a:t>
-            </a:r>
-            <a:r>
-              <a:rPr dirty="0"/>
-              <a:t>. Sur les 38 613 nouveaux, les trois </a:t>
-            </a:r>
-            <a:r>
-              <a:rPr dirty="0" err="1"/>
-              <a:t>niveaux</a:t>
-            </a:r>
-            <a:r>
-              <a:rPr dirty="0"/>
-              <a:t> </a:t>
-            </a:r>
-            <a:r>
-              <a:rPr dirty="0" err="1"/>
-              <a:t>ont</a:t>
-            </a:r>
-            <a:r>
-              <a:rPr dirty="0"/>
-              <a:t> </a:t>
-            </a:r>
-            <a:r>
-              <a:rPr dirty="0" err="1"/>
-              <a:t>retenu</a:t>
-            </a:r>
-            <a:r>
-              <a:rPr dirty="0"/>
-              <a:t> 177 </a:t>
-            </a:r>
-            <a:r>
-              <a:rPr dirty="0" err="1"/>
-              <a:t>en</a:t>
-            </a:r>
-            <a:r>
-              <a:rPr dirty="0"/>
-              <a:t> </a:t>
-            </a:r>
-            <a:r>
-              <a:rPr dirty="0" err="1"/>
-              <a:t>sémantique</a:t>
-            </a:r>
-            <a:r>
-              <a:rPr dirty="0"/>
-              <a:t>, 705 </a:t>
-            </a:r>
-            <a:r>
-              <a:rPr dirty="0" err="1"/>
-              <a:t>en</a:t>
-            </a:r>
-            <a:r>
-              <a:rPr dirty="0"/>
-              <a:t> </a:t>
-            </a:r>
-            <a:r>
-              <a:rPr dirty="0" err="1"/>
-              <a:t>structurel</a:t>
-            </a:r>
-            <a:r>
-              <a:rPr dirty="0"/>
-              <a:t>, 3 686 </a:t>
-            </a:r>
-            <a:r>
-              <a:rPr dirty="0" err="1"/>
-              <a:t>en</a:t>
-            </a:r>
-            <a:r>
-              <a:rPr dirty="0"/>
-              <a:t> </a:t>
-            </a:r>
-            <a:r>
-              <a:rPr dirty="0" err="1"/>
-              <a:t>spécificité</a:t>
-            </a:r>
-            <a:r>
-              <a:rPr dirty="0"/>
-              <a:t> — le </a:t>
-            </a:r>
-            <a:r>
-              <a:rPr dirty="0" err="1"/>
-              <a:t>reste</a:t>
-            </a:r>
-            <a:r>
-              <a:rPr dirty="0"/>
-              <a:t>, la </a:t>
-            </a:r>
-            <a:r>
-              <a:rPr dirty="0" err="1"/>
-              <a:t>grande</a:t>
-            </a:r>
-            <a:r>
-              <a:rPr dirty="0"/>
-              <a:t> </a:t>
-            </a:r>
-            <a:r>
-              <a:rPr dirty="0" err="1"/>
-              <a:t>majorité</a:t>
-            </a:r>
-            <a:r>
-              <a:rPr dirty="0"/>
-              <a:t>, </a:t>
-            </a:r>
-            <a:r>
-              <a:rPr dirty="0" err="1"/>
-              <a:t>n'a</a:t>
-            </a:r>
-            <a:r>
-              <a:rPr dirty="0"/>
-              <a:t> </a:t>
-            </a:r>
-            <a:r>
-              <a:rPr dirty="0" err="1"/>
-              <a:t>été</a:t>
-            </a:r>
-            <a:r>
-              <a:rPr dirty="0"/>
-              <a:t> </a:t>
-            </a:r>
-            <a:r>
-              <a:rPr dirty="0" err="1"/>
-              <a:t>retenu</a:t>
-            </a:r>
-            <a:r>
-              <a:rPr dirty="0"/>
-              <a:t> par </a:t>
-            </a:r>
-            <a:r>
-              <a:rPr dirty="0" err="1"/>
-              <a:t>aucun</a:t>
-            </a:r>
-            <a:r>
-              <a:rPr dirty="0"/>
-              <a:t> </a:t>
-            </a:r>
-            <a:r>
-              <a:rPr dirty="0" err="1"/>
-              <a:t>niveau</a:t>
-            </a:r>
-            <a:r>
-              <a:rPr dirty="0"/>
-              <a:t>. Point de </a:t>
-            </a:r>
-            <a:r>
-              <a:rPr dirty="0" err="1"/>
-              <a:t>vérification</a:t>
-            </a:r>
-            <a:r>
-              <a:rPr dirty="0"/>
-              <a:t> important : </a:t>
-            </a:r>
-            <a:r>
-              <a:rPr dirty="0" err="1"/>
-              <a:t>exclusivité</a:t>
-            </a:r>
-            <a:r>
-              <a:rPr dirty="0"/>
-              <a:t> </a:t>
-            </a:r>
-            <a:r>
-              <a:rPr dirty="0" err="1"/>
-              <a:t>mutuelle</a:t>
-            </a:r>
-            <a:r>
-              <a:rPr dirty="0"/>
-              <a:t> </a:t>
-            </a:r>
-            <a:r>
-              <a:rPr dirty="0" err="1"/>
-              <a:t>vérifiée</a:t>
-            </a:r>
-            <a:r>
-              <a:rPr dirty="0"/>
-              <a:t> sur les 38 838 </a:t>
-            </a:r>
-            <a:r>
-              <a:rPr dirty="0" err="1"/>
-              <a:t>candidats</a:t>
-            </a:r>
-            <a:r>
-              <a:rPr dirty="0"/>
-              <a:t>, </a:t>
-            </a:r>
-            <a:r>
-              <a:rPr dirty="0" err="1"/>
-              <a:t>zéro</a:t>
-            </a:r>
-            <a:r>
-              <a:rPr dirty="0"/>
-              <a:t> violation, </a:t>
-            </a:r>
-            <a:r>
-              <a:rPr dirty="0" err="1"/>
-              <a:t>chaque</a:t>
+              <a:t>incidentchaque</a:t>
             </a:r>
             <a:r>
               <a:rPr dirty="0"/>
@@ -1978,7 +1628,7 @@
           <a:lstStyle/>
           <a:p>
             <a:r>
-              <a:t>On a tenu le cahier des charges : français et anglais obligatoires, aucune dépendance à un GPU, une vitesse comparable au mode annotate existant, et pas de modèle massif à entraîner ou héberger — vérifié en conditions réelles, pas seulement sur un benchmark académique.</a:t>
+              <a:t>Trois prochaines étapes : finaliser la release taguée officielle, traiter le point de performance sur la détection de variantes pour les très gros corpus, et le guide de curation est déjà rédigé et prêt à être utilisé. Merci, place aux questions.</a:t>
             </a:r>
           </a:p>
         </p:txBody>
@@ -6219,1517 +5869,6 @@
 </p:sld>
 </file>
 
-<file path=ppt/slides/slide10.xml><?xml version="1.0" encoding="utf-8"?>
-<p:sld xmlns:a="http://schemas.openxmlformats.org/drawingml/2006/main" xmlns:r="http://schemas.openxmlformats.org/officeDocument/2006/relationships" xmlns:p="http://schemas.openxmlformats.org/presentationml/2006/main">
-  <p:cSld>
-    <p:spTree>
-      <p:nvGrpSpPr>
-        <p:cNvPr id="1" name=""/>
-        <p:cNvGrpSpPr/>
-        <p:nvPr/>
-      </p:nvGrpSpPr>
-      <p:grpSpPr>
-        <a:xfrm>
-          <a:off x="0" y="0"/>
-          <a:ext cx="0" cy="0"/>
-          <a:chOff x="0" y="0"/>
-          <a:chExt cx="0" cy="0"/>
-        </a:xfrm>
-      </p:grpSpPr>
-      <p:sp>
-        <p:nvSpPr>
-          <p:cNvPr id="3" name="TextBox 2"/>
-          <p:cNvSpPr txBox="1"/>
-          <p:nvPr/>
-        </p:nvSpPr>
-        <p:spPr>
-          <a:xfrm>
-            <a:off x="475957" y="173736"/>
-            <a:ext cx="5486400" cy="320040"/>
-          </a:xfrm>
-          <a:prstGeom prst="rect">
-            <a:avLst/>
-          </a:prstGeom>
-          <a:noFill/>
-        </p:spPr>
-        <p:txBody>
-          <a:bodyPr wrap="square" lIns="0" tIns="0" rIns="0" bIns="0" anchor="t">
-            <a:spAutoFit/>
-          </a:bodyPr>
-          <a:lstStyle/>
-          <a:p>
-            <a:pPr algn="l">
-              <a:lnSpc>
-                <a:spcPct val="115000"/>
-              </a:lnSpc>
-              <a:spcAft>
-                <a:spcPts val="0"/>
-              </a:spcAft>
-            </a:pPr>
-            <a:r>
-              <a:rPr sz="1200" b="0" i="0" spc="140" dirty="0">
-                <a:solidFill>
-                  <a:srgbClr val="7C8886"/>
-                </a:solidFill>
-                <a:latin typeface="Consolas"/>
-              </a:rPr>
-              <a:t>AVANCEMENT</a:t>
-            </a:r>
-          </a:p>
-        </p:txBody>
-      </p:sp>
-      <p:sp>
-        <p:nvSpPr>
-          <p:cNvPr id="4" name="TextBox 3"/>
-          <p:cNvSpPr txBox="1"/>
-          <p:nvPr/>
-        </p:nvSpPr>
-        <p:spPr>
-          <a:xfrm>
-            <a:off x="640080" y="777240"/>
-            <a:ext cx="8686800" cy="1005840"/>
-          </a:xfrm>
-          <a:prstGeom prst="rect">
-            <a:avLst/>
-          </a:prstGeom>
-          <a:noFill/>
-        </p:spPr>
-        <p:txBody>
-          <a:bodyPr wrap="square" lIns="0" tIns="0" rIns="0" bIns="0" anchor="t">
-            <a:spAutoFit/>
-          </a:bodyPr>
-          <a:lstStyle/>
-          <a:p>
-            <a:pPr algn="l">
-              <a:lnSpc>
-                <a:spcPct val="100000"/>
-              </a:lnSpc>
-              <a:spcAft>
-                <a:spcPts val="0"/>
-              </a:spcAft>
-            </a:pPr>
-            <a:r>
-              <a:rPr sz="3200" b="1" i="0" dirty="0" err="1">
-                <a:solidFill>
-                  <a:srgbClr val="1B2429"/>
-                </a:solidFill>
-                <a:latin typeface="Cambria"/>
-              </a:rPr>
-              <a:t>Où</a:t>
-            </a:r>
-            <a:r>
-              <a:rPr sz="3200" b="1" i="0" dirty="0">
-                <a:solidFill>
-                  <a:srgbClr val="1B2429"/>
-                </a:solidFill>
-                <a:latin typeface="Cambria"/>
-              </a:rPr>
-              <a:t> on </a:t>
-            </a:r>
-            <a:r>
-              <a:rPr sz="3200" b="1" i="0" dirty="0" err="1">
-                <a:solidFill>
-                  <a:srgbClr val="1B2429"/>
-                </a:solidFill>
-                <a:latin typeface="Cambria"/>
-              </a:rPr>
-              <a:t>en</a:t>
-            </a:r>
-            <a:r>
-              <a:rPr sz="3200" b="1" i="0" dirty="0">
-                <a:solidFill>
-                  <a:srgbClr val="1B2429"/>
-                </a:solidFill>
-                <a:latin typeface="Cambria"/>
-              </a:rPr>
-              <a:t> </a:t>
-            </a:r>
-            <a:r>
-              <a:rPr sz="3200" b="1" i="0" dirty="0" err="1">
-                <a:solidFill>
-                  <a:srgbClr val="1B2429"/>
-                </a:solidFill>
-                <a:latin typeface="Cambria"/>
-              </a:rPr>
-              <a:t>est</a:t>
-            </a:r>
-            <a:endParaRPr sz="3200" b="1" i="0" dirty="0">
-              <a:solidFill>
-                <a:srgbClr val="1B2429"/>
-              </a:solidFill>
-              <a:latin typeface="Cambria"/>
-            </a:endParaRPr>
-          </a:p>
-        </p:txBody>
-      </p:sp>
-      <p:sp>
-        <p:nvSpPr>
-          <p:cNvPr id="5" name="Rectangle 4"/>
-          <p:cNvSpPr/>
-          <p:nvPr/>
-        </p:nvSpPr>
-        <p:spPr>
-          <a:xfrm>
-            <a:off x="640080" y="3063240"/>
-            <a:ext cx="10881360" cy="12700"/>
-          </a:xfrm>
-          <a:prstGeom prst="rect">
-            <a:avLst/>
-          </a:prstGeom>
-          <a:solidFill>
-            <a:srgbClr val="D9DDD4"/>
-          </a:solidFill>
-          <a:ln>
-            <a:noFill/>
-          </a:ln>
-          <a:effectLst/>
-        </p:spPr>
-        <p:style>
-          <a:lnRef idx="1">
-            <a:schemeClr val="accent1"/>
-          </a:lnRef>
-          <a:fillRef idx="3">
-            <a:schemeClr val="accent1"/>
-          </a:fillRef>
-          <a:effectRef idx="2">
-            <a:schemeClr val="accent1"/>
-          </a:effectRef>
-          <a:fontRef idx="minor">
-            <a:schemeClr val="lt1"/>
-          </a:fontRef>
-        </p:style>
-        <p:txBody>
-          <a:bodyPr rtlCol="0" anchor="ctr"/>
-          <a:lstStyle/>
-          <a:p>
-            <a:pPr algn="ctr"/>
-            <a:endParaRPr sz="2400"/>
-          </a:p>
-        </p:txBody>
-      </p:sp>
-      <p:sp>
-        <p:nvSpPr>
-          <p:cNvPr id="6" name="TextBox 5"/>
-          <p:cNvSpPr txBox="1"/>
-          <p:nvPr/>
-        </p:nvSpPr>
-        <p:spPr>
-          <a:xfrm>
-            <a:off x="640080" y="2286000"/>
-            <a:ext cx="1554480" cy="231987"/>
-          </a:xfrm>
-          <a:prstGeom prst="rect">
-            <a:avLst/>
-          </a:prstGeom>
-          <a:noFill/>
-        </p:spPr>
-        <p:txBody>
-          <a:bodyPr wrap="square" lIns="0" tIns="0" rIns="0" bIns="0" anchor="t">
-            <a:spAutoFit/>
-          </a:bodyPr>
-          <a:lstStyle/>
-          <a:p>
-            <a:pPr algn="l">
-              <a:lnSpc>
-                <a:spcPct val="115000"/>
-              </a:lnSpc>
-              <a:spcAft>
-                <a:spcPts val="0"/>
-              </a:spcAft>
-            </a:pPr>
-            <a:r>
-              <a:rPr sz="1400" b="1" i="0">
-                <a:solidFill>
-                  <a:srgbClr val="0E6B66"/>
-                </a:solidFill>
-                <a:latin typeface="Consolas"/>
-              </a:rPr>
-              <a:t>PHASES 0–6</a:t>
-            </a:r>
-          </a:p>
-        </p:txBody>
-      </p:sp>
-      <p:sp>
-        <p:nvSpPr>
-          <p:cNvPr id="7" name="TextBox 6"/>
-          <p:cNvSpPr txBox="1"/>
-          <p:nvPr/>
-        </p:nvSpPr>
-        <p:spPr>
-          <a:xfrm>
-            <a:off x="2286000" y="2286000"/>
-            <a:ext cx="2926080" cy="299826"/>
-          </a:xfrm>
-          <a:prstGeom prst="rect">
-            <a:avLst/>
-          </a:prstGeom>
-          <a:noFill/>
-        </p:spPr>
-        <p:txBody>
-          <a:bodyPr wrap="square" lIns="0" tIns="0" rIns="0" bIns="0" anchor="t">
-            <a:spAutoFit/>
-          </a:bodyPr>
-          <a:lstStyle/>
-          <a:p>
-            <a:pPr algn="l">
-              <a:lnSpc>
-                <a:spcPct val="115000"/>
-              </a:lnSpc>
-              <a:spcAft>
-                <a:spcPts val="0"/>
-              </a:spcAft>
-            </a:pPr>
-            <a:r>
-              <a:rPr b="1" i="0">
-                <a:solidFill>
-                  <a:srgbClr val="1B2429"/>
-                </a:solidFill>
-                <a:latin typeface="Calibri"/>
-              </a:rPr>
-              <a:t>Terminées</a:t>
-            </a:r>
-          </a:p>
-        </p:txBody>
-      </p:sp>
-      <p:sp>
-        <p:nvSpPr>
-          <p:cNvPr id="8" name="TextBox 7"/>
-          <p:cNvSpPr txBox="1"/>
-          <p:nvPr/>
-        </p:nvSpPr>
-        <p:spPr>
-          <a:xfrm>
-            <a:off x="2286000" y="2633472"/>
-            <a:ext cx="9052560" cy="549638"/>
-          </a:xfrm>
-          <a:prstGeom prst="rect">
-            <a:avLst/>
-          </a:prstGeom>
-          <a:noFill/>
-        </p:spPr>
-        <p:txBody>
-          <a:bodyPr wrap="square" lIns="0" tIns="0" rIns="0" bIns="0" anchor="t">
-            <a:spAutoFit/>
-          </a:bodyPr>
-          <a:lstStyle/>
-          <a:p>
-            <a:pPr algn="l">
-              <a:lnSpc>
-                <a:spcPct val="115000"/>
-              </a:lnSpc>
-              <a:spcAft>
-                <a:spcPts val="0"/>
-              </a:spcAft>
-            </a:pPr>
-            <a:r>
-              <a:rPr sz="1600" b="0" i="0">
-                <a:solidFill>
-                  <a:srgbClr val="52605F"/>
-                </a:solidFill>
-                <a:latin typeface="Calibri"/>
-              </a:rPr>
-              <a:t>conception, dictionnaires, extraction, scoring C-value/embeddings, intégration CLI, variantes, benchmark ACTER</a:t>
-            </a:r>
-          </a:p>
-        </p:txBody>
-      </p:sp>
-      <p:sp>
-        <p:nvSpPr>
-          <p:cNvPr id="9" name="Rectangle 8"/>
-          <p:cNvSpPr/>
-          <p:nvPr/>
-        </p:nvSpPr>
-        <p:spPr>
-          <a:xfrm>
-            <a:off x="640080" y="4114800"/>
-            <a:ext cx="10881360" cy="12700"/>
-          </a:xfrm>
-          <a:prstGeom prst="rect">
-            <a:avLst/>
-          </a:prstGeom>
-          <a:solidFill>
-            <a:srgbClr val="D9DDD4"/>
-          </a:solidFill>
-          <a:ln>
-            <a:noFill/>
-          </a:ln>
-          <a:effectLst/>
-        </p:spPr>
-        <p:style>
-          <a:lnRef idx="1">
-            <a:schemeClr val="accent1"/>
-          </a:lnRef>
-          <a:fillRef idx="3">
-            <a:schemeClr val="accent1"/>
-          </a:fillRef>
-          <a:effectRef idx="2">
-            <a:schemeClr val="accent1"/>
-          </a:effectRef>
-          <a:fontRef idx="minor">
-            <a:schemeClr val="lt1"/>
-          </a:fontRef>
-        </p:style>
-        <p:txBody>
-          <a:bodyPr rtlCol="0" anchor="ctr"/>
-          <a:lstStyle/>
-          <a:p>
-            <a:pPr algn="ctr"/>
-            <a:endParaRPr sz="2400"/>
-          </a:p>
-        </p:txBody>
-      </p:sp>
-      <p:sp>
-        <p:nvSpPr>
-          <p:cNvPr id="10" name="TextBox 9"/>
-          <p:cNvSpPr txBox="1"/>
-          <p:nvPr/>
-        </p:nvSpPr>
-        <p:spPr>
-          <a:xfrm>
-            <a:off x="640080" y="3337560"/>
-            <a:ext cx="1554480" cy="231987"/>
-          </a:xfrm>
-          <a:prstGeom prst="rect">
-            <a:avLst/>
-          </a:prstGeom>
-          <a:noFill/>
-        </p:spPr>
-        <p:txBody>
-          <a:bodyPr wrap="square" lIns="0" tIns="0" rIns="0" bIns="0" anchor="t">
-            <a:spAutoFit/>
-          </a:bodyPr>
-          <a:lstStyle/>
-          <a:p>
-            <a:pPr algn="l">
-              <a:lnSpc>
-                <a:spcPct val="115000"/>
-              </a:lnSpc>
-              <a:spcAft>
-                <a:spcPts val="0"/>
-              </a:spcAft>
-            </a:pPr>
-            <a:r>
-              <a:rPr sz="1400" b="1" i="0">
-                <a:solidFill>
-                  <a:srgbClr val="0E6B66"/>
-                </a:solidFill>
-                <a:latin typeface="Consolas"/>
-              </a:rPr>
-              <a:t>V1.2.0</a:t>
-            </a:r>
-          </a:p>
-        </p:txBody>
-      </p:sp>
-      <p:sp>
-        <p:nvSpPr>
-          <p:cNvPr id="11" name="TextBox 10"/>
-          <p:cNvSpPr txBox="1"/>
-          <p:nvPr/>
-        </p:nvSpPr>
-        <p:spPr>
-          <a:xfrm>
-            <a:off x="2286000" y="3337560"/>
-            <a:ext cx="2926080" cy="299826"/>
-          </a:xfrm>
-          <a:prstGeom prst="rect">
-            <a:avLst/>
-          </a:prstGeom>
-          <a:noFill/>
-        </p:spPr>
-        <p:txBody>
-          <a:bodyPr wrap="square" lIns="0" tIns="0" rIns="0" bIns="0" anchor="t">
-            <a:spAutoFit/>
-          </a:bodyPr>
-          <a:lstStyle/>
-          <a:p>
-            <a:pPr algn="l">
-              <a:lnSpc>
-                <a:spcPct val="115000"/>
-              </a:lnSpc>
-              <a:spcAft>
-                <a:spcPts val="0"/>
-              </a:spcAft>
-            </a:pPr>
-            <a:r>
-              <a:rPr b="1" i="0">
-                <a:solidFill>
-                  <a:srgbClr val="1B2429"/>
-                </a:solidFill>
-                <a:latin typeface="Calibri"/>
-              </a:rPr>
-              <a:t>Sur master</a:t>
-            </a:r>
-          </a:p>
-        </p:txBody>
-      </p:sp>
-      <p:sp>
-        <p:nvSpPr>
-          <p:cNvPr id="12" name="TextBox 11"/>
-          <p:cNvSpPr txBox="1"/>
-          <p:nvPr/>
-        </p:nvSpPr>
-        <p:spPr>
-          <a:xfrm>
-            <a:off x="2286000" y="3685032"/>
-            <a:ext cx="9052560" cy="266483"/>
-          </a:xfrm>
-          <a:prstGeom prst="rect">
-            <a:avLst/>
-          </a:prstGeom>
-          <a:noFill/>
-        </p:spPr>
-        <p:txBody>
-          <a:bodyPr wrap="square" lIns="0" tIns="0" rIns="0" bIns="0" anchor="t">
-            <a:spAutoFit/>
-          </a:bodyPr>
-          <a:lstStyle/>
-          <a:p>
-            <a:pPr algn="l">
-              <a:lnSpc>
-                <a:spcPct val="115000"/>
-              </a:lnSpc>
-              <a:spcAft>
-                <a:spcPts val="0"/>
-              </a:spcAft>
-            </a:pPr>
-            <a:r>
-              <a:rPr sz="1600" b="0" i="0">
-                <a:solidFill>
-                  <a:srgbClr val="52605F"/>
-                </a:solidFill>
-                <a:latin typeface="Calibri"/>
-              </a:rPr>
-              <a:t>code à jour, mais aucune release taguée publiée pour l'instant</a:t>
-            </a:r>
-          </a:p>
-        </p:txBody>
-      </p:sp>
-      <p:sp>
-        <p:nvSpPr>
-          <p:cNvPr id="13" name="Rectangle 12"/>
-          <p:cNvSpPr/>
-          <p:nvPr/>
-        </p:nvSpPr>
-        <p:spPr>
-          <a:xfrm>
-            <a:off x="640080" y="5166360"/>
-            <a:ext cx="10881360" cy="12700"/>
-          </a:xfrm>
-          <a:prstGeom prst="rect">
-            <a:avLst/>
-          </a:prstGeom>
-          <a:solidFill>
-            <a:srgbClr val="D9DDD4"/>
-          </a:solidFill>
-          <a:ln>
-            <a:noFill/>
-          </a:ln>
-          <a:effectLst/>
-        </p:spPr>
-        <p:style>
-          <a:lnRef idx="1">
-            <a:schemeClr val="accent1"/>
-          </a:lnRef>
-          <a:fillRef idx="3">
-            <a:schemeClr val="accent1"/>
-          </a:fillRef>
-          <a:effectRef idx="2">
-            <a:schemeClr val="accent1"/>
-          </a:effectRef>
-          <a:fontRef idx="minor">
-            <a:schemeClr val="lt1"/>
-          </a:fontRef>
-        </p:style>
-        <p:txBody>
-          <a:bodyPr rtlCol="0" anchor="ctr"/>
-          <a:lstStyle/>
-          <a:p>
-            <a:pPr algn="ctr"/>
-            <a:endParaRPr sz="2400"/>
-          </a:p>
-        </p:txBody>
-      </p:sp>
-      <p:sp>
-        <p:nvSpPr>
-          <p:cNvPr id="14" name="TextBox 13"/>
-          <p:cNvSpPr txBox="1"/>
-          <p:nvPr/>
-        </p:nvSpPr>
-        <p:spPr>
-          <a:xfrm>
-            <a:off x="640080" y="4389120"/>
-            <a:ext cx="1554480" cy="231987"/>
-          </a:xfrm>
-          <a:prstGeom prst="rect">
-            <a:avLst/>
-          </a:prstGeom>
-          <a:noFill/>
-        </p:spPr>
-        <p:txBody>
-          <a:bodyPr wrap="square" lIns="0" tIns="0" rIns="0" bIns="0" anchor="t">
-            <a:spAutoFit/>
-          </a:bodyPr>
-          <a:lstStyle/>
-          <a:p>
-            <a:pPr algn="l">
-              <a:lnSpc>
-                <a:spcPct val="115000"/>
-              </a:lnSpc>
-              <a:spcAft>
-                <a:spcPts val="0"/>
-              </a:spcAft>
-            </a:pPr>
-            <a:r>
-              <a:rPr sz="1400" b="1" i="0">
-                <a:solidFill>
-                  <a:srgbClr val="A8752A"/>
-                </a:solidFill>
-                <a:latin typeface="Consolas"/>
-              </a:rPr>
-              <a:t>EN COURS</a:t>
-            </a:r>
-          </a:p>
-        </p:txBody>
-      </p:sp>
-      <p:sp>
-        <p:nvSpPr>
-          <p:cNvPr id="15" name="TextBox 14"/>
-          <p:cNvSpPr txBox="1"/>
-          <p:nvPr/>
-        </p:nvSpPr>
-        <p:spPr>
-          <a:xfrm>
-            <a:off x="2286000" y="4389120"/>
-            <a:ext cx="2926080" cy="299826"/>
-          </a:xfrm>
-          <a:prstGeom prst="rect">
-            <a:avLst/>
-          </a:prstGeom>
-          <a:noFill/>
-        </p:spPr>
-        <p:txBody>
-          <a:bodyPr wrap="square" lIns="0" tIns="0" rIns="0" bIns="0" anchor="t">
-            <a:spAutoFit/>
-          </a:bodyPr>
-          <a:lstStyle/>
-          <a:p>
-            <a:pPr algn="l">
-              <a:lnSpc>
-                <a:spcPct val="115000"/>
-              </a:lnSpc>
-              <a:spcAft>
-                <a:spcPts val="0"/>
-              </a:spcAft>
-            </a:pPr>
-            <a:r>
-              <a:rPr b="1" i="0">
-                <a:solidFill>
-                  <a:srgbClr val="1B2429"/>
-                </a:solidFill>
-                <a:latin typeface="Calibri"/>
-              </a:rPr>
-              <a:t>Optimisation des gros corpus</a:t>
-            </a:r>
-          </a:p>
-        </p:txBody>
-      </p:sp>
-      <p:sp>
-        <p:nvSpPr>
-          <p:cNvPr id="16" name="TextBox 15"/>
-          <p:cNvSpPr txBox="1"/>
-          <p:nvPr/>
-        </p:nvSpPr>
-        <p:spPr>
-          <a:xfrm>
-            <a:off x="2286000" y="4736592"/>
-            <a:ext cx="9052560" cy="266483"/>
-          </a:xfrm>
-          <a:prstGeom prst="rect">
-            <a:avLst/>
-          </a:prstGeom>
-          <a:noFill/>
-        </p:spPr>
-        <p:txBody>
-          <a:bodyPr wrap="square" lIns="0" tIns="0" rIns="0" bIns="0" anchor="t">
-            <a:spAutoFit/>
-          </a:bodyPr>
-          <a:lstStyle/>
-          <a:p>
-            <a:pPr algn="l">
-              <a:lnSpc>
-                <a:spcPct val="115000"/>
-              </a:lnSpc>
-              <a:spcAft>
-                <a:spcPts val="0"/>
-              </a:spcAft>
-            </a:pPr>
-            <a:r>
-              <a:rPr sz="1600" b="0" i="0">
-                <a:solidFill>
-                  <a:srgbClr val="52605F"/>
-                </a:solidFill>
-                <a:latin typeface="Calibri"/>
-              </a:rPr>
-              <a:t>deux passes de détection de variantes coûteuses en temps de calcul, à fiabiliser avant montée en charge</a:t>
-            </a:r>
-          </a:p>
-        </p:txBody>
-      </p:sp>
-      <p:sp>
-        <p:nvSpPr>
-          <p:cNvPr id="17" name="TextBox 16"/>
-          <p:cNvSpPr txBox="1"/>
-          <p:nvPr/>
-        </p:nvSpPr>
-        <p:spPr>
-          <a:xfrm>
-            <a:off x="11002975" y="6355080"/>
-            <a:ext cx="914400" cy="198837"/>
-          </a:xfrm>
-          <a:prstGeom prst="rect">
-            <a:avLst/>
-          </a:prstGeom>
-          <a:noFill/>
-        </p:spPr>
-        <p:txBody>
-          <a:bodyPr wrap="square" lIns="0" tIns="0" rIns="0" bIns="0" anchor="t">
-            <a:spAutoFit/>
-          </a:bodyPr>
-          <a:lstStyle/>
-          <a:p>
-            <a:pPr algn="r">
-              <a:lnSpc>
-                <a:spcPct val="115000"/>
-              </a:lnSpc>
-              <a:spcAft>
-                <a:spcPts val="0"/>
-              </a:spcAft>
-            </a:pPr>
-            <a:r>
-              <a:rPr sz="1200" b="0" i="0">
-                <a:solidFill>
-                  <a:srgbClr val="7C8886"/>
-                </a:solidFill>
-                <a:latin typeface="Consolas"/>
-              </a:rPr>
-              <a:t>11 / 12</a:t>
-            </a:r>
-          </a:p>
-        </p:txBody>
-      </p:sp>
-    </p:spTree>
-  </p:cSld>
-  <p:clrMapOvr>
-    <a:masterClrMapping/>
-  </p:clrMapOvr>
-</p:sld>
-</file>
-
-<file path=ppt/slides/slide11.xml><?xml version="1.0" encoding="utf-8"?>
-<p:sld xmlns:a="http://schemas.openxmlformats.org/drawingml/2006/main" xmlns:r="http://schemas.openxmlformats.org/officeDocument/2006/relationships" xmlns:p="http://schemas.openxmlformats.org/presentationml/2006/main">
-  <p:cSld>
-    <p:spTree>
-      <p:nvGrpSpPr>
-        <p:cNvPr id="1" name=""/>
-        <p:cNvGrpSpPr/>
-        <p:nvPr/>
-      </p:nvGrpSpPr>
-      <p:grpSpPr>
-        <a:xfrm>
-          <a:off x="0" y="0"/>
-          <a:ext cx="0" cy="0"/>
-          <a:chOff x="0" y="0"/>
-          <a:chExt cx="0" cy="0"/>
-        </a:xfrm>
-      </p:grpSpPr>
-      <p:sp>
-        <p:nvSpPr>
-          <p:cNvPr id="3" name="TextBox 2"/>
-          <p:cNvSpPr txBox="1"/>
-          <p:nvPr/>
-        </p:nvSpPr>
-        <p:spPr>
-          <a:xfrm>
-            <a:off x="452511" y="205740"/>
-            <a:ext cx="5486400" cy="320040"/>
-          </a:xfrm>
-          <a:prstGeom prst="rect">
-            <a:avLst/>
-          </a:prstGeom>
-          <a:noFill/>
-        </p:spPr>
-        <p:txBody>
-          <a:bodyPr wrap="square" lIns="0" tIns="0" rIns="0" bIns="0" anchor="t">
-            <a:spAutoFit/>
-          </a:bodyPr>
-          <a:lstStyle/>
-          <a:p>
-            <a:pPr algn="l">
-              <a:lnSpc>
-                <a:spcPct val="115000"/>
-              </a:lnSpc>
-              <a:spcAft>
-                <a:spcPts val="0"/>
-              </a:spcAft>
-            </a:pPr>
-            <a:r>
-              <a:rPr sz="1200" b="0" i="0" spc="140">
-                <a:solidFill>
-                  <a:srgbClr val="7C8886"/>
-                </a:solidFill>
-                <a:latin typeface="Consolas"/>
-              </a:rPr>
-              <a:t>SUITE</a:t>
-            </a:r>
-          </a:p>
-        </p:txBody>
-      </p:sp>
-      <p:sp>
-        <p:nvSpPr>
-          <p:cNvPr id="4" name="TextBox 3"/>
-          <p:cNvSpPr txBox="1"/>
-          <p:nvPr/>
-        </p:nvSpPr>
-        <p:spPr>
-          <a:xfrm>
-            <a:off x="640080" y="777240"/>
-            <a:ext cx="8686800" cy="1005840"/>
-          </a:xfrm>
-          <a:prstGeom prst="rect">
-            <a:avLst/>
-          </a:prstGeom>
-          <a:noFill/>
-        </p:spPr>
-        <p:txBody>
-          <a:bodyPr wrap="square" lIns="0" tIns="0" rIns="0" bIns="0" anchor="t">
-            <a:spAutoFit/>
-          </a:bodyPr>
-          <a:lstStyle/>
-          <a:p>
-            <a:pPr algn="l">
-              <a:lnSpc>
-                <a:spcPct val="100000"/>
-              </a:lnSpc>
-              <a:spcAft>
-                <a:spcPts val="0"/>
-              </a:spcAft>
-            </a:pPr>
-            <a:r>
-              <a:rPr sz="3200" b="1" i="0">
-                <a:solidFill>
-                  <a:srgbClr val="1B2429"/>
-                </a:solidFill>
-                <a:latin typeface="Cambria"/>
-              </a:rPr>
-              <a:t>Prochaines étapes</a:t>
-            </a:r>
-          </a:p>
-        </p:txBody>
-      </p:sp>
-      <p:sp>
-        <p:nvSpPr>
-          <p:cNvPr id="5" name="Rectangle 4"/>
-          <p:cNvSpPr/>
-          <p:nvPr/>
-        </p:nvSpPr>
-        <p:spPr>
-          <a:xfrm>
-            <a:off x="640080" y="2880360"/>
-            <a:ext cx="3456432" cy="38100"/>
-          </a:xfrm>
-          <a:prstGeom prst="rect">
-            <a:avLst/>
-          </a:prstGeom>
-          <a:solidFill>
-            <a:srgbClr val="52605F"/>
-          </a:solidFill>
-          <a:ln>
-            <a:noFill/>
-          </a:ln>
-          <a:effectLst/>
-        </p:spPr>
-        <p:style>
-          <a:lnRef idx="1">
-            <a:schemeClr val="accent1"/>
-          </a:lnRef>
-          <a:fillRef idx="3">
-            <a:schemeClr val="accent1"/>
-          </a:fillRef>
-          <a:effectRef idx="2">
-            <a:schemeClr val="accent1"/>
-          </a:effectRef>
-          <a:fontRef idx="minor">
-            <a:schemeClr val="lt1"/>
-          </a:fontRef>
-        </p:style>
-        <p:txBody>
-          <a:bodyPr rtlCol="0" anchor="ctr"/>
-          <a:lstStyle/>
-          <a:p>
-            <a:pPr algn="ctr"/>
-            <a:endParaRPr sz="2400"/>
-          </a:p>
-        </p:txBody>
-      </p:sp>
-      <p:sp>
-        <p:nvSpPr>
-          <p:cNvPr id="6" name="Rectangle 5"/>
-          <p:cNvSpPr/>
-          <p:nvPr/>
-        </p:nvSpPr>
-        <p:spPr>
-          <a:xfrm>
-            <a:off x="640080" y="2918460"/>
-            <a:ext cx="3456432" cy="2065020"/>
-          </a:xfrm>
-          <a:prstGeom prst="rect">
-            <a:avLst/>
-          </a:prstGeom>
-          <a:solidFill>
-            <a:srgbClr val="FBFBF8"/>
-          </a:solidFill>
-          <a:ln w="9525">
-            <a:solidFill>
-              <a:srgbClr val="D9DDD4"/>
-            </a:solidFill>
-          </a:ln>
-          <a:effectLst/>
-        </p:spPr>
-        <p:style>
-          <a:lnRef idx="1">
-            <a:schemeClr val="accent1"/>
-          </a:lnRef>
-          <a:fillRef idx="3">
-            <a:schemeClr val="accent1"/>
-          </a:fillRef>
-          <a:effectRef idx="2">
-            <a:schemeClr val="accent1"/>
-          </a:effectRef>
-          <a:fontRef idx="minor">
-            <a:schemeClr val="lt1"/>
-          </a:fontRef>
-        </p:style>
-        <p:txBody>
-          <a:bodyPr rtlCol="0" anchor="ctr"/>
-          <a:lstStyle/>
-          <a:p>
-            <a:pPr algn="ctr"/>
-            <a:endParaRPr sz="2400"/>
-          </a:p>
-        </p:txBody>
-      </p:sp>
-      <p:sp>
-        <p:nvSpPr>
-          <p:cNvPr id="7" name="TextBox 6"/>
-          <p:cNvSpPr txBox="1"/>
-          <p:nvPr/>
-        </p:nvSpPr>
-        <p:spPr>
-          <a:xfrm>
-            <a:off x="804672" y="3046476"/>
-            <a:ext cx="3127248" cy="198837"/>
-          </a:xfrm>
-          <a:prstGeom prst="rect">
-            <a:avLst/>
-          </a:prstGeom>
-          <a:noFill/>
-        </p:spPr>
-        <p:txBody>
-          <a:bodyPr wrap="square" lIns="0" tIns="0" rIns="0" bIns="0" anchor="t">
-            <a:spAutoFit/>
-          </a:bodyPr>
-          <a:lstStyle/>
-          <a:p>
-            <a:pPr algn="l">
-              <a:lnSpc>
-                <a:spcPct val="115000"/>
-              </a:lnSpc>
-              <a:spcAft>
-                <a:spcPts val="0"/>
-              </a:spcAft>
-            </a:pPr>
-            <a:r>
-              <a:rPr sz="1200" b="1" i="0" spc="80">
-                <a:solidFill>
-                  <a:srgbClr val="52605F"/>
-                </a:solidFill>
-                <a:latin typeface="Consolas"/>
-              </a:rPr>
-              <a:t>RELEASE</a:t>
-            </a:r>
-          </a:p>
-        </p:txBody>
-      </p:sp>
-      <p:sp>
-        <p:nvSpPr>
-          <p:cNvPr id="8" name="TextBox 7"/>
-          <p:cNvSpPr txBox="1"/>
-          <p:nvPr/>
-        </p:nvSpPr>
-        <p:spPr>
-          <a:xfrm>
-            <a:off x="804672" y="3357372"/>
-            <a:ext cx="3127248" cy="291426"/>
-          </a:xfrm>
-          <a:prstGeom prst="rect">
-            <a:avLst/>
-          </a:prstGeom>
-          <a:noFill/>
-        </p:spPr>
-        <p:txBody>
-          <a:bodyPr wrap="square" lIns="0" tIns="0" rIns="0" bIns="0" anchor="t">
-            <a:spAutoFit/>
-          </a:bodyPr>
-          <a:lstStyle/>
-          <a:p>
-            <a:pPr algn="l">
-              <a:lnSpc>
-                <a:spcPct val="115000"/>
-              </a:lnSpc>
-              <a:spcAft>
-                <a:spcPts val="0"/>
-              </a:spcAft>
-            </a:pPr>
-            <a:r>
-              <a:rPr b="1" i="0">
-                <a:solidFill>
-                  <a:srgbClr val="1B2429"/>
-                </a:solidFill>
-                <a:latin typeface="Cambria"/>
-              </a:rPr>
-              <a:t>Tag officiel</a:t>
-            </a:r>
-          </a:p>
-        </p:txBody>
-      </p:sp>
-      <p:sp>
-        <p:nvSpPr>
-          <p:cNvPr id="9" name="TextBox 8"/>
-          <p:cNvSpPr txBox="1"/>
-          <p:nvPr/>
-        </p:nvSpPr>
-        <p:spPr>
-          <a:xfrm>
-            <a:off x="804672" y="3723132"/>
-            <a:ext cx="3127248" cy="241285"/>
-          </a:xfrm>
-          <a:prstGeom prst="rect">
-            <a:avLst/>
-          </a:prstGeom>
-          <a:noFill/>
-        </p:spPr>
-        <p:txBody>
-          <a:bodyPr wrap="square" lIns="0" tIns="0" rIns="0" bIns="0" anchor="t">
-            <a:spAutoFit/>
-          </a:bodyPr>
-          <a:lstStyle/>
-          <a:p>
-            <a:pPr algn="l">
-              <a:lnSpc>
-                <a:spcPct val="120000"/>
-              </a:lnSpc>
-              <a:spcAft>
-                <a:spcPts val="0"/>
-              </a:spcAft>
-            </a:pPr>
-            <a:r>
-              <a:rPr sz="1400" b="0" i="0">
-                <a:solidFill>
-                  <a:srgbClr val="52605F"/>
-                </a:solidFill>
-                <a:latin typeface="Calibri"/>
-              </a:rPr>
-              <a:t>Finaliser et publier la release 1.2.0.</a:t>
-            </a:r>
-          </a:p>
-        </p:txBody>
-      </p:sp>
-      <p:sp>
-        <p:nvSpPr>
-          <p:cNvPr id="10" name="Rectangle 9"/>
-          <p:cNvSpPr/>
-          <p:nvPr/>
-        </p:nvSpPr>
-        <p:spPr>
-          <a:xfrm>
-            <a:off x="4325112" y="2880360"/>
-            <a:ext cx="3456432" cy="38100"/>
-          </a:xfrm>
-          <a:prstGeom prst="rect">
-            <a:avLst/>
-          </a:prstGeom>
-          <a:solidFill>
-            <a:srgbClr val="A8752A"/>
-          </a:solidFill>
-          <a:ln>
-            <a:noFill/>
-          </a:ln>
-          <a:effectLst/>
-        </p:spPr>
-        <p:style>
-          <a:lnRef idx="1">
-            <a:schemeClr val="accent1"/>
-          </a:lnRef>
-          <a:fillRef idx="3">
-            <a:schemeClr val="accent1"/>
-          </a:fillRef>
-          <a:effectRef idx="2">
-            <a:schemeClr val="accent1"/>
-          </a:effectRef>
-          <a:fontRef idx="minor">
-            <a:schemeClr val="lt1"/>
-          </a:fontRef>
-        </p:style>
-        <p:txBody>
-          <a:bodyPr rtlCol="0" anchor="ctr"/>
-          <a:lstStyle/>
-          <a:p>
-            <a:pPr algn="ctr"/>
-            <a:endParaRPr sz="2400"/>
-          </a:p>
-        </p:txBody>
-      </p:sp>
-      <p:sp>
-        <p:nvSpPr>
-          <p:cNvPr id="11" name="Rectangle 10"/>
-          <p:cNvSpPr/>
-          <p:nvPr/>
-        </p:nvSpPr>
-        <p:spPr>
-          <a:xfrm>
-            <a:off x="4325112" y="2918460"/>
-            <a:ext cx="3456432" cy="2065020"/>
-          </a:xfrm>
-          <a:prstGeom prst="rect">
-            <a:avLst/>
-          </a:prstGeom>
-          <a:solidFill>
-            <a:srgbClr val="FBFBF8"/>
-          </a:solidFill>
-          <a:ln w="9525">
-            <a:solidFill>
-              <a:srgbClr val="D9DDD4"/>
-            </a:solidFill>
-          </a:ln>
-          <a:effectLst/>
-        </p:spPr>
-        <p:style>
-          <a:lnRef idx="1">
-            <a:schemeClr val="accent1"/>
-          </a:lnRef>
-          <a:fillRef idx="3">
-            <a:schemeClr val="accent1"/>
-          </a:fillRef>
-          <a:effectRef idx="2">
-            <a:schemeClr val="accent1"/>
-          </a:effectRef>
-          <a:fontRef idx="minor">
-            <a:schemeClr val="lt1"/>
-          </a:fontRef>
-        </p:style>
-        <p:txBody>
-          <a:bodyPr rtlCol="0" anchor="ctr"/>
-          <a:lstStyle/>
-          <a:p>
-            <a:pPr algn="ctr"/>
-            <a:endParaRPr sz="2400"/>
-          </a:p>
-        </p:txBody>
-      </p:sp>
-      <p:sp>
-        <p:nvSpPr>
-          <p:cNvPr id="12" name="TextBox 11"/>
-          <p:cNvSpPr txBox="1"/>
-          <p:nvPr/>
-        </p:nvSpPr>
-        <p:spPr>
-          <a:xfrm>
-            <a:off x="4489704" y="3046476"/>
-            <a:ext cx="3127248" cy="198837"/>
-          </a:xfrm>
-          <a:prstGeom prst="rect">
-            <a:avLst/>
-          </a:prstGeom>
-          <a:noFill/>
-        </p:spPr>
-        <p:txBody>
-          <a:bodyPr wrap="square" lIns="0" tIns="0" rIns="0" bIns="0" anchor="t">
-            <a:spAutoFit/>
-          </a:bodyPr>
-          <a:lstStyle/>
-          <a:p>
-            <a:pPr algn="l">
-              <a:lnSpc>
-                <a:spcPct val="115000"/>
-              </a:lnSpc>
-              <a:spcAft>
-                <a:spcPts val="0"/>
-              </a:spcAft>
-            </a:pPr>
-            <a:r>
-              <a:rPr sz="1200" b="1" i="0" spc="80">
-                <a:solidFill>
-                  <a:srgbClr val="A8752A"/>
-                </a:solidFill>
-                <a:latin typeface="Consolas"/>
-              </a:rPr>
-              <a:t>PERFORMANCE</a:t>
-            </a:r>
-          </a:p>
-        </p:txBody>
-      </p:sp>
-      <p:sp>
-        <p:nvSpPr>
-          <p:cNvPr id="13" name="TextBox 12"/>
-          <p:cNvSpPr txBox="1"/>
-          <p:nvPr/>
-        </p:nvSpPr>
-        <p:spPr>
-          <a:xfrm>
-            <a:off x="4489704" y="3357372"/>
-            <a:ext cx="3127248" cy="291426"/>
-          </a:xfrm>
-          <a:prstGeom prst="rect">
-            <a:avLst/>
-          </a:prstGeom>
-          <a:noFill/>
-        </p:spPr>
-        <p:txBody>
-          <a:bodyPr wrap="square" lIns="0" tIns="0" rIns="0" bIns="0" anchor="t">
-            <a:spAutoFit/>
-          </a:bodyPr>
-          <a:lstStyle/>
-          <a:p>
-            <a:pPr algn="l">
-              <a:lnSpc>
-                <a:spcPct val="115000"/>
-              </a:lnSpc>
-              <a:spcAft>
-                <a:spcPts val="0"/>
-              </a:spcAft>
-            </a:pPr>
-            <a:r>
-              <a:rPr b="1" i="0">
-                <a:solidFill>
-                  <a:srgbClr val="1B2429"/>
-                </a:solidFill>
-                <a:latin typeface="Cambria"/>
-              </a:rPr>
-              <a:t>Gros corpus</a:t>
-            </a:r>
-          </a:p>
-        </p:txBody>
-      </p:sp>
-      <p:sp>
-        <p:nvSpPr>
-          <p:cNvPr id="14" name="TextBox 13"/>
-          <p:cNvSpPr txBox="1"/>
-          <p:nvPr/>
-        </p:nvSpPr>
-        <p:spPr>
-          <a:xfrm>
-            <a:off x="4489704" y="3723132"/>
-            <a:ext cx="3127248" cy="499817"/>
-          </a:xfrm>
-          <a:prstGeom prst="rect">
-            <a:avLst/>
-          </a:prstGeom>
-          <a:noFill/>
-        </p:spPr>
-        <p:txBody>
-          <a:bodyPr wrap="square" lIns="0" tIns="0" rIns="0" bIns="0" anchor="t">
-            <a:spAutoFit/>
-          </a:bodyPr>
-          <a:lstStyle/>
-          <a:p>
-            <a:pPr algn="l">
-              <a:lnSpc>
-                <a:spcPct val="120000"/>
-              </a:lnSpc>
-              <a:spcAft>
-                <a:spcPts val="0"/>
-              </a:spcAft>
-            </a:pPr>
-            <a:r>
-              <a:rPr sz="1400" b="0" i="0">
-                <a:solidFill>
-                  <a:srgbClr val="52605F"/>
-                </a:solidFill>
-                <a:latin typeface="Calibri"/>
-              </a:rPr>
-              <a:t>Fiabiliser la détection de variantes sur les très gros volumes.</a:t>
-            </a:r>
-          </a:p>
-        </p:txBody>
-      </p:sp>
-      <p:sp>
-        <p:nvSpPr>
-          <p:cNvPr id="15" name="Rectangle 14"/>
-          <p:cNvSpPr/>
-          <p:nvPr/>
-        </p:nvSpPr>
-        <p:spPr>
-          <a:xfrm>
-            <a:off x="8010144" y="2880360"/>
-            <a:ext cx="3456432" cy="38100"/>
-          </a:xfrm>
-          <a:prstGeom prst="rect">
-            <a:avLst/>
-          </a:prstGeom>
-          <a:solidFill>
-            <a:srgbClr val="0E6B66"/>
-          </a:solidFill>
-          <a:ln>
-            <a:noFill/>
-          </a:ln>
-          <a:effectLst/>
-        </p:spPr>
-        <p:style>
-          <a:lnRef idx="1">
-            <a:schemeClr val="accent1"/>
-          </a:lnRef>
-          <a:fillRef idx="3">
-            <a:schemeClr val="accent1"/>
-          </a:fillRef>
-          <a:effectRef idx="2">
-            <a:schemeClr val="accent1"/>
-          </a:effectRef>
-          <a:fontRef idx="minor">
-            <a:schemeClr val="lt1"/>
-          </a:fontRef>
-        </p:style>
-        <p:txBody>
-          <a:bodyPr rtlCol="0" anchor="ctr"/>
-          <a:lstStyle/>
-          <a:p>
-            <a:pPr algn="ctr"/>
-            <a:endParaRPr sz="2400"/>
-          </a:p>
-        </p:txBody>
-      </p:sp>
-      <p:sp>
-        <p:nvSpPr>
-          <p:cNvPr id="16" name="Rectangle 15"/>
-          <p:cNvSpPr/>
-          <p:nvPr/>
-        </p:nvSpPr>
-        <p:spPr>
-          <a:xfrm>
-            <a:off x="8010144" y="2918460"/>
-            <a:ext cx="3456432" cy="2065020"/>
-          </a:xfrm>
-          <a:prstGeom prst="rect">
-            <a:avLst/>
-          </a:prstGeom>
-          <a:solidFill>
-            <a:srgbClr val="FBFBF8"/>
-          </a:solidFill>
-          <a:ln w="9525">
-            <a:solidFill>
-              <a:srgbClr val="D9DDD4"/>
-            </a:solidFill>
-          </a:ln>
-          <a:effectLst/>
-        </p:spPr>
-        <p:style>
-          <a:lnRef idx="1">
-            <a:schemeClr val="accent1"/>
-          </a:lnRef>
-          <a:fillRef idx="3">
-            <a:schemeClr val="accent1"/>
-          </a:fillRef>
-          <a:effectRef idx="2">
-            <a:schemeClr val="accent1"/>
-          </a:effectRef>
-          <a:fontRef idx="minor">
-            <a:schemeClr val="lt1"/>
-          </a:fontRef>
-        </p:style>
-        <p:txBody>
-          <a:bodyPr rtlCol="0" anchor="ctr"/>
-          <a:lstStyle/>
-          <a:p>
-            <a:pPr algn="ctr"/>
-            <a:endParaRPr sz="2400"/>
-          </a:p>
-        </p:txBody>
-      </p:sp>
-      <p:sp>
-        <p:nvSpPr>
-          <p:cNvPr id="17" name="TextBox 16"/>
-          <p:cNvSpPr txBox="1"/>
-          <p:nvPr/>
-        </p:nvSpPr>
-        <p:spPr>
-          <a:xfrm>
-            <a:off x="8174736" y="3046476"/>
-            <a:ext cx="3127248" cy="198837"/>
-          </a:xfrm>
-          <a:prstGeom prst="rect">
-            <a:avLst/>
-          </a:prstGeom>
-          <a:noFill/>
-        </p:spPr>
-        <p:txBody>
-          <a:bodyPr wrap="square" lIns="0" tIns="0" rIns="0" bIns="0" anchor="t">
-            <a:spAutoFit/>
-          </a:bodyPr>
-          <a:lstStyle/>
-          <a:p>
-            <a:pPr algn="l">
-              <a:lnSpc>
-                <a:spcPct val="115000"/>
-              </a:lnSpc>
-              <a:spcAft>
-                <a:spcPts val="0"/>
-              </a:spcAft>
-            </a:pPr>
-            <a:r>
-              <a:rPr sz="1200" b="1" i="0" spc="80">
-                <a:solidFill>
-                  <a:srgbClr val="0E6B66"/>
-                </a:solidFill>
-                <a:latin typeface="Consolas"/>
-              </a:rPr>
-              <a:t>PRÊT</a:t>
-            </a:r>
-          </a:p>
-        </p:txBody>
-      </p:sp>
-      <p:sp>
-        <p:nvSpPr>
-          <p:cNvPr id="18" name="TextBox 17"/>
-          <p:cNvSpPr txBox="1"/>
-          <p:nvPr/>
-        </p:nvSpPr>
-        <p:spPr>
-          <a:xfrm>
-            <a:off x="8174736" y="3357372"/>
-            <a:ext cx="3127248" cy="291426"/>
-          </a:xfrm>
-          <a:prstGeom prst="rect">
-            <a:avLst/>
-          </a:prstGeom>
-          <a:noFill/>
-        </p:spPr>
-        <p:txBody>
-          <a:bodyPr wrap="square" lIns="0" tIns="0" rIns="0" bIns="0" anchor="t">
-            <a:spAutoFit/>
-          </a:bodyPr>
-          <a:lstStyle/>
-          <a:p>
-            <a:pPr algn="l">
-              <a:lnSpc>
-                <a:spcPct val="115000"/>
-              </a:lnSpc>
-              <a:spcAft>
-                <a:spcPts val="0"/>
-              </a:spcAft>
-            </a:pPr>
-            <a:r>
-              <a:rPr b="1" i="0">
-                <a:solidFill>
-                  <a:srgbClr val="1B2429"/>
-                </a:solidFill>
-                <a:latin typeface="Cambria"/>
-              </a:rPr>
-              <a:t>Guide du curateur</a:t>
-            </a:r>
-          </a:p>
-        </p:txBody>
-      </p:sp>
-      <p:sp>
-        <p:nvSpPr>
-          <p:cNvPr id="19" name="TextBox 18"/>
-          <p:cNvSpPr txBox="1"/>
-          <p:nvPr/>
-        </p:nvSpPr>
-        <p:spPr>
-          <a:xfrm>
-            <a:off x="8174736" y="3723132"/>
-            <a:ext cx="3127248" cy="499817"/>
-          </a:xfrm>
-          <a:prstGeom prst="rect">
-            <a:avLst/>
-          </a:prstGeom>
-          <a:noFill/>
-        </p:spPr>
-        <p:txBody>
-          <a:bodyPr wrap="square" lIns="0" tIns="0" rIns="0" bIns="0" anchor="t">
-            <a:spAutoFit/>
-          </a:bodyPr>
-          <a:lstStyle/>
-          <a:p>
-            <a:pPr algn="l">
-              <a:lnSpc>
-                <a:spcPct val="120000"/>
-              </a:lnSpc>
-              <a:spcAft>
-                <a:spcPts val="0"/>
-              </a:spcAft>
-            </a:pPr>
-            <a:r>
-              <a:rPr sz="1400" b="0" i="0">
-                <a:solidFill>
-                  <a:srgbClr val="52605F"/>
-                </a:solidFill>
-                <a:latin typeface="Calibri"/>
-              </a:rPr>
-              <a:t>Déjà rédigé — prêt à l'usage dès aujourd'hui.</a:t>
-            </a:r>
-          </a:p>
-        </p:txBody>
-      </p:sp>
-      <p:sp>
-        <p:nvSpPr>
-          <p:cNvPr id="21" name="TextBox 20"/>
-          <p:cNvSpPr txBox="1"/>
-          <p:nvPr/>
-        </p:nvSpPr>
-        <p:spPr>
-          <a:xfrm>
-            <a:off x="11002975" y="6355080"/>
-            <a:ext cx="914400" cy="320040"/>
-          </a:xfrm>
-          <a:prstGeom prst="rect">
-            <a:avLst/>
-          </a:prstGeom>
-          <a:noFill/>
-        </p:spPr>
-        <p:txBody>
-          <a:bodyPr wrap="square" lIns="0" tIns="0" rIns="0" bIns="0" anchor="t">
-            <a:spAutoFit/>
-          </a:bodyPr>
-          <a:lstStyle/>
-          <a:p>
-            <a:pPr algn="r">
-              <a:lnSpc>
-                <a:spcPct val="115000"/>
-              </a:lnSpc>
-              <a:spcAft>
-                <a:spcPts val="0"/>
-              </a:spcAft>
-            </a:pPr>
-            <a:r>
-              <a:rPr sz="1050" b="0" i="0">
-                <a:solidFill>
-                  <a:srgbClr val="7C8886"/>
-                </a:solidFill>
-                <a:latin typeface="Consolas"/>
-              </a:rPr>
-              <a:t>12 / 12</a:t>
-            </a:r>
-          </a:p>
-        </p:txBody>
-      </p:sp>
-    </p:spTree>
-  </p:cSld>
-  <p:clrMapOvr>
-    <a:masterClrMapping/>
-  </p:clrMapOvr>
-</p:sld>
-</file>
-
 <file path=ppt/slides/slide2.xml><?xml version="1.0" encoding="utf-8"?>
 <p:sld xmlns:a="http://schemas.openxmlformats.org/drawingml/2006/main" xmlns:r="http://schemas.openxmlformats.org/officeDocument/2006/relationships" xmlns:p="http://schemas.openxmlformats.org/presentationml/2006/main">
   <p:cSld>
@@ -7922,13 +6061,13 @@
               <a:t>Les </a:t>
             </a:r>
             <a:r>
-              <a:rPr b="0" i="0" dirty="0" err="1">
-                <a:solidFill>
-                  <a:srgbClr val="52605F"/>
-                </a:solidFill>
-                <a:latin typeface="Calibri"/>
-              </a:rPr>
-              <a:t>thésaurus</a:t>
+              <a:rPr lang="fr-FR" b="0" i="0" dirty="0">
+                <a:solidFill>
+                  <a:srgbClr val="52605F"/>
+                </a:solidFill>
+                <a:latin typeface="Calibri"/>
+              </a:rPr>
+              <a:t>ressources</a:t>
             </a:r>
             <a:r>
               <a:rPr b="0" i="0" dirty="0">
@@ -9019,271 +7158,13 @@
       </p:sp>
       <p:sp>
         <p:nvSpPr>
-          <p:cNvPr id="5" name="TextBox 4"/>
-          <p:cNvSpPr txBox="1"/>
-          <p:nvPr/>
-        </p:nvSpPr>
-        <p:spPr>
-          <a:xfrm>
-            <a:off x="640080" y="1600200"/>
-            <a:ext cx="8961120" cy="666849"/>
-          </a:xfrm>
-          <a:prstGeom prst="rect">
-            <a:avLst/>
-          </a:prstGeom>
-          <a:noFill/>
-        </p:spPr>
-        <p:txBody>
-          <a:bodyPr wrap="square" lIns="0" tIns="0" rIns="0" bIns="0" anchor="t">
-            <a:spAutoFit/>
-          </a:bodyPr>
-          <a:lstStyle/>
-          <a:p>
-            <a:pPr algn="l">
-              <a:lnSpc>
-                <a:spcPct val="125000"/>
-              </a:lnSpc>
-              <a:spcAft>
-                <a:spcPts val="0"/>
-              </a:spcAft>
-            </a:pPr>
-            <a:r>
-              <a:rPr b="0" i="0" dirty="0">
-                <a:solidFill>
-                  <a:srgbClr val="52605F"/>
-                </a:solidFill>
-                <a:latin typeface="Calibri"/>
-              </a:rPr>
-              <a:t>Une </a:t>
-            </a:r>
-            <a:r>
-              <a:rPr b="0" i="0" dirty="0" err="1">
-                <a:solidFill>
-                  <a:srgbClr val="52605F"/>
-                </a:solidFill>
-                <a:latin typeface="Calibri"/>
-              </a:rPr>
-              <a:t>seule</a:t>
-            </a:r>
-            <a:r>
-              <a:rPr b="0" i="0" dirty="0">
-                <a:solidFill>
-                  <a:srgbClr val="52605F"/>
-                </a:solidFill>
-                <a:latin typeface="Calibri"/>
-              </a:rPr>
-              <a:t> </a:t>
-            </a:r>
-            <a:r>
-              <a:rPr b="0" i="0" dirty="0" err="1">
-                <a:solidFill>
-                  <a:srgbClr val="52605F"/>
-                </a:solidFill>
-                <a:latin typeface="Calibri"/>
-              </a:rPr>
-              <a:t>ligne</a:t>
-            </a:r>
-            <a:r>
-              <a:rPr b="0" i="0" dirty="0">
-                <a:solidFill>
-                  <a:srgbClr val="52605F"/>
-                </a:solidFill>
-                <a:latin typeface="Calibri"/>
-              </a:rPr>
-              <a:t> de </a:t>
-            </a:r>
-            <a:r>
-              <a:rPr b="0" i="0" dirty="0" err="1">
-                <a:solidFill>
-                  <a:srgbClr val="52605F"/>
-                </a:solidFill>
-                <a:latin typeface="Calibri"/>
-              </a:rPr>
-              <a:t>commande</a:t>
-            </a:r>
-            <a:r>
-              <a:rPr b="0" i="0" dirty="0">
-                <a:solidFill>
-                  <a:srgbClr val="52605F"/>
-                </a:solidFill>
-                <a:latin typeface="Calibri"/>
-              </a:rPr>
-              <a:t>, trois sous-</a:t>
-            </a:r>
-            <a:r>
-              <a:rPr b="0" i="0" dirty="0" err="1">
-                <a:solidFill>
-                  <a:srgbClr val="52605F"/>
-                </a:solidFill>
-                <a:latin typeface="Calibri"/>
-              </a:rPr>
-              <a:t>commandes</a:t>
-            </a:r>
-            <a:r>
-              <a:rPr b="0" i="0" dirty="0">
-                <a:solidFill>
-                  <a:srgbClr val="52605F"/>
-                </a:solidFill>
-                <a:latin typeface="Calibri"/>
-              </a:rPr>
-              <a:t> — </a:t>
-            </a:r>
-            <a:r>
-              <a:rPr b="0" i="0" dirty="0" err="1">
-                <a:solidFill>
-                  <a:srgbClr val="52605F"/>
-                </a:solidFill>
-                <a:latin typeface="Calibri"/>
-              </a:rPr>
-              <a:t>une</a:t>
-            </a:r>
-            <a:r>
-              <a:rPr b="0" i="0" dirty="0">
-                <a:solidFill>
-                  <a:srgbClr val="52605F"/>
-                </a:solidFill>
-                <a:latin typeface="Calibri"/>
-              </a:rPr>
-              <a:t> </a:t>
-            </a:r>
-            <a:r>
-              <a:rPr b="0" i="0" dirty="0" err="1">
-                <a:solidFill>
-                  <a:srgbClr val="52605F"/>
-                </a:solidFill>
-                <a:latin typeface="Calibri"/>
-              </a:rPr>
-              <a:t>seule</a:t>
-            </a:r>
-            <a:r>
-              <a:rPr b="0" i="0" dirty="0">
-                <a:solidFill>
-                  <a:srgbClr val="52605F"/>
-                </a:solidFill>
-                <a:latin typeface="Calibri"/>
-              </a:rPr>
-              <a:t> correspond à </a:t>
-            </a:r>
-            <a:r>
-              <a:rPr b="0" i="0" dirty="0" err="1">
-                <a:solidFill>
-                  <a:srgbClr val="52605F"/>
-                </a:solidFill>
-                <a:latin typeface="Calibri"/>
-              </a:rPr>
-              <a:t>notre</a:t>
-            </a:r>
-            <a:r>
-              <a:rPr b="0" i="0" dirty="0">
-                <a:solidFill>
-                  <a:srgbClr val="52605F"/>
-                </a:solidFill>
-                <a:latin typeface="Calibri"/>
-              </a:rPr>
-              <a:t> </a:t>
-            </a:r>
-            <a:r>
-              <a:rPr b="0" i="0" dirty="0" err="1">
-                <a:solidFill>
-                  <a:srgbClr val="52605F"/>
-                </a:solidFill>
-                <a:latin typeface="Calibri"/>
-              </a:rPr>
-              <a:t>priorité</a:t>
-            </a:r>
-            <a:r>
-              <a:rPr b="0" i="0" dirty="0">
-                <a:solidFill>
-                  <a:srgbClr val="52605F"/>
-                </a:solidFill>
-                <a:latin typeface="Calibri"/>
-              </a:rPr>
-              <a:t> : </a:t>
-            </a:r>
-            <a:r>
-              <a:rPr b="0" i="0" dirty="0" err="1">
-                <a:solidFill>
-                  <a:srgbClr val="52605F"/>
-                </a:solidFill>
-                <a:latin typeface="Calibri"/>
-              </a:rPr>
-              <a:t>mettre</a:t>
-            </a:r>
-            <a:r>
-              <a:rPr b="0" i="0" dirty="0">
-                <a:solidFill>
-                  <a:srgbClr val="52605F"/>
-                </a:solidFill>
-                <a:latin typeface="Calibri"/>
-              </a:rPr>
-              <a:t> à jour </a:t>
-            </a:r>
-            <a:r>
-              <a:rPr b="0" i="0" dirty="0" err="1">
-                <a:solidFill>
-                  <a:srgbClr val="52605F"/>
-                </a:solidFill>
-                <a:latin typeface="Calibri"/>
-              </a:rPr>
-              <a:t>une</a:t>
-            </a:r>
-            <a:r>
-              <a:rPr b="0" i="0" dirty="0">
-                <a:solidFill>
-                  <a:srgbClr val="52605F"/>
-                </a:solidFill>
-                <a:latin typeface="Calibri"/>
-              </a:rPr>
-              <a:t> </a:t>
-            </a:r>
-            <a:r>
-              <a:rPr b="0" i="0" dirty="0" err="1">
-                <a:solidFill>
-                  <a:srgbClr val="52605F"/>
-                </a:solidFill>
-                <a:latin typeface="Calibri"/>
-              </a:rPr>
-              <a:t>ressource</a:t>
-            </a:r>
-            <a:r>
-              <a:rPr b="0" i="0" dirty="0">
-                <a:solidFill>
-                  <a:srgbClr val="52605F"/>
-                </a:solidFill>
-                <a:latin typeface="Calibri"/>
-              </a:rPr>
-              <a:t> </a:t>
-            </a:r>
-            <a:r>
-              <a:rPr b="0" i="0" dirty="0" err="1">
-                <a:solidFill>
-                  <a:srgbClr val="52605F"/>
-                </a:solidFill>
-                <a:latin typeface="Calibri"/>
-              </a:rPr>
-              <a:t>existante</a:t>
-            </a:r>
-            <a:r>
-              <a:rPr b="0" i="0" dirty="0">
-                <a:solidFill>
-                  <a:srgbClr val="52605F"/>
-                </a:solidFill>
-                <a:latin typeface="Calibri"/>
-              </a:rPr>
-              <a:t>.</a:t>
-            </a:r>
-          </a:p>
-        </p:txBody>
-      </p:sp>
-      <p:sp>
-        <p:nvSpPr>
           <p:cNvPr id="6" name="Rectangle 5"/>
           <p:cNvSpPr/>
           <p:nvPr/>
         </p:nvSpPr>
         <p:spPr>
           <a:xfrm>
-            <a:off x="640080" y="2880360"/>
+            <a:off x="640080" y="2183883"/>
             <a:ext cx="3456432" cy="38100"/>
           </a:xfrm>
           <a:prstGeom prst="rect">
@@ -9328,7 +7209,7 @@
         </p:nvSpPr>
         <p:spPr>
           <a:xfrm>
-            <a:off x="640080" y="2918460"/>
+            <a:off x="640080" y="2221983"/>
             <a:ext cx="3520440" cy="3045654"/>
           </a:xfrm>
           <a:prstGeom prst="rect">
@@ -9375,7 +7256,7 @@
         </p:nvSpPr>
         <p:spPr>
           <a:xfrm>
-            <a:off x="804672" y="3046476"/>
+            <a:off x="804672" y="2349999"/>
             <a:ext cx="3127248" cy="198837"/>
           </a:xfrm>
           <a:prstGeom prst="rect">
@@ -9417,7 +7298,7 @@
         </p:nvSpPr>
         <p:spPr>
           <a:xfrm>
-            <a:off x="804672" y="3357372"/>
+            <a:off x="804672" y="2660895"/>
             <a:ext cx="3127248" cy="291426"/>
           </a:xfrm>
           <a:prstGeom prst="rect">
@@ -9459,7 +7340,7 @@
         </p:nvSpPr>
         <p:spPr>
           <a:xfrm>
-            <a:off x="804672" y="3723132"/>
+            <a:off x="804672" y="3026655"/>
             <a:ext cx="3127248" cy="758349"/>
           </a:xfrm>
           <a:prstGeom prst="rect">
@@ -9645,7 +7526,7 @@
         </p:nvSpPr>
         <p:spPr>
           <a:xfrm>
-            <a:off x="804672" y="5175504"/>
+            <a:off x="804672" y="4479027"/>
             <a:ext cx="3127248" cy="9525"/>
           </a:xfrm>
           <a:prstGeom prst="rect">
@@ -9690,7 +7571,7 @@
         </p:nvSpPr>
         <p:spPr>
           <a:xfrm>
-            <a:off x="804672" y="5266944"/>
+            <a:off x="804672" y="4570467"/>
             <a:ext cx="3127248" cy="618183"/>
           </a:xfrm>
           <a:prstGeom prst="rect">
@@ -9815,7 +7696,7 @@
         </p:nvSpPr>
         <p:spPr>
           <a:xfrm>
-            <a:off x="4325112" y="2880360"/>
+            <a:off x="4325112" y="2183883"/>
             <a:ext cx="3456432" cy="38100"/>
           </a:xfrm>
           <a:prstGeom prst="rect">
@@ -9860,7 +7741,7 @@
         </p:nvSpPr>
         <p:spPr>
           <a:xfrm>
-            <a:off x="4325112" y="2918460"/>
+            <a:off x="4325112" y="2221983"/>
             <a:ext cx="3456432" cy="3045654"/>
           </a:xfrm>
           <a:prstGeom prst="rect">
@@ -9907,7 +7788,7 @@
         </p:nvSpPr>
         <p:spPr>
           <a:xfrm>
-            <a:off x="4489704" y="3046476"/>
+            <a:off x="4489704" y="2349999"/>
             <a:ext cx="3127248" cy="198837"/>
           </a:xfrm>
           <a:prstGeom prst="rect">
@@ -9949,7 +7830,7 @@
         </p:nvSpPr>
         <p:spPr>
           <a:xfrm>
-            <a:off x="4489704" y="3357372"/>
+            <a:off x="4489704" y="2660895"/>
             <a:ext cx="3127248" cy="291426"/>
           </a:xfrm>
           <a:prstGeom prst="rect">
@@ -10042,7 +7923,7 @@
         </p:nvSpPr>
         <p:spPr>
           <a:xfrm>
-            <a:off x="4489704" y="3723132"/>
+            <a:off x="4489704" y="3026655"/>
             <a:ext cx="3127248" cy="758349"/>
           </a:xfrm>
           <a:prstGeom prst="rect">
@@ -10084,7 +7965,7 @@
         </p:nvSpPr>
         <p:spPr>
           <a:xfrm>
-            <a:off x="4489704" y="5175504"/>
+            <a:off x="4489704" y="4479027"/>
             <a:ext cx="3127248" cy="9525"/>
           </a:xfrm>
           <a:prstGeom prst="rect">
@@ -10129,7 +8010,7 @@
         </p:nvSpPr>
         <p:spPr>
           <a:xfrm>
-            <a:off x="4489704" y="5266944"/>
+            <a:off x="4489704" y="4570467"/>
             <a:ext cx="3127248" cy="618183"/>
           </a:xfrm>
           <a:prstGeom prst="rect">
@@ -10277,7 +8158,7 @@
         </p:nvSpPr>
         <p:spPr>
           <a:xfrm>
-            <a:off x="8010144" y="2880360"/>
+            <a:off x="8010144" y="2183883"/>
             <a:ext cx="3456432" cy="38100"/>
           </a:xfrm>
           <a:prstGeom prst="rect">
@@ -10322,7 +8203,7 @@
         </p:nvSpPr>
         <p:spPr>
           <a:xfrm>
-            <a:off x="8010144" y="2918460"/>
+            <a:off x="8010144" y="2221983"/>
             <a:ext cx="3541776" cy="3045654"/>
           </a:xfrm>
           <a:prstGeom prst="rect">
@@ -10369,7 +8250,7 @@
         </p:nvSpPr>
         <p:spPr>
           <a:xfrm>
-            <a:off x="8174736" y="3046476"/>
+            <a:off x="8174736" y="2349999"/>
             <a:ext cx="3127248" cy="198837"/>
           </a:xfrm>
           <a:prstGeom prst="rect">
@@ -10411,7 +8292,7 @@
         </p:nvSpPr>
         <p:spPr>
           <a:xfrm>
-            <a:off x="8174736" y="3357372"/>
+            <a:off x="8174736" y="2660895"/>
             <a:ext cx="3127248" cy="291362"/>
           </a:xfrm>
           <a:prstGeom prst="rect">
@@ -10453,7 +8334,7 @@
         </p:nvSpPr>
         <p:spPr>
           <a:xfrm>
-            <a:off x="8174736" y="3723132"/>
+            <a:off x="8174736" y="3026655"/>
             <a:ext cx="3127248" cy="758349"/>
           </a:xfrm>
           <a:prstGeom prst="rect">
@@ -10495,7 +8376,7 @@
         </p:nvSpPr>
         <p:spPr>
           <a:xfrm>
-            <a:off x="8174736" y="5175504"/>
+            <a:off x="8174736" y="4479027"/>
             <a:ext cx="3127248" cy="9525"/>
           </a:xfrm>
           <a:prstGeom prst="rect">
@@ -10540,7 +8421,7 @@
         </p:nvSpPr>
         <p:spPr>
           <a:xfrm>
-            <a:off x="8174736" y="5266944"/>
+            <a:off x="8174736" y="4570467"/>
             <a:ext cx="3127248" cy="618183"/>
           </a:xfrm>
           <a:prstGeom prst="rect">
@@ -11962,7 +9843,7 @@
         <p:spPr>
           <a:xfrm>
             <a:off x="640080" y="777240"/>
-            <a:ext cx="8686800" cy="1005840"/>
+            <a:ext cx="8686800" cy="492443"/>
           </a:xfrm>
           <a:prstGeom prst="rect">
             <a:avLst/>
@@ -11984,14 +9865,47 @@
               </a:spcAft>
             </a:pPr>
             <a:r>
-              <a:rPr sz="3200" b="1" i="0">
+              <a:rPr sz="3200" b="1" i="0" dirty="0">
                 <a:solidFill>
                   <a:srgbClr val="1B2429"/>
                 </a:solidFill>
                 <a:latin typeface="Cambria"/>
               </a:rPr>
-              <a:t>Trois listes, jamais mélangées</a:t>
-            </a:r>
+              <a:t>Trois</a:t>
+            </a:r>
+            <a:r>
+              <a:rPr lang="fr-FR" sz="3200" b="1" i="0" dirty="0">
+                <a:solidFill>
+                  <a:srgbClr val="1B2429"/>
+                </a:solidFill>
+                <a:latin typeface="Cambria"/>
+              </a:rPr>
+              <a:t> indicateurs =&gt; trois</a:t>
+            </a:r>
+            <a:r>
+              <a:rPr sz="3200" b="1" i="0" dirty="0">
+                <a:solidFill>
+                  <a:srgbClr val="1B2429"/>
+                </a:solidFill>
+                <a:latin typeface="Cambria"/>
+              </a:rPr>
+              <a:t> </a:t>
+            </a:r>
+            <a:r>
+              <a:rPr sz="3200" b="1" i="0" dirty="0" err="1">
+                <a:solidFill>
+                  <a:srgbClr val="1B2429"/>
+                </a:solidFill>
+                <a:latin typeface="Cambria"/>
+              </a:rPr>
+              <a:t>listes</a:t>
+            </a:r>
+            <a:endParaRPr sz="3200" b="1" i="0" dirty="0">
+              <a:solidFill>
+                <a:srgbClr val="1B2429"/>
+              </a:solidFill>
+              <a:latin typeface="Cambria"/>
+            </a:endParaRPr>
           </a:p>
         </p:txBody>
       </p:sp>
@@ -12026,14 +9940,92 @@
               </a:spcAft>
             </a:pPr>
             <a:r>
-              <a:rPr sz="1600" b="0" i="0">
-                <a:solidFill>
-                  <a:srgbClr val="52605F"/>
-                </a:solidFill>
-                <a:latin typeface="Calibri"/>
-              </a:rPr>
-              <a:t>Chaque signal a une fiabilité différente — le curateur doit le savoir, pas le deviner derrière un score unique.</a:t>
-            </a:r>
+              <a:rPr sz="1600" b="0" i="0" dirty="0" err="1">
+                <a:solidFill>
+                  <a:srgbClr val="52605F"/>
+                </a:solidFill>
+                <a:latin typeface="Calibri"/>
+              </a:rPr>
+              <a:t>Chaque</a:t>
+            </a:r>
+            <a:r>
+              <a:rPr sz="1600" b="0" i="0" dirty="0">
+                <a:solidFill>
+                  <a:srgbClr val="52605F"/>
+                </a:solidFill>
+                <a:latin typeface="Calibri"/>
+              </a:rPr>
+              <a:t> </a:t>
+            </a:r>
+            <a:r>
+              <a:rPr lang="fr-FR" sz="1600" b="0" i="0" dirty="0">
+                <a:solidFill>
+                  <a:srgbClr val="52605F"/>
+                </a:solidFill>
+                <a:latin typeface="Calibri"/>
+              </a:rPr>
+              <a:t>indicateur</a:t>
+            </a:r>
+            <a:r>
+              <a:rPr sz="1600" b="0" i="0" dirty="0">
+                <a:solidFill>
+                  <a:srgbClr val="52605F"/>
+                </a:solidFill>
+                <a:latin typeface="Calibri"/>
+              </a:rPr>
+              <a:t> a </a:t>
+            </a:r>
+            <a:r>
+              <a:rPr sz="1600" b="0" i="0" dirty="0" err="1">
+                <a:solidFill>
+                  <a:srgbClr val="52605F"/>
+                </a:solidFill>
+                <a:latin typeface="Calibri"/>
+              </a:rPr>
+              <a:t>une</a:t>
+            </a:r>
+            <a:r>
+              <a:rPr sz="1600" b="0" i="0" dirty="0">
+                <a:solidFill>
+                  <a:srgbClr val="52605F"/>
+                </a:solidFill>
+                <a:latin typeface="Calibri"/>
+              </a:rPr>
+              <a:t> </a:t>
+            </a:r>
+            <a:r>
+              <a:rPr sz="1600" b="0" i="0" dirty="0" err="1">
+                <a:solidFill>
+                  <a:srgbClr val="52605F"/>
+                </a:solidFill>
+                <a:latin typeface="Calibri"/>
+              </a:rPr>
+              <a:t>fiabilité</a:t>
+            </a:r>
+            <a:r>
+              <a:rPr sz="1600" b="0" i="0" dirty="0">
+                <a:solidFill>
+                  <a:srgbClr val="52605F"/>
+                </a:solidFill>
+                <a:latin typeface="Calibri"/>
+              </a:rPr>
+              <a:t> </a:t>
+            </a:r>
+            <a:r>
+              <a:rPr sz="1600" b="0" i="0" dirty="0" err="1">
+                <a:solidFill>
+                  <a:srgbClr val="52605F"/>
+                </a:solidFill>
+                <a:latin typeface="Calibri"/>
+              </a:rPr>
+              <a:t>différente</a:t>
+            </a:r>
+            <a:endParaRPr sz="1600" b="0" i="0" dirty="0">
+              <a:solidFill>
+                <a:srgbClr val="52605F"/>
+              </a:solidFill>
+              <a:latin typeface="Calibri"/>
+            </a:endParaRPr>
           </a:p>
         </p:txBody>
       </p:sp>
@@ -12572,7 +10564,7 @@
         <p:spPr>
           <a:xfrm>
             <a:off x="4489704" y="3723132"/>
-            <a:ext cx="3127248" cy="1516380"/>
+            <a:ext cx="3127248" cy="410562"/>
           </a:xfrm>
           <a:prstGeom prst="rect">
             <a:avLst/>
@@ -12594,14 +10586,101 @@
               </a:spcAft>
             </a:pPr>
             <a:r>
-              <a:rPr sz="1150" b="0" i="0">
-                <a:solidFill>
-                  <a:srgbClr val="52605F"/>
-                </a:solidFill>
-                <a:latin typeface="Calibri"/>
-              </a:rPr>
-              <a:t>Fréquence et position dans le texte — indépendant du vocabulaire.</a:t>
-            </a:r>
+              <a:rPr sz="1150" b="0" i="0" dirty="0" err="1">
+                <a:solidFill>
+                  <a:srgbClr val="52605F"/>
+                </a:solidFill>
+                <a:latin typeface="Calibri"/>
+              </a:rPr>
+              <a:t>Fréquence</a:t>
+            </a:r>
+            <a:r>
+              <a:rPr sz="1150" b="0" i="0" dirty="0">
+                <a:solidFill>
+                  <a:srgbClr val="52605F"/>
+                </a:solidFill>
+                <a:latin typeface="Calibri"/>
+              </a:rPr>
+              <a:t> et position dans le </a:t>
+            </a:r>
+            <a:r>
+              <a:rPr sz="1150" b="0" i="0" dirty="0" err="1">
+                <a:solidFill>
+                  <a:srgbClr val="52605F"/>
+                </a:solidFill>
+                <a:latin typeface="Calibri"/>
+              </a:rPr>
+              <a:t>texte</a:t>
+            </a:r>
+            <a:r>
+              <a:rPr sz="1150" b="0" i="0" dirty="0">
+                <a:solidFill>
+                  <a:srgbClr val="52605F"/>
+                </a:solidFill>
+                <a:latin typeface="Calibri"/>
+              </a:rPr>
+              <a:t> — </a:t>
+            </a:r>
+            <a:r>
+              <a:rPr sz="1150" b="0" i="0" dirty="0" err="1">
+                <a:solidFill>
+                  <a:srgbClr val="52605F"/>
+                </a:solidFill>
+                <a:latin typeface="Calibri"/>
+              </a:rPr>
+              <a:t>indépendant</a:t>
+            </a:r>
+            <a:r>
+              <a:rPr sz="1150" b="0" i="0" dirty="0">
+                <a:solidFill>
+                  <a:srgbClr val="52605F"/>
+                </a:solidFill>
+                <a:latin typeface="Calibri"/>
+              </a:rPr>
+              <a:t> du </a:t>
+            </a:r>
+            <a:r>
+              <a:rPr sz="1150" b="0" i="0" dirty="0" err="1">
+                <a:solidFill>
+                  <a:srgbClr val="52605F"/>
+                </a:solidFill>
+                <a:latin typeface="Calibri"/>
+              </a:rPr>
+              <a:t>vocabulaire</a:t>
+            </a:r>
+            <a:r>
+              <a:rPr sz="1150" b="0" i="0" dirty="0">
+                <a:solidFill>
+                  <a:srgbClr val="52605F"/>
+                </a:solidFill>
+                <a:latin typeface="Calibri"/>
+              </a:rPr>
+              <a:t>.</a:t>
+            </a:r>
+            <a:r>
+              <a:rPr lang="fr-FR" sz="1150" dirty="0">
+                <a:solidFill>
+                  <a:srgbClr val="52605F"/>
+                </a:solidFill>
+                <a:latin typeface="Calibri"/>
+              </a:rPr>
+              <a:t> Orienté </a:t>
+            </a:r>
+            <a:r>
+              <a:rPr lang="fr-FR" sz="1150" dirty="0" err="1">
+                <a:solidFill>
+                  <a:srgbClr val="52605F"/>
+                </a:solidFill>
+                <a:latin typeface="Calibri"/>
+              </a:rPr>
+              <a:t>Mot-clés</a:t>
+            </a:r>
+            <a:endParaRPr sz="1150" b="0" i="0" dirty="0">
+              <a:solidFill>
+                <a:srgbClr val="52605F"/>
+              </a:solidFill>
+              <a:latin typeface="Calibri"/>
+            </a:endParaRPr>
           </a:p>
         </p:txBody>
       </p:sp>
@@ -13741,14 +11820,56 @@
               </a:spcAft>
             </a:pPr>
             <a:r>
-              <a:rPr sz="1600" b="1" i="0">
+              <a:rPr sz="1600" b="1" i="0" dirty="0" err="1">
                 <a:solidFill>
                   <a:srgbClr val="1B2429"/>
                 </a:solidFill>
                 <a:latin typeface="Cambria"/>
               </a:rPr>
-              <a:t>Structurel — ensuite, séparément</a:t>
-            </a:r>
+              <a:t>Structurel</a:t>
+            </a:r>
+            <a:r>
+              <a:rPr sz="1600" b="1" i="0" dirty="0">
+                <a:solidFill>
+                  <a:srgbClr val="1B2429"/>
+                </a:solidFill>
+                <a:latin typeface="Cambria"/>
+              </a:rPr>
+              <a:t> — </a:t>
+            </a:r>
+            <a:r>
+              <a:rPr sz="1600" b="1" i="0" dirty="0" err="1">
+                <a:solidFill>
+                  <a:srgbClr val="1B2429"/>
+                </a:solidFill>
+                <a:latin typeface="Cambria"/>
+              </a:rPr>
+              <a:t>ensuite</a:t>
+            </a:r>
+            <a:r>
+              <a:rPr sz="1600" b="1" i="0" dirty="0">
+                <a:solidFill>
+                  <a:srgbClr val="1B2429"/>
+                </a:solidFill>
+                <a:latin typeface="Cambria"/>
+              </a:rPr>
+              <a:t>, </a:t>
+            </a:r>
+            <a:r>
+              <a:rPr sz="1600" b="1" i="0" dirty="0" err="1">
+                <a:solidFill>
+                  <a:srgbClr val="1B2429"/>
+                </a:solidFill>
+                <a:latin typeface="Cambria"/>
+              </a:rPr>
+              <a:t>séparément</a:t>
+            </a:r>
+            <a:endParaRPr sz="1600" b="1" i="0" dirty="0">
+              <a:solidFill>
+                <a:srgbClr val="1B2429"/>
+              </a:solidFill>
+              <a:latin typeface="Cambria"/>
+            </a:endParaRPr>
           </a:p>
         </p:txBody>
       </p:sp>
@@ -13985,7 +12106,7 @@
         <p:spPr>
           <a:xfrm>
             <a:off x="1234440" y="5257800"/>
-            <a:ext cx="9326880" cy="320040"/>
+            <a:ext cx="9326880" cy="208262"/>
           </a:xfrm>
           <a:prstGeom prst="rect">
             <a:avLst/>
@@ -14007,14 +12128,74 @@
               </a:spcAft>
             </a:pPr>
             <a:r>
-              <a:rPr sz="1250" b="0" i="0">
-                <a:solidFill>
-                  <a:srgbClr val="52605F"/>
-                </a:solidFill>
-                <a:latin typeface="Calibri"/>
-              </a:rPr>
-              <a:t>Liste exploratoire, tri manuel plus lourd assumé</a:t>
-            </a:r>
+              <a:rPr sz="1250" b="0" i="0" dirty="0" err="1">
+                <a:solidFill>
+                  <a:srgbClr val="52605F"/>
+                </a:solidFill>
+                <a:latin typeface="Calibri"/>
+              </a:rPr>
+              <a:t>Liste</a:t>
+            </a:r>
+            <a:r>
+              <a:rPr sz="1250" b="0" i="0" dirty="0">
+                <a:solidFill>
+                  <a:srgbClr val="52605F"/>
+                </a:solidFill>
+                <a:latin typeface="Calibri"/>
+              </a:rPr>
+              <a:t> </a:t>
+            </a:r>
+            <a:r>
+              <a:rPr sz="1250" b="0" i="0" dirty="0" err="1">
+                <a:solidFill>
+                  <a:srgbClr val="52605F"/>
+                </a:solidFill>
+                <a:latin typeface="Calibri"/>
+              </a:rPr>
+              <a:t>exploratoire</a:t>
+            </a:r>
+            <a:r>
+              <a:rPr sz="1250" b="0" i="0" dirty="0">
+                <a:solidFill>
+                  <a:srgbClr val="52605F"/>
+                </a:solidFill>
+                <a:latin typeface="Calibri"/>
+              </a:rPr>
+              <a:t>, tri </a:t>
+            </a:r>
+            <a:r>
+              <a:rPr sz="1250" b="0" i="0" dirty="0" err="1">
+                <a:solidFill>
+                  <a:srgbClr val="52605F"/>
+                </a:solidFill>
+                <a:latin typeface="Calibri"/>
+              </a:rPr>
+              <a:t>manuel</a:t>
+            </a:r>
+            <a:r>
+              <a:rPr sz="1250" b="0" i="0" dirty="0">
+                <a:solidFill>
+                  <a:srgbClr val="52605F"/>
+                </a:solidFill>
+                <a:latin typeface="Calibri"/>
+              </a:rPr>
+              <a:t> plus </a:t>
+            </a:r>
+            <a:r>
+              <a:rPr sz="1250" b="0" i="0" dirty="0" err="1">
+                <a:solidFill>
+                  <a:srgbClr val="52605F"/>
+                </a:solidFill>
+                <a:latin typeface="Calibri"/>
+              </a:rPr>
+              <a:t>lourd</a:t>
+            </a:r>
+            <a:endParaRPr sz="1250" b="0" i="0" dirty="0">
+              <a:solidFill>
+                <a:srgbClr val="52605F"/>
+              </a:solidFill>
+              <a:latin typeface="Calibri"/>
+            </a:endParaRPr>
           </a:p>
         </p:txBody>
       </p:sp>
@@ -14394,7 +12575,7 @@
         <p:spPr>
           <a:xfrm>
             <a:off x="640080" y="2331720"/>
-            <a:ext cx="2377440" cy="457200"/>
+            <a:ext cx="2377440" cy="381130"/>
           </a:xfrm>
           <a:prstGeom prst="rect">
             <a:avLst/>
@@ -14416,14 +12597,29 @@
               </a:spcAft>
             </a:pPr>
             <a:r>
-              <a:rPr sz="2300" b="1" i="0">
+              <a:rPr sz="2300" b="1" i="0" dirty="0">
                 <a:solidFill>
                   <a:srgbClr val="1B2429"/>
                 </a:solidFill>
                 <a:latin typeface="Consolas"/>
               </a:rPr>
-              <a:t>38 838</a:t>
-            </a:r>
+              <a:t>3</a:t>
+            </a:r>
+            <a:r>
+              <a:rPr lang="fr-FR" sz="2300" b="1" i="0" dirty="0">
+                <a:solidFill>
+                  <a:srgbClr val="1B2429"/>
+                </a:solidFill>
+                <a:latin typeface="Consolas"/>
+              </a:rPr>
+              <a:t>6 546</a:t>
+            </a:r>
+            <a:endParaRPr sz="2300" b="1" i="0" dirty="0">
+              <a:solidFill>
+                <a:srgbClr val="1B2429"/>
+              </a:solidFill>
+              <a:latin typeface="Consolas"/>
+            </a:endParaRPr>
           </a:p>
         </p:txBody>
       </p:sp>
@@ -14478,7 +12674,7 @@
         <p:spPr>
           <a:xfrm>
             <a:off x="3291840" y="2331720"/>
-            <a:ext cx="2377440" cy="457200"/>
+            <a:ext cx="2377440" cy="381130"/>
           </a:xfrm>
           <a:prstGeom prst="rect">
             <a:avLst/>
@@ -14500,13 +12696,31 @@
               </a:spcAft>
             </a:pPr>
             <a:r>
-              <a:rPr sz="2300" b="1" i="0">
+              <a:rPr sz="2300" b="1" i="0" dirty="0">
                 <a:solidFill>
                   <a:srgbClr val="1B2429"/>
                 </a:solidFill>
                 <a:latin typeface="Consolas"/>
               </a:rPr>
-              <a:t>225</a:t>
+              <a:t>2</a:t>
+            </a:r>
+            <a:r>
+              <a:rPr lang="fr-FR" sz="2300" b="1" i="0" dirty="0">
+                <a:solidFill>
+                  <a:srgbClr val="1B2429"/>
+                </a:solidFill>
+                <a:latin typeface="Consolas"/>
+              </a:rPr>
+              <a:t>3</a:t>
+            </a:r>
+            <a:r>
+              <a:rPr sz="2300" b="1" i="0" dirty="0">
+                <a:solidFill>
+                  <a:srgbClr val="1B2429"/>
+                </a:solidFill>
+                <a:latin typeface="Consolas"/>
+              </a:rPr>
+              <a:t>2</a:t>
             </a:r>
           </a:p>
         </p:txBody>
@@ -14562,7 +12776,7 @@
         <p:spPr>
           <a:xfrm>
             <a:off x="5943600" y="2331720"/>
-            <a:ext cx="2377440" cy="457200"/>
+            <a:ext cx="2377440" cy="381130"/>
           </a:xfrm>
           <a:prstGeom prst="rect">
             <a:avLst/>
@@ -14584,14 +12798,47 @@
               </a:spcAft>
             </a:pPr>
             <a:r>
-              <a:rPr sz="2300" b="1" i="0">
+              <a:rPr sz="2300" b="1" i="0" dirty="0">
                 <a:solidFill>
                   <a:srgbClr val="1B2429"/>
                 </a:solidFill>
                 <a:latin typeface="Consolas"/>
               </a:rPr>
-              <a:t>38 613</a:t>
-            </a:r>
+              <a:t>3</a:t>
+            </a:r>
+            <a:r>
+              <a:rPr lang="fr-FR" sz="2300" b="1" dirty="0">
+                <a:solidFill>
+                  <a:srgbClr val="1B2429"/>
+                </a:solidFill>
+                <a:latin typeface="Consolas"/>
+              </a:rPr>
+              <a:t>6</a:t>
+            </a:r>
+            <a:r>
+              <a:rPr sz="2300" b="1" i="0" dirty="0">
+                <a:solidFill>
+                  <a:srgbClr val="1B2429"/>
+                </a:solidFill>
+                <a:latin typeface="Consolas"/>
+              </a:rPr>
+              <a:t> </a:t>
+            </a:r>
+            <a:r>
+              <a:rPr lang="fr-FR" sz="2300" b="1" dirty="0">
+                <a:solidFill>
+                  <a:srgbClr val="1B2429"/>
+                </a:solidFill>
+                <a:latin typeface="Consolas"/>
+              </a:rPr>
+              <a:t>314</a:t>
+            </a:r>
+            <a:endParaRPr sz="2300" b="1" i="0" dirty="0">
+              <a:solidFill>
+                <a:srgbClr val="1B2429"/>
+              </a:solidFill>
+              <a:latin typeface="Consolas"/>
+            </a:endParaRPr>
           </a:p>
         </p:txBody>
       </p:sp>
@@ -14780,7 +13027,7 @@
         <p:spPr>
           <a:xfrm>
             <a:off x="804672" y="3723132"/>
-            <a:ext cx="3127248" cy="457200"/>
+            <a:ext cx="3127248" cy="463973"/>
           </a:xfrm>
           <a:prstGeom prst="rect">
             <a:avLst/>
@@ -14802,14 +13049,29 @@
               </a:spcAft>
             </a:pPr>
             <a:r>
-              <a:rPr sz="2800" b="1" i="0">
+              <a:rPr sz="2800" b="1" i="0" dirty="0">
                 <a:solidFill>
                   <a:srgbClr val="0E6B66"/>
                 </a:solidFill>
                 <a:latin typeface="Consolas"/>
               </a:rPr>
-              <a:t>177</a:t>
-            </a:r>
+              <a:t>1</a:t>
+            </a:r>
+            <a:r>
+              <a:rPr lang="fr-FR" sz="2800" b="1" i="0" dirty="0">
+                <a:solidFill>
+                  <a:srgbClr val="0E6B66"/>
+                </a:solidFill>
+                <a:latin typeface="Consolas"/>
+              </a:rPr>
+              <a:t>83</a:t>
+            </a:r>
+            <a:endParaRPr sz="2800" b="1" i="0" dirty="0">
+              <a:solidFill>
+                <a:srgbClr val="0E6B66"/>
+              </a:solidFill>
+              <a:latin typeface="Consolas"/>
+            </a:endParaRPr>
           </a:p>
         </p:txBody>
       </p:sp>
@@ -15088,7 +13350,7 @@
         <p:spPr>
           <a:xfrm>
             <a:off x="4489704" y="3723132"/>
-            <a:ext cx="3127248" cy="457200"/>
+            <a:ext cx="3127248" cy="463973"/>
           </a:xfrm>
           <a:prstGeom prst="rect">
             <a:avLst/>
@@ -15110,14 +13372,20 @@
               </a:spcAft>
             </a:pPr>
             <a:r>
-              <a:rPr sz="2800" b="1" i="0">
+              <a:rPr lang="fr-FR" sz="2800" b="1" dirty="0">
                 <a:solidFill>
                   <a:srgbClr val="A8752A"/>
                 </a:solidFill>
                 <a:latin typeface="Consolas"/>
               </a:rPr>
-              <a:t>705</a:t>
-            </a:r>
+              <a:t>654</a:t>
+            </a:r>
+            <a:endParaRPr sz="2800" b="1" i="0" dirty="0">
+              <a:solidFill>
+                <a:srgbClr val="A8752A"/>
+              </a:solidFill>
+              <a:latin typeface="Consolas"/>
+            </a:endParaRPr>
           </a:p>
         </p:txBody>
       </p:sp>
@@ -15396,7 +13664,7 @@
         <p:spPr>
           <a:xfrm>
             <a:off x="8174736" y="3723132"/>
-            <a:ext cx="3127248" cy="457200"/>
+            <a:ext cx="3127248" cy="463973"/>
           </a:xfrm>
           <a:prstGeom prst="rect">
             <a:avLst/>
@@ -15418,14 +13686,29 @@
               </a:spcAft>
             </a:pPr>
             <a:r>
-              <a:rPr sz="2800" b="1" i="0">
+              <a:rPr sz="2800" b="1" i="0" dirty="0">
                 <a:solidFill>
                   <a:srgbClr val="6E5A8C"/>
                 </a:solidFill>
                 <a:latin typeface="Consolas"/>
               </a:rPr>
-              <a:t>3 686</a:t>
-            </a:r>
+              <a:t>3 </a:t>
+            </a:r>
+            <a:r>
+              <a:rPr lang="fr-FR" sz="2800" b="1" dirty="0">
+                <a:solidFill>
+                  <a:srgbClr val="6E5A8C"/>
+                </a:solidFill>
+                <a:latin typeface="Consolas"/>
+              </a:rPr>
+              <a:t>471</a:t>
+            </a:r>
+            <a:endParaRPr sz="2800" b="1" i="0" dirty="0">
+              <a:solidFill>
+                <a:srgbClr val="6E5A8C"/>
+              </a:solidFill>
+              <a:latin typeface="Consolas"/>
+            </a:endParaRPr>
           </a:p>
         </p:txBody>
       </p:sp>
@@ -15704,7 +13987,7 @@
         <p:spPr>
           <a:xfrm>
             <a:off x="914400" y="5513832"/>
-            <a:ext cx="10241280" cy="548640"/>
+            <a:ext cx="10241280" cy="206851"/>
           </a:xfrm>
           <a:prstGeom prst="rect">
             <a:avLst/>
@@ -15726,14 +14009,155 @@
               </a:spcAft>
             </a:pPr>
             <a:r>
-              <a:rPr sz="1200" b="0" i="0">
-                <a:solidFill>
-                  <a:srgbClr val="52605F"/>
-                </a:solidFill>
-                <a:latin typeface="Calibri"/>
-              </a:rPr>
-              <a:t>« intoxication ciguatérique »  ·  « toxicité chimique »  ·  « micro-organismes infectieux » — cohérent avec le domaine du corpus (toxicologie). Exclusivité mutuelle vérifiée : 0 violation sur 38 838 candidats.</a:t>
-            </a:r>
+              <a:rPr sz="1200" b="0" i="0" dirty="0">
+                <a:solidFill>
+                  <a:srgbClr val="52605F"/>
+                </a:solidFill>
+                <a:latin typeface="Calibri"/>
+              </a:rPr>
+              <a:t>« intoxication </a:t>
+            </a:r>
+            <a:r>
+              <a:rPr sz="1200" b="0" i="0" dirty="0" err="1">
+                <a:solidFill>
+                  <a:srgbClr val="52605F"/>
+                </a:solidFill>
+                <a:latin typeface="Calibri"/>
+              </a:rPr>
+              <a:t>ciguatérique</a:t>
+            </a:r>
+            <a:r>
+              <a:rPr sz="1200" b="0" i="0" dirty="0">
+                <a:solidFill>
+                  <a:srgbClr val="52605F"/>
+                </a:solidFill>
+                <a:latin typeface="Calibri"/>
+              </a:rPr>
+              <a:t> »  ·  « </a:t>
+            </a:r>
+            <a:r>
+              <a:rPr sz="1200" b="0" i="0" dirty="0" err="1">
+                <a:solidFill>
+                  <a:srgbClr val="52605F"/>
+                </a:solidFill>
+                <a:latin typeface="Calibri"/>
+              </a:rPr>
+              <a:t>toxicité</a:t>
+            </a:r>
+            <a:r>
+              <a:rPr sz="1200" b="0" i="0" dirty="0">
+                <a:solidFill>
+                  <a:srgbClr val="52605F"/>
+                </a:solidFill>
+                <a:latin typeface="Calibri"/>
+              </a:rPr>
+              <a:t> </a:t>
+            </a:r>
+            <a:r>
+              <a:rPr sz="1200" b="0" i="0" dirty="0" err="1">
+                <a:solidFill>
+                  <a:srgbClr val="52605F"/>
+                </a:solidFill>
+                <a:latin typeface="Calibri"/>
+              </a:rPr>
+              <a:t>chimique</a:t>
+            </a:r>
+            <a:r>
+              <a:rPr sz="1200" b="0" i="0" dirty="0">
+                <a:solidFill>
+                  <a:srgbClr val="52605F"/>
+                </a:solidFill>
+                <a:latin typeface="Calibri"/>
+              </a:rPr>
+              <a:t> »  ·  « micro-</a:t>
+            </a:r>
+            <a:r>
+              <a:rPr sz="1200" b="0" i="0" dirty="0" err="1">
+                <a:solidFill>
+                  <a:srgbClr val="52605F"/>
+                </a:solidFill>
+                <a:latin typeface="Calibri"/>
+              </a:rPr>
+              <a:t>organismes</a:t>
+            </a:r>
+            <a:r>
+              <a:rPr sz="1200" b="0" i="0" dirty="0">
+                <a:solidFill>
+                  <a:srgbClr val="52605F"/>
+                </a:solidFill>
+                <a:latin typeface="Calibri"/>
+              </a:rPr>
+              <a:t> </a:t>
+            </a:r>
+            <a:r>
+              <a:rPr sz="1200" b="0" i="0" dirty="0" err="1">
+                <a:solidFill>
+                  <a:srgbClr val="52605F"/>
+                </a:solidFill>
+                <a:latin typeface="Calibri"/>
+              </a:rPr>
+              <a:t>infectieux</a:t>
+            </a:r>
+            <a:r>
+              <a:rPr sz="1200" b="0" i="0" dirty="0">
+                <a:solidFill>
+                  <a:srgbClr val="52605F"/>
+                </a:solidFill>
+                <a:latin typeface="Calibri"/>
+              </a:rPr>
+              <a:t> » — </a:t>
+            </a:r>
+            <a:r>
+              <a:rPr sz="1200" b="0" i="0" dirty="0" err="1">
+                <a:solidFill>
+                  <a:srgbClr val="52605F"/>
+                </a:solidFill>
+                <a:latin typeface="Calibri"/>
+              </a:rPr>
+              <a:t>cohérent</a:t>
+            </a:r>
+            <a:r>
+              <a:rPr sz="1200" b="0" i="0" dirty="0">
+                <a:solidFill>
+                  <a:srgbClr val="52605F"/>
+                </a:solidFill>
+                <a:latin typeface="Calibri"/>
+              </a:rPr>
+              <a:t> avec le </a:t>
+            </a:r>
+            <a:r>
+              <a:rPr sz="1200" b="0" i="0" dirty="0" err="1">
+                <a:solidFill>
+                  <a:srgbClr val="52605F"/>
+                </a:solidFill>
+                <a:latin typeface="Calibri"/>
+              </a:rPr>
+              <a:t>domaine</a:t>
+            </a:r>
+            <a:r>
+              <a:rPr sz="1200" b="0" i="0" dirty="0">
+                <a:solidFill>
+                  <a:srgbClr val="52605F"/>
+                </a:solidFill>
+                <a:latin typeface="Calibri"/>
+              </a:rPr>
+              <a:t> du corpus </a:t>
+            </a:r>
+            <a:r>
+              <a:rPr sz="1200" b="0" i="0" dirty="0" err="1">
+                <a:solidFill>
+                  <a:srgbClr val="52605F"/>
+                </a:solidFill>
+                <a:latin typeface="Calibri"/>
+              </a:rPr>
+              <a:t>toxicologie</a:t>
+            </a:r>
+            <a:endParaRPr sz="1200" b="0" i="0" dirty="0">
+              <a:solidFill>
+                <a:srgbClr val="52605F"/>
+              </a:solidFill>
+              <a:latin typeface="Calibri"/>
+            </a:endParaRPr>
           </a:p>
         </p:txBody>
       </p:sp>
@@ -15855,7 +14279,7 @@
         <p:spPr>
           <a:xfrm>
             <a:off x="640080" y="777240"/>
-            <a:ext cx="8686800" cy="1005840"/>
+            <a:ext cx="8686800" cy="492443"/>
           </a:xfrm>
           <a:prstGeom prst="rect">
             <a:avLst/>
@@ -15910,23 +14334,8 @@
                 </a:solidFill>
                 <a:latin typeface="Cambria"/>
               </a:rPr>
-              <a:t> un gold standard </a:t>
-            </a:r>
-            <a:r>
-              <a:rPr sz="3200" b="1" i="0" dirty="0" err="1">
-                <a:solidFill>
-                  <a:srgbClr val="1B2429"/>
-                </a:solidFill>
-                <a:latin typeface="Cambria"/>
-              </a:rPr>
-              <a:t>indépendant</a:t>
-            </a:r>
-            <a:endParaRPr sz="3200" b="1" i="0" dirty="0">
-              <a:solidFill>
-                <a:srgbClr val="1B2429"/>
-              </a:solidFill>
-              <a:latin typeface="Cambria"/>
-            </a:endParaRPr>
+              <a:t> un gold standard</a:t>
+            </a:r>
           </a:p>
         </p:txBody>
       </p:sp>
@@ -17190,7 +15599,7 @@
         </p:nvSpPr>
         <p:spPr>
           <a:xfrm>
-            <a:off x="452511" y="169164"/>
+            <a:off x="452511" y="205740"/>
             <a:ext cx="5486400" cy="320040"/>
           </a:xfrm>
           <a:prstGeom prst="rect">
@@ -17219,7 +15628,7 @@
                 </a:solidFill>
                 <a:latin typeface="Consolas"/>
               </a:rPr>
-              <a:t>CONTRAINTES</a:t>
+              <a:t>SUITE</a:t>
             </a:r>
           </a:p>
         </p:txBody>
@@ -17261,27 +15670,27 @@
                 </a:solidFill>
                 <a:latin typeface="Cambria"/>
               </a:rPr>
-              <a:t>Livré dans le cadre fixé</a:t>
-            </a:r>
-          </a:p>
-        </p:txBody>
-      </p:sp>
-      <p:sp>
-        <p:nvSpPr>
-          <p:cNvPr id="5" name="Oval 4"/>
+              <a:t>Prochaines étapes</a:t>
+            </a:r>
+          </a:p>
+        </p:txBody>
+      </p:sp>
+      <p:sp>
+        <p:nvSpPr>
+          <p:cNvPr id="5" name="Rectangle 4"/>
           <p:cNvSpPr/>
           <p:nvPr/>
         </p:nvSpPr>
         <p:spPr>
           <a:xfrm>
-            <a:off x="640080" y="2331720"/>
-            <a:ext cx="292608" cy="292608"/>
-          </a:xfrm>
-          <a:prstGeom prst="ellipse">
+            <a:off x="640080" y="2880360"/>
+            <a:ext cx="3456432" cy="38100"/>
+          </a:xfrm>
+          <a:prstGeom prst="rect">
             <a:avLst/>
           </a:prstGeom>
           <a:solidFill>
-            <a:srgbClr val="0E6B66"/>
+            <a:srgbClr val="52605F"/>
           </a:solidFill>
           <a:ln>
             <a:noFill/>
@@ -17303,31 +15712,71 @@
           </a:fontRef>
         </p:style>
         <p:txBody>
-          <a:bodyPr lIns="0" tIns="0" rIns="0" bIns="0" rtlCol="0" anchor="ctr"/>
+          <a:bodyPr rtlCol="0" anchor="ctr"/>
           <a:lstStyle/>
           <a:p>
             <a:pPr algn="ctr"/>
-            <a:r>
-              <a:rPr b="1">
-                <a:solidFill>
-                  <a:srgbClr val="FFFFFF"/>
-                </a:solidFill>
-              </a:rPr>
-              <a:t>✓</a:t>
-            </a:r>
-          </a:p>
-        </p:txBody>
-      </p:sp>
-      <p:sp>
-        <p:nvSpPr>
-          <p:cNvPr id="6" name="TextBox 5"/>
+            <a:endParaRPr sz="2400"/>
+          </a:p>
+        </p:txBody>
+      </p:sp>
+      <p:sp>
+        <p:nvSpPr>
+          <p:cNvPr id="6" name="Rectangle 5"/>
+          <p:cNvSpPr/>
+          <p:nvPr/>
+        </p:nvSpPr>
+        <p:spPr>
+          <a:xfrm>
+            <a:off x="640080" y="2918460"/>
+            <a:ext cx="3456432" cy="2065020"/>
+          </a:xfrm>
+          <a:prstGeom prst="rect">
+            <a:avLst/>
+          </a:prstGeom>
+          <a:solidFill>
+            <a:srgbClr val="FBFBF8"/>
+          </a:solidFill>
+          <a:ln w="9525">
+            <a:solidFill>
+              <a:srgbClr val="D9DDD4"/>
+            </a:solidFill>
+          </a:ln>
+          <a:effectLst/>
+        </p:spPr>
+        <p:style>
+          <a:lnRef idx="1">
+            <a:schemeClr val="accent1"/>
+          </a:lnRef>
+          <a:fillRef idx="3">
+            <a:schemeClr val="accent1"/>
+          </a:fillRef>
+          <a:effectRef idx="2">
+            <a:schemeClr val="accent1"/>
+          </a:effectRef>
+          <a:fontRef idx="minor">
+            <a:schemeClr val="lt1"/>
+          </a:fontRef>
+        </p:style>
+        <p:txBody>
+          <a:bodyPr rtlCol="0" anchor="ctr"/>
+          <a:lstStyle/>
+          <a:p>
+            <a:pPr algn="ctr"/>
+            <a:endParaRPr sz="2400"/>
+          </a:p>
+        </p:txBody>
+      </p:sp>
+      <p:sp>
+        <p:nvSpPr>
+          <p:cNvPr id="7" name="TextBox 6"/>
           <p:cNvSpPr txBox="1"/>
           <p:nvPr/>
         </p:nvSpPr>
         <p:spPr>
           <a:xfrm>
-            <a:off x="1097280" y="2286000"/>
-            <a:ext cx="4572000" cy="291426"/>
+            <a:off x="804672" y="3046476"/>
+            <a:ext cx="3127248" cy="198837"/>
           </a:xfrm>
           <a:prstGeom prst="rect">
             <a:avLst/>
@@ -17349,27 +15798,69 @@
               </a:spcAft>
             </a:pPr>
             <a:r>
+              <a:rPr sz="1200" b="1" i="0" spc="80">
+                <a:solidFill>
+                  <a:srgbClr val="52605F"/>
+                </a:solidFill>
+                <a:latin typeface="Consolas"/>
+              </a:rPr>
+              <a:t>RELEASE</a:t>
+            </a:r>
+          </a:p>
+        </p:txBody>
+      </p:sp>
+      <p:sp>
+        <p:nvSpPr>
+          <p:cNvPr id="8" name="TextBox 7"/>
+          <p:cNvSpPr txBox="1"/>
+          <p:nvPr/>
+        </p:nvSpPr>
+        <p:spPr>
+          <a:xfrm>
+            <a:off x="804672" y="3357372"/>
+            <a:ext cx="3127248" cy="291426"/>
+          </a:xfrm>
+          <a:prstGeom prst="rect">
+            <a:avLst/>
+          </a:prstGeom>
+          <a:noFill/>
+        </p:spPr>
+        <p:txBody>
+          <a:bodyPr wrap="square" lIns="0" tIns="0" rIns="0" bIns="0" anchor="t">
+            <a:spAutoFit/>
+          </a:bodyPr>
+          <a:lstStyle/>
+          <a:p>
+            <a:pPr algn="l">
+              <a:lnSpc>
+                <a:spcPct val="115000"/>
+              </a:lnSpc>
+              <a:spcAft>
+                <a:spcPts val="0"/>
+              </a:spcAft>
+            </a:pPr>
+            <a:r>
               <a:rPr b="1" i="0">
                 <a:solidFill>
                   <a:srgbClr val="1B2429"/>
                 </a:solidFill>
                 <a:latin typeface="Cambria"/>
               </a:rPr>
-              <a:t>Français + anglais</a:t>
-            </a:r>
-          </a:p>
-        </p:txBody>
-      </p:sp>
-      <p:sp>
-        <p:nvSpPr>
-          <p:cNvPr id="7" name="TextBox 6"/>
+              <a:t>Tag officiel</a:t>
+            </a:r>
+          </a:p>
+        </p:txBody>
+      </p:sp>
+      <p:sp>
+        <p:nvSpPr>
+          <p:cNvPr id="9" name="TextBox 8"/>
           <p:cNvSpPr txBox="1"/>
           <p:nvPr/>
         </p:nvSpPr>
         <p:spPr>
           <a:xfrm>
-            <a:off x="1097280" y="2651760"/>
-            <a:ext cx="4572000" cy="275717"/>
+            <a:off x="804672" y="3723132"/>
+            <a:ext cx="3127248" cy="241285"/>
           </a:xfrm>
           <a:prstGeom prst="rect">
             <a:avLst/>
@@ -17391,33 +15882,60 @@
               </a:spcAft>
             </a:pPr>
             <a:r>
-              <a:rPr sz="1600" b="0" i="0">
-                <a:solidFill>
-                  <a:srgbClr val="52605F"/>
-                </a:solidFill>
-                <a:latin typeface="Calibri"/>
-              </a:rPr>
-              <a:t>Les deux langues, sans exception</a:t>
-            </a:r>
-          </a:p>
-        </p:txBody>
-      </p:sp>
-      <p:sp>
-        <p:nvSpPr>
-          <p:cNvPr id="8" name="Oval 7"/>
+              <a:rPr sz="1400" b="0" i="0" dirty="0" err="1">
+                <a:solidFill>
+                  <a:srgbClr val="52605F"/>
+                </a:solidFill>
+                <a:latin typeface="Calibri"/>
+              </a:rPr>
+              <a:t>Finaliser</a:t>
+            </a:r>
+            <a:r>
+              <a:rPr sz="1400" b="0" i="0" dirty="0">
+                <a:solidFill>
+                  <a:srgbClr val="52605F"/>
+                </a:solidFill>
+                <a:latin typeface="Calibri"/>
+              </a:rPr>
+              <a:t> et </a:t>
+            </a:r>
+            <a:r>
+              <a:rPr sz="1400" b="0" i="0" dirty="0" err="1">
+                <a:solidFill>
+                  <a:srgbClr val="52605F"/>
+                </a:solidFill>
+                <a:latin typeface="Calibri"/>
+              </a:rPr>
+              <a:t>publier</a:t>
+            </a:r>
+            <a:r>
+              <a:rPr sz="1400" b="0" i="0" dirty="0">
+                <a:solidFill>
+                  <a:srgbClr val="52605F"/>
+                </a:solidFill>
+                <a:latin typeface="Calibri"/>
+              </a:rPr>
+              <a:t> la release 2.0.</a:t>
+            </a:r>
+          </a:p>
+        </p:txBody>
+      </p:sp>
+      <p:sp>
+        <p:nvSpPr>
+          <p:cNvPr id="10" name="Rectangle 9"/>
           <p:cNvSpPr/>
           <p:nvPr/>
         </p:nvSpPr>
         <p:spPr>
           <a:xfrm>
-            <a:off x="6035040" y="2331720"/>
-            <a:ext cx="292608" cy="292608"/>
-          </a:xfrm>
-          <a:prstGeom prst="ellipse">
+            <a:off x="4325112" y="2880360"/>
+            <a:ext cx="3456432" cy="38100"/>
+          </a:xfrm>
+          <a:prstGeom prst="rect">
             <a:avLst/>
           </a:prstGeom>
           <a:solidFill>
-            <a:srgbClr val="0E6B66"/>
+            <a:srgbClr val="A8752A"/>
           </a:solidFill>
           <a:ln>
             <a:noFill/>
@@ -17439,31 +15957,71 @@
           </a:fontRef>
         </p:style>
         <p:txBody>
-          <a:bodyPr lIns="0" tIns="0" rIns="0" bIns="0" rtlCol="0" anchor="ctr"/>
+          <a:bodyPr rtlCol="0" anchor="ctr"/>
           <a:lstStyle/>
           <a:p>
             <a:pPr algn="ctr"/>
-            <a:r>
-              <a:rPr sz="2000" b="1">
-                <a:solidFill>
-                  <a:srgbClr val="FFFFFF"/>
-                </a:solidFill>
-              </a:rPr>
-              <a:t>✓</a:t>
-            </a:r>
-          </a:p>
-        </p:txBody>
-      </p:sp>
-      <p:sp>
-        <p:nvSpPr>
-          <p:cNvPr id="9" name="TextBox 8"/>
+            <a:endParaRPr sz="2400"/>
+          </a:p>
+        </p:txBody>
+      </p:sp>
+      <p:sp>
+        <p:nvSpPr>
+          <p:cNvPr id="11" name="Rectangle 10"/>
+          <p:cNvSpPr/>
+          <p:nvPr/>
+        </p:nvSpPr>
+        <p:spPr>
+          <a:xfrm>
+            <a:off x="4325112" y="2918460"/>
+            <a:ext cx="3456432" cy="2065020"/>
+          </a:xfrm>
+          <a:prstGeom prst="rect">
+            <a:avLst/>
+          </a:prstGeom>
+          <a:solidFill>
+            <a:srgbClr val="FBFBF8"/>
+          </a:solidFill>
+          <a:ln w="9525">
+            <a:solidFill>
+              <a:srgbClr val="D9DDD4"/>
+            </a:solidFill>
+          </a:ln>
+          <a:effectLst/>
+        </p:spPr>
+        <p:style>
+          <a:lnRef idx="1">
+            <a:schemeClr val="accent1"/>
+          </a:lnRef>
+          <a:fillRef idx="3">
+            <a:schemeClr val="accent1"/>
+          </a:fillRef>
+          <a:effectRef idx="2">
+            <a:schemeClr val="accent1"/>
+          </a:effectRef>
+          <a:fontRef idx="minor">
+            <a:schemeClr val="lt1"/>
+          </a:fontRef>
+        </p:style>
+        <p:txBody>
+          <a:bodyPr rtlCol="0" anchor="ctr"/>
+          <a:lstStyle/>
+          <a:p>
+            <a:pPr algn="ctr"/>
+            <a:endParaRPr sz="2400"/>
+          </a:p>
+        </p:txBody>
+      </p:sp>
+      <p:sp>
+        <p:nvSpPr>
+          <p:cNvPr id="12" name="TextBox 11"/>
           <p:cNvSpPr txBox="1"/>
           <p:nvPr/>
         </p:nvSpPr>
         <p:spPr>
           <a:xfrm>
-            <a:off x="6492240" y="2286000"/>
-            <a:ext cx="4572000" cy="259045"/>
+            <a:off x="4489704" y="3046476"/>
+            <a:ext cx="3127248" cy="198837"/>
           </a:xfrm>
           <a:prstGeom prst="rect">
             <a:avLst/>
@@ -17485,27 +16043,69 @@
               </a:spcAft>
             </a:pPr>
             <a:r>
-              <a:rPr sz="1600" b="1" i="0">
+              <a:rPr sz="1200" b="1" i="0" spc="80">
+                <a:solidFill>
+                  <a:srgbClr val="A8752A"/>
+                </a:solidFill>
+                <a:latin typeface="Consolas"/>
+              </a:rPr>
+              <a:t>PERFORMANCE</a:t>
+            </a:r>
+          </a:p>
+        </p:txBody>
+      </p:sp>
+      <p:sp>
+        <p:nvSpPr>
+          <p:cNvPr id="13" name="TextBox 12"/>
+          <p:cNvSpPr txBox="1"/>
+          <p:nvPr/>
+        </p:nvSpPr>
+        <p:spPr>
+          <a:xfrm>
+            <a:off x="4489704" y="3357372"/>
+            <a:ext cx="3127248" cy="291426"/>
+          </a:xfrm>
+          <a:prstGeom prst="rect">
+            <a:avLst/>
+          </a:prstGeom>
+          <a:noFill/>
+        </p:spPr>
+        <p:txBody>
+          <a:bodyPr wrap="square" lIns="0" tIns="0" rIns="0" bIns="0" anchor="t">
+            <a:spAutoFit/>
+          </a:bodyPr>
+          <a:lstStyle/>
+          <a:p>
+            <a:pPr algn="l">
+              <a:lnSpc>
+                <a:spcPct val="115000"/>
+              </a:lnSpc>
+              <a:spcAft>
+                <a:spcPts val="0"/>
+              </a:spcAft>
+            </a:pPr>
+            <a:r>
+              <a:rPr b="1" i="0">
                 <a:solidFill>
                   <a:srgbClr val="1B2429"/>
                 </a:solidFill>
                 <a:latin typeface="Cambria"/>
               </a:rPr>
-              <a:t>CPU uniquement</a:t>
-            </a:r>
-          </a:p>
-        </p:txBody>
-      </p:sp>
-      <p:sp>
-        <p:nvSpPr>
-          <p:cNvPr id="10" name="TextBox 9"/>
+              <a:t>Gros corpus</a:t>
+            </a:r>
+          </a:p>
+        </p:txBody>
+      </p:sp>
+      <p:sp>
+        <p:nvSpPr>
+          <p:cNvPr id="14" name="TextBox 13"/>
           <p:cNvSpPr txBox="1"/>
           <p:nvPr/>
         </p:nvSpPr>
         <p:spPr>
           <a:xfrm>
-            <a:off x="6492240" y="2651760"/>
-            <a:ext cx="4572000" cy="241285"/>
+            <a:off x="4489704" y="3723132"/>
+            <a:ext cx="3127248" cy="499817"/>
           </a:xfrm>
           <a:prstGeom prst="rect">
             <a:avLst/>
@@ -17533,23 +16133,23 @@
                 </a:solidFill>
                 <a:latin typeface="Calibri"/>
               </a:rPr>
-              <a:t>Aucun GPU, aucun accès cloud requis</a:t>
-            </a:r>
-          </a:p>
-        </p:txBody>
-      </p:sp>
-      <p:sp>
-        <p:nvSpPr>
-          <p:cNvPr id="11" name="Oval 10"/>
+              <a:t>Fiabiliser la détection de variantes sur les très gros volumes.</a:t>
+            </a:r>
+          </a:p>
+        </p:txBody>
+      </p:sp>
+      <p:sp>
+        <p:nvSpPr>
+          <p:cNvPr id="15" name="Rectangle 14"/>
           <p:cNvSpPr/>
           <p:nvPr/>
         </p:nvSpPr>
         <p:spPr>
           <a:xfrm>
-            <a:off x="640080" y="3520440"/>
-            <a:ext cx="292608" cy="292608"/>
-          </a:xfrm>
-          <a:prstGeom prst="ellipse">
+            <a:off x="8010144" y="2880360"/>
+            <a:ext cx="3456432" cy="38100"/>
+          </a:xfrm>
+          <a:prstGeom prst="rect">
             <a:avLst/>
           </a:prstGeom>
           <a:solidFill>
@@ -17575,31 +16175,71 @@
           </a:fontRef>
         </p:style>
         <p:txBody>
-          <a:bodyPr lIns="0" tIns="0" rIns="0" bIns="0" rtlCol="0" anchor="ctr"/>
+          <a:bodyPr rtlCol="0" anchor="ctr"/>
           <a:lstStyle/>
           <a:p>
             <a:pPr algn="ctr"/>
-            <a:r>
-              <a:rPr b="1">
-                <a:solidFill>
-                  <a:srgbClr val="FFFFFF"/>
-                </a:solidFill>
-              </a:rPr>
-              <a:t>✓</a:t>
-            </a:r>
-          </a:p>
-        </p:txBody>
-      </p:sp>
-      <p:sp>
-        <p:nvSpPr>
-          <p:cNvPr id="12" name="TextBox 11"/>
+            <a:endParaRPr sz="2400"/>
+          </a:p>
+        </p:txBody>
+      </p:sp>
+      <p:sp>
+        <p:nvSpPr>
+          <p:cNvPr id="16" name="Rectangle 15"/>
+          <p:cNvSpPr/>
+          <p:nvPr/>
+        </p:nvSpPr>
+        <p:spPr>
+          <a:xfrm>
+            <a:off x="8010144" y="2918460"/>
+            <a:ext cx="3456432" cy="2065020"/>
+          </a:xfrm>
+          <a:prstGeom prst="rect">
+            <a:avLst/>
+          </a:prstGeom>
+          <a:solidFill>
+            <a:srgbClr val="FBFBF8"/>
+          </a:solidFill>
+          <a:ln w="9525">
+            <a:solidFill>
+              <a:srgbClr val="D9DDD4"/>
+            </a:solidFill>
+          </a:ln>
+          <a:effectLst/>
+        </p:spPr>
+        <p:style>
+          <a:lnRef idx="1">
+            <a:schemeClr val="accent1"/>
+          </a:lnRef>
+          <a:fillRef idx="3">
+            <a:schemeClr val="accent1"/>
+          </a:fillRef>
+          <a:effectRef idx="2">
+            <a:schemeClr val="accent1"/>
+          </a:effectRef>
+          <a:fontRef idx="minor">
+            <a:schemeClr val="lt1"/>
+          </a:fontRef>
+        </p:style>
+        <p:txBody>
+          <a:bodyPr rtlCol="0" anchor="ctr"/>
+          <a:lstStyle/>
+          <a:p>
+            <a:pPr algn="ctr"/>
+            <a:endParaRPr sz="2400"/>
+          </a:p>
+        </p:txBody>
+      </p:sp>
+      <p:sp>
+        <p:nvSpPr>
+          <p:cNvPr id="17" name="TextBox 16"/>
           <p:cNvSpPr txBox="1"/>
           <p:nvPr/>
         </p:nvSpPr>
         <p:spPr>
           <a:xfrm>
-            <a:off x="1097280" y="3474720"/>
-            <a:ext cx="4572000" cy="291426"/>
+            <a:off x="8174736" y="3046476"/>
+            <a:ext cx="3127248" cy="198837"/>
           </a:xfrm>
           <a:prstGeom prst="rect">
             <a:avLst/>
@@ -17621,27 +16261,75 @@
               </a:spcAft>
             </a:pPr>
             <a:r>
+              <a:rPr lang="fr-FR" sz="1200" b="1" i="0" spc="80" dirty="0">
+                <a:solidFill>
+                  <a:srgbClr val="0E6B66"/>
+                </a:solidFill>
+                <a:latin typeface="Consolas"/>
+              </a:rPr>
+              <a:t>GUIDER</a:t>
+            </a:r>
+            <a:endParaRPr sz="1200" b="1" i="0" spc="80" dirty="0">
+              <a:solidFill>
+                <a:srgbClr val="0E6B66"/>
+              </a:solidFill>
+              <a:latin typeface="Consolas"/>
+            </a:endParaRPr>
+          </a:p>
+        </p:txBody>
+      </p:sp>
+      <p:sp>
+        <p:nvSpPr>
+          <p:cNvPr id="18" name="TextBox 17"/>
+          <p:cNvSpPr txBox="1"/>
+          <p:nvPr/>
+        </p:nvSpPr>
+        <p:spPr>
+          <a:xfrm>
+            <a:off x="8174736" y="3357372"/>
+            <a:ext cx="3127248" cy="291426"/>
+          </a:xfrm>
+          <a:prstGeom prst="rect">
+            <a:avLst/>
+          </a:prstGeom>
+          <a:noFill/>
+        </p:spPr>
+        <p:txBody>
+          <a:bodyPr wrap="square" lIns="0" tIns="0" rIns="0" bIns="0" anchor="t">
+            <a:spAutoFit/>
+          </a:bodyPr>
+          <a:lstStyle/>
+          <a:p>
+            <a:pPr algn="l">
+              <a:lnSpc>
+                <a:spcPct val="115000"/>
+              </a:lnSpc>
+              <a:spcAft>
+                <a:spcPts val="0"/>
+              </a:spcAft>
+            </a:pPr>
+            <a:r>
               <a:rPr b="1" i="0">
                 <a:solidFill>
                   <a:srgbClr val="1B2429"/>
                 </a:solidFill>
                 <a:latin typeface="Cambria"/>
               </a:rPr>
-              <a:t>Vitesse comparable</a:t>
-            </a:r>
-          </a:p>
-        </p:txBody>
-      </p:sp>
-      <p:sp>
-        <p:nvSpPr>
-          <p:cNvPr id="13" name="TextBox 12"/>
+              <a:t>Guide du curateur</a:t>
+            </a:r>
+          </a:p>
+        </p:txBody>
+      </p:sp>
+      <p:sp>
+        <p:nvSpPr>
+          <p:cNvPr id="19" name="TextBox 18"/>
           <p:cNvSpPr txBox="1"/>
           <p:nvPr/>
         </p:nvSpPr>
         <p:spPr>
           <a:xfrm>
-            <a:off x="1097280" y="3840480"/>
-            <a:ext cx="4572000" cy="275717"/>
+            <a:off x="8174736" y="3723132"/>
+            <a:ext cx="3127248" cy="499817"/>
           </a:xfrm>
           <a:prstGeom prst="rect">
             <a:avLst/>
@@ -17663,156 +16351,92 @@
               </a:spcAft>
             </a:pPr>
             <a:r>
-              <a:rPr sz="1600" b="0" i="0">
-                <a:solidFill>
-                  <a:srgbClr val="52605F"/>
-                </a:solidFill>
-                <a:latin typeface="Calibri"/>
-              </a:rPr>
-              <a:t>Pas significativement plus lent que l'annotation seule</a:t>
-            </a:r>
-          </a:p>
-        </p:txBody>
-      </p:sp>
-      <p:sp>
-        <p:nvSpPr>
-          <p:cNvPr id="14" name="Oval 13"/>
-          <p:cNvSpPr/>
-          <p:nvPr/>
-        </p:nvSpPr>
-        <p:spPr>
-          <a:xfrm>
-            <a:off x="6035040" y="3520440"/>
-            <a:ext cx="292608" cy="292608"/>
-          </a:xfrm>
-          <a:prstGeom prst="ellipse">
-            <a:avLst/>
-          </a:prstGeom>
-          <a:solidFill>
-            <a:srgbClr val="0E6B66"/>
-          </a:solidFill>
-          <a:ln>
-            <a:noFill/>
-          </a:ln>
-          <a:effectLst/>
-        </p:spPr>
-        <p:style>
-          <a:lnRef idx="1">
-            <a:schemeClr val="accent1"/>
-          </a:lnRef>
-          <a:fillRef idx="3">
-            <a:schemeClr val="accent1"/>
-          </a:fillRef>
-          <a:effectRef idx="2">
-            <a:schemeClr val="accent1"/>
-          </a:effectRef>
-          <a:fontRef idx="minor">
-            <a:schemeClr val="lt1"/>
-          </a:fontRef>
-        </p:style>
-        <p:txBody>
-          <a:bodyPr lIns="0" tIns="0" rIns="0" bIns="0" rtlCol="0" anchor="ctr"/>
-          <a:lstStyle/>
-          <a:p>
-            <a:pPr algn="ctr"/>
-            <a:r>
-              <a:rPr sz="2000" b="1" dirty="0">
-                <a:solidFill>
-                  <a:srgbClr val="FFFFFF"/>
-                </a:solidFill>
-              </a:rPr>
-              <a:t>✓</a:t>
-            </a:r>
-          </a:p>
-        </p:txBody>
-      </p:sp>
-      <p:sp>
-        <p:nvSpPr>
-          <p:cNvPr id="15" name="TextBox 14"/>
-          <p:cNvSpPr txBox="1"/>
-          <p:nvPr/>
-        </p:nvSpPr>
-        <p:spPr>
-          <a:xfrm>
-            <a:off x="6492240" y="3474720"/>
-            <a:ext cx="4572000" cy="259045"/>
-          </a:xfrm>
-          <a:prstGeom prst="rect">
-            <a:avLst/>
-          </a:prstGeom>
-          <a:noFill/>
-        </p:spPr>
-        <p:txBody>
-          <a:bodyPr wrap="square" lIns="0" tIns="0" rIns="0" bIns="0" anchor="t">
-            <a:spAutoFit/>
-          </a:bodyPr>
-          <a:lstStyle/>
-          <a:p>
-            <a:pPr algn="l">
-              <a:lnSpc>
-                <a:spcPct val="115000"/>
-              </a:lnSpc>
-              <a:spcAft>
-                <a:spcPts val="0"/>
-              </a:spcAft>
-            </a:pPr>
-            <a:r>
-              <a:rPr sz="1600" b="1" i="0">
-                <a:solidFill>
-                  <a:srgbClr val="1B2429"/>
-                </a:solidFill>
-                <a:latin typeface="Cambria"/>
-              </a:rPr>
-              <a:t>Modèle léger</a:t>
-            </a:r>
-          </a:p>
-        </p:txBody>
-      </p:sp>
-      <p:sp>
-        <p:nvSpPr>
-          <p:cNvPr id="16" name="TextBox 15"/>
-          <p:cNvSpPr txBox="1"/>
-          <p:nvPr/>
-        </p:nvSpPr>
-        <p:spPr>
-          <a:xfrm>
-            <a:off x="6492240" y="3840480"/>
-            <a:ext cx="4572000" cy="241285"/>
-          </a:xfrm>
-          <a:prstGeom prst="rect">
-            <a:avLst/>
-          </a:prstGeom>
-          <a:noFill/>
-        </p:spPr>
-        <p:txBody>
-          <a:bodyPr wrap="square" lIns="0" tIns="0" rIns="0" bIns="0" anchor="t">
-            <a:spAutoFit/>
-          </a:bodyPr>
-          <a:lstStyle/>
-          <a:p>
-            <a:pPr algn="l">
-              <a:lnSpc>
-                <a:spcPct val="120000"/>
-              </a:lnSpc>
-              <a:spcAft>
-                <a:spcPts val="0"/>
-              </a:spcAft>
-            </a:pPr>
-            <a:r>
-              <a:rPr sz="1400" b="0" i="0">
-                <a:solidFill>
-                  <a:srgbClr val="52605F"/>
-                </a:solidFill>
-                <a:latin typeface="Calibri"/>
-              </a:rPr>
-              <a:t>118 Mo, pas de fine-tuning, pas de mBERT lourd</a:t>
-            </a:r>
-          </a:p>
-        </p:txBody>
-      </p:sp>
-      <p:sp>
-        <p:nvSpPr>
-          <p:cNvPr id="17" name="TextBox 16"/>
+              <a:rPr sz="1400" b="0" i="0" dirty="0">
+                <a:solidFill>
+                  <a:srgbClr val="52605F"/>
+                </a:solidFill>
+                <a:latin typeface="Calibri"/>
+              </a:rPr>
+              <a:t>Déjà </a:t>
+            </a:r>
+            <a:r>
+              <a:rPr sz="1400" b="0" i="0" dirty="0" err="1">
+                <a:solidFill>
+                  <a:srgbClr val="52605F"/>
+                </a:solidFill>
+                <a:latin typeface="Calibri"/>
+              </a:rPr>
+              <a:t>rédigé</a:t>
+            </a:r>
+            <a:r>
+              <a:rPr sz="1400" b="0" i="0" dirty="0">
+                <a:solidFill>
+                  <a:srgbClr val="52605F"/>
+                </a:solidFill>
+                <a:latin typeface="Calibri"/>
+              </a:rPr>
+              <a:t> — prêt à </a:t>
+            </a:r>
+            <a:r>
+              <a:rPr sz="1400" b="0" i="0" dirty="0" err="1">
+                <a:solidFill>
+                  <a:srgbClr val="52605F"/>
+                </a:solidFill>
+                <a:latin typeface="Calibri"/>
+              </a:rPr>
+              <a:t>l'usage</a:t>
+            </a:r>
+            <a:r>
+              <a:rPr sz="1400" b="0" i="0" dirty="0">
+                <a:solidFill>
+                  <a:srgbClr val="52605F"/>
+                </a:solidFill>
+                <a:latin typeface="Calibri"/>
+              </a:rPr>
+              <a:t> </a:t>
+            </a:r>
+            <a:r>
+              <a:rPr sz="1400" b="0" i="0" dirty="0" err="1">
+                <a:solidFill>
+                  <a:srgbClr val="52605F"/>
+                </a:solidFill>
+                <a:latin typeface="Calibri"/>
+              </a:rPr>
+              <a:t>dès</a:t>
+            </a:r>
+            <a:r>
+              <a:rPr sz="1400" b="0" i="0" dirty="0">
+                <a:solidFill>
+                  <a:srgbClr val="52605F"/>
+                </a:solidFill>
+                <a:latin typeface="Calibri"/>
+              </a:rPr>
+              <a:t> </a:t>
+            </a:r>
+            <a:r>
+              <a:rPr sz="1400" b="0" i="0" dirty="0" err="1">
+                <a:solidFill>
+                  <a:srgbClr val="52605F"/>
+                </a:solidFill>
+                <a:latin typeface="Calibri"/>
+              </a:rPr>
+              <a:t>aujourd'hui</a:t>
+            </a:r>
+            <a:r>
+              <a:rPr sz="1400" b="0" i="0" dirty="0">
+                <a:solidFill>
+                  <a:srgbClr val="52605F"/>
+                </a:solidFill>
+                <a:latin typeface="Calibri"/>
+              </a:rPr>
+              <a:t>.</a:t>
+            </a:r>
+          </a:p>
+        </p:txBody>
+      </p:sp>
+      <p:sp>
+        <p:nvSpPr>
+          <p:cNvPr id="21" name="TextBox 20"/>
           <p:cNvSpPr txBox="1"/>
           <p:nvPr/>
         </p:nvSpPr>
@@ -17847,7 +16471,7 @@
                 </a:solidFill>
                 <a:latin typeface="Consolas"/>
               </a:rPr>
-              <a:t>10 / 12</a:t>
+              <a:t>12 / 12</a:t>
             </a:r>
           </a:p>
         </p:txBody>

--- a/docs/Extraction_terminologique_v2.pptx
+++ b/docs/Extraction_terminologique_v2.pptx
@@ -5,7 +5,7 @@
     <p:sldMasterId id="2147483744" r:id="rId1"/>
   </p:sldMasterIdLst>
   <p:notesMasterIdLst>
-    <p:notesMasterId r:id="rId11"/>
+    <p:notesMasterId r:id="rId12"/>
   </p:notesMasterIdLst>
   <p:sldIdLst>
     <p:sldId id="256" r:id="rId2"/>
@@ -14,9 +14,10 @@
     <p:sldId id="259" r:id="rId5"/>
     <p:sldId id="260" r:id="rId6"/>
     <p:sldId id="262" r:id="rId7"/>
-    <p:sldId id="263" r:id="rId8"/>
-    <p:sldId id="264" r:id="rId9"/>
-    <p:sldId id="267" r:id="rId10"/>
+    <p:sldId id="264" r:id="rId8"/>
+    <p:sldId id="268" r:id="rId9"/>
+    <p:sldId id="263" r:id="rId10"/>
+    <p:sldId id="267" r:id="rId11"/>
   </p:sldIdLst>
   <p:sldSz cx="12192000" cy="6858000"/>
   <p:notesSz cx="6858000" cy="9144000"/>
@@ -132,6 +133,347 @@
     </p:ext>
   </p:extLst>
 </p:presentation>
+</file>
+
+<file path=ppt/charts/chart1.xml><?xml version="1.0" encoding="utf-8"?>
+<c:chartSpace xmlns:c="http://schemas.openxmlformats.org/drawingml/2006/chart" xmlns:a="http://schemas.openxmlformats.org/drawingml/2006/main" xmlns:r="http://schemas.openxmlformats.org/officeDocument/2006/relationships" xmlns:c16r2="http://schemas.microsoft.com/office/drawing/2015/06/chart">
+  <c:date1904 val="0"/>
+  <c:lang val="fr-FR"/>
+  <c:roundedCorners val="1"/>
+  <c:style val="2"/>
+  <c:chart>
+    <c:autoTitleDeleted val="1"/>
+    <c:plotArea>
+      <c:layout/>
+      <c:barChart>
+        <c:barDir val="col"/>
+        <c:grouping val="clustered"/>
+        <c:varyColors val="1"/>
+        <c:ser>
+          <c:idx val="0"/>
+          <c:order val="0"/>
+          <c:tx>
+            <c:strRef>
+              <c:f>Sheet1!$B$1</c:f>
+              <c:strCache>
+                <c:ptCount val="1"/>
+                <c:pt idx="0">
+                  <c:v>Liste 1 · embed (nous)</c:v>
+                </c:pt>
+              </c:strCache>
+            </c:strRef>
+          </c:tx>
+          <c:spPr>
+            <a:solidFill>
+              <a:srgbClr val="0E6B66"/>
+            </a:solidFill>
+          </c:spPr>
+          <c:invertIfNegative val="1"/>
+          <c:dLbls>
+            <c:numFmt formatCode="0.00" sourceLinked="0"/>
+            <c:spPr>
+              <a:noFill/>
+              <a:ln>
+                <a:noFill/>
+              </a:ln>
+              <a:effectLst/>
+            </c:spPr>
+            <c:txPr>
+              <a:bodyPr/>
+              <a:lstStyle/>
+              <a:p>
+                <a:pPr>
+                  <a:defRPr sz="1200">
+                    <a:solidFill>
+                      <a:srgbClr val="1B2429"/>
+                    </a:solidFill>
+                    <a:latin typeface="Consolas"/>
+                  </a:defRPr>
+                </a:pPr>
+                <a:endParaRPr lang="fr-FR"/>
+              </a:p>
+            </c:txPr>
+            <c:dLblPos val="outEnd"/>
+            <c:showLegendKey val="0"/>
+            <c:showVal val="1"/>
+            <c:showCatName val="0"/>
+            <c:showSerName val="0"/>
+            <c:showPercent val="0"/>
+            <c:showBubbleSize val="0"/>
+            <c:showLeaderLines val="0"/>
+            <c:extLst>
+              <c:ext xmlns:c15="http://schemas.microsoft.com/office/drawing/2012/chart" uri="{CE6537A1-D6FC-4f65-9D91-7224C49458BB}">
+                <c15:showLeaderLines val="0"/>
+              </c:ext>
+            </c:extLst>
+          </c:dLbls>
+          <c:cat>
+            <c:strRef>
+              <c:f>Sheet1!$A$2:$A$4</c:f>
+              <c:strCache>
+                <c:ptCount val="3"/>
+                <c:pt idx="0">
+                  <c:v>Précision</c:v>
+                </c:pt>
+                <c:pt idx="1">
+                  <c:v>Rappel</c:v>
+                </c:pt>
+                <c:pt idx="2">
+                  <c:v>F1</c:v>
+                </c:pt>
+              </c:strCache>
+            </c:strRef>
+          </c:cat>
+          <c:val>
+            <c:numRef>
+              <c:f>Sheet1!$B$2:$B$4</c:f>
+              <c:numCache>
+                <c:formatCode>General</c:formatCode>
+                <c:ptCount val="3"/>
+                <c:pt idx="0">
+                  <c:v>0.85399999999999998</c:v>
+                </c:pt>
+                <c:pt idx="1">
+                  <c:v>0.129</c:v>
+                </c:pt>
+                <c:pt idx="2">
+                  <c:v>0.224</c:v>
+                </c:pt>
+              </c:numCache>
+            </c:numRef>
+          </c:val>
+          <c:extLst>
+            <c:ext xmlns:c14="http://schemas.microsoft.com/office/drawing/2007/8/2/chart" uri="{6F2FDCE9-48DA-4B69-8628-5D25D57E5C99}">
+              <c14:invertSolidFillFmt>
+                <c14:spPr xmlns:c14="http://schemas.microsoft.com/office/drawing/2007/8/2/chart">
+                  <a:solidFill>
+                    <a:srgbClr val="FFFFFF"/>
+                  </a:solidFill>
+                </c14:spPr>
+              </c14:invertSolidFillFmt>
+            </c:ext>
+            <c:ext xmlns:c16="http://schemas.microsoft.com/office/drawing/2014/chart" uri="{C3380CC4-5D6E-409C-BE32-E72D297353CC}">
+              <c16:uniqueId val="{00000000-80EF-4647-9344-71820C4451C8}"/>
+            </c:ext>
+          </c:extLst>
+        </c:ser>
+        <c:ser>
+          <c:idx val="1"/>
+          <c:order val="1"/>
+          <c:tx>
+            <c:strRef>
+              <c:f>Sheet1!$C$1</c:f>
+              <c:strCache>
+                <c:ptCount val="1"/>
+                <c:pt idx="0">
+                  <c:v>TermSuite</c:v>
+                </c:pt>
+              </c:strCache>
+            </c:strRef>
+          </c:tx>
+          <c:spPr>
+            <a:solidFill>
+              <a:srgbClr val="B4BCBA"/>
+            </a:solidFill>
+          </c:spPr>
+          <c:invertIfNegative val="1"/>
+          <c:dLbls>
+            <c:numFmt formatCode="0.00" sourceLinked="0"/>
+            <c:spPr>
+              <a:noFill/>
+              <a:ln>
+                <a:noFill/>
+              </a:ln>
+              <a:effectLst/>
+            </c:spPr>
+            <c:txPr>
+              <a:bodyPr/>
+              <a:lstStyle/>
+              <a:p>
+                <a:pPr>
+                  <a:defRPr sz="1200">
+                    <a:solidFill>
+                      <a:srgbClr val="1B2429"/>
+                    </a:solidFill>
+                    <a:latin typeface="Consolas"/>
+                  </a:defRPr>
+                </a:pPr>
+                <a:endParaRPr lang="fr-FR"/>
+              </a:p>
+            </c:txPr>
+            <c:dLblPos val="outEnd"/>
+            <c:showLegendKey val="0"/>
+            <c:showVal val="1"/>
+            <c:showCatName val="0"/>
+            <c:showSerName val="0"/>
+            <c:showPercent val="0"/>
+            <c:showBubbleSize val="0"/>
+            <c:showLeaderLines val="0"/>
+            <c:extLst>
+              <c:ext xmlns:c15="http://schemas.microsoft.com/office/drawing/2012/chart" uri="{CE6537A1-D6FC-4f65-9D91-7224C49458BB}">
+                <c15:showLeaderLines val="0"/>
+              </c:ext>
+            </c:extLst>
+          </c:dLbls>
+          <c:cat>
+            <c:strRef>
+              <c:f>Sheet1!$A$2:$A$4</c:f>
+              <c:strCache>
+                <c:ptCount val="3"/>
+                <c:pt idx="0">
+                  <c:v>Précision</c:v>
+                </c:pt>
+                <c:pt idx="1">
+                  <c:v>Rappel</c:v>
+                </c:pt>
+                <c:pt idx="2">
+                  <c:v>F1</c:v>
+                </c:pt>
+              </c:strCache>
+            </c:strRef>
+          </c:cat>
+          <c:val>
+            <c:numRef>
+              <c:f>Sheet1!$C$2:$C$4</c:f>
+              <c:numCache>
+                <c:formatCode>General</c:formatCode>
+                <c:ptCount val="3"/>
+                <c:pt idx="0">
+                  <c:v>0.52500000000000002</c:v>
+                </c:pt>
+                <c:pt idx="1">
+                  <c:v>0.30299999999999999</c:v>
+                </c:pt>
+                <c:pt idx="2">
+                  <c:v>0.38400000000000001</c:v>
+                </c:pt>
+              </c:numCache>
+            </c:numRef>
+          </c:val>
+          <c:extLst>
+            <c:ext xmlns:c14="http://schemas.microsoft.com/office/drawing/2007/8/2/chart" uri="{6F2FDCE9-48DA-4B69-8628-5D25D57E5C99}">
+              <c14:invertSolidFillFmt>
+                <c14:spPr xmlns:c14="http://schemas.microsoft.com/office/drawing/2007/8/2/chart">
+                  <a:solidFill>
+                    <a:srgbClr val="FFFFFF"/>
+                  </a:solidFill>
+                </c14:spPr>
+              </c14:invertSolidFillFmt>
+            </c:ext>
+            <c:ext xmlns:c16="http://schemas.microsoft.com/office/drawing/2014/chart" uri="{C3380CC4-5D6E-409C-BE32-E72D297353CC}">
+              <c16:uniqueId val="{00000001-80EF-4647-9344-71820C4451C8}"/>
+            </c:ext>
+          </c:extLst>
+        </c:ser>
+        <c:dLbls>
+          <c:dLblPos val="outEnd"/>
+          <c:showLegendKey val="0"/>
+          <c:showVal val="1"/>
+          <c:showCatName val="0"/>
+          <c:showSerName val="0"/>
+          <c:showPercent val="0"/>
+          <c:showBubbleSize val="0"/>
+        </c:dLbls>
+        <c:gapWidth val="80"/>
+        <c:overlap val="-8"/>
+        <c:axId val="-2068027336"/>
+        <c:axId val="-2113994440"/>
+      </c:barChart>
+      <c:catAx>
+        <c:axId val="-2068027336"/>
+        <c:scaling>
+          <c:orientation val="minMax"/>
+        </c:scaling>
+        <c:delete val="0"/>
+        <c:axPos val="b"/>
+        <c:numFmt formatCode="General" sourceLinked="0"/>
+        <c:majorTickMark val="out"/>
+        <c:minorTickMark val="none"/>
+        <c:tickLblPos val="nextTo"/>
+        <c:spPr>
+          <a:ln>
+            <a:solidFill>
+              <a:srgbClr val="D9DDD4"/>
+            </a:solidFill>
+          </a:ln>
+        </c:spPr>
+        <c:txPr>
+          <a:bodyPr/>
+          <a:lstStyle/>
+          <a:p>
+            <a:pPr>
+              <a:defRPr sz="1300">
+                <a:solidFill>
+                  <a:srgbClr val="52605F"/>
+                </a:solidFill>
+                <a:latin typeface="Calibri"/>
+              </a:defRPr>
+            </a:pPr>
+            <a:endParaRPr lang="fr-FR"/>
+          </a:p>
+        </c:txPr>
+        <c:crossAx val="-2113994440"/>
+        <c:crosses val="autoZero"/>
+        <c:auto val="1"/>
+        <c:lblAlgn val="ctr"/>
+        <c:lblOffset val="100"/>
+        <c:noMultiLvlLbl val="0"/>
+      </c:catAx>
+      <c:valAx>
+        <c:axId val="-2113994440"/>
+        <c:scaling>
+          <c:orientation val="minMax"/>
+          <c:max val="1.1000000000000001"/>
+          <c:min val="0"/>
+        </c:scaling>
+        <c:delete val="1"/>
+        <c:axPos val="l"/>
+        <c:numFmt formatCode="General" sourceLinked="1"/>
+        <c:majorTickMark val="out"/>
+        <c:minorTickMark val="none"/>
+        <c:tickLblPos val="nextTo"/>
+        <c:crossAx val="-2068027336"/>
+        <c:crosses val="autoZero"/>
+        <c:crossBetween val="between"/>
+      </c:valAx>
+    </c:plotArea>
+    <c:legend>
+      <c:legendPos val="b"/>
+      <c:overlay val="0"/>
+      <c:txPr>
+        <a:bodyPr/>
+        <a:lstStyle/>
+        <a:p>
+          <a:pPr>
+            <a:defRPr sz="1200">
+              <a:solidFill>
+                <a:srgbClr val="52605F"/>
+              </a:solidFill>
+              <a:latin typeface="Calibri"/>
+            </a:defRPr>
+          </a:pPr>
+          <a:endParaRPr lang="fr-FR"/>
+        </a:p>
+      </c:txPr>
+    </c:legend>
+    <c:plotVisOnly val="1"/>
+    <c:dispBlanksAs val="gap"/>
+    <c:showDLblsOverMax val="1"/>
+  </c:chart>
+  <c:txPr>
+    <a:bodyPr/>
+    <a:lstStyle/>
+    <a:p>
+      <a:pPr>
+        <a:defRPr sz="1800"/>
+      </a:pPr>
+      <a:endParaRPr lang="fr-FR"/>
+    </a:p>
+  </c:txPr>
+  <c:externalData r:id="rId1">
+    <c:autoUpdate val="0"/>
+  </c:externalData>
+</c:chartSpace>
 </file>
 
 <file path=ppt/notesMasters/notesMaster1.xml><?xml version="1.0" encoding="utf-8"?>
@@ -1323,172 +1665,7 @@
           <a:lstStyle/>
           <a:p>
             <a:r>
-              <a:rPr dirty="0" err="1"/>
-              <a:t>Concrètement</a:t>
-            </a:r>
-            <a:r>
-              <a:rPr dirty="0"/>
-              <a:t>, sur un </a:t>
-            </a:r>
-            <a:r>
-              <a:rPr dirty="0" err="1"/>
-              <a:t>vrai</a:t>
-            </a:r>
-            <a:r>
-              <a:rPr dirty="0"/>
-              <a:t> corpus de production : </a:t>
-            </a:r>
-            <a:r>
-              <a:rPr dirty="0" err="1"/>
-              <a:t>RevueESR</a:t>
-            </a:r>
-            <a:r>
-              <a:rPr dirty="0"/>
-              <a:t>, 1539 documents, </a:t>
-            </a:r>
-            <a:r>
-              <a:rPr dirty="0" err="1"/>
-              <a:t>presque</a:t>
-            </a:r>
-            <a:r>
-              <a:rPr dirty="0"/>
-              <a:t> 6 millions de tokens, sur le </a:t>
-            </a:r>
-            <a:r>
-              <a:rPr dirty="0" err="1"/>
-              <a:t>vocabulaire</a:t>
-            </a:r>
-            <a:r>
-              <a:rPr dirty="0"/>
-              <a:t> SEN (</a:t>
-            </a:r>
-            <a:r>
-              <a:rPr dirty="0" err="1"/>
-              <a:t>santé</a:t>
-            </a:r>
-            <a:r>
-              <a:rPr dirty="0"/>
-              <a:t> </a:t>
-            </a:r>
-            <a:r>
-              <a:rPr dirty="0" err="1"/>
-              <a:t>environnementale</a:t>
-            </a:r>
-            <a:r>
-              <a:rPr dirty="0"/>
-              <a:t>). Le run </a:t>
-            </a:r>
-            <a:r>
-              <a:rPr dirty="0" err="1"/>
-              <a:t>complet</a:t>
-            </a:r>
-            <a:r>
-              <a:rPr dirty="0"/>
-              <a:t> a </a:t>
-            </a:r>
-            <a:r>
-              <a:rPr dirty="0" err="1"/>
-              <a:t>tourné</a:t>
-            </a:r>
-            <a:r>
-              <a:rPr dirty="0"/>
-              <a:t> </a:t>
-            </a:r>
-            <a:r>
-              <a:rPr dirty="0" err="1"/>
-              <a:t>en</a:t>
-            </a:r>
-            <a:r>
-              <a:rPr dirty="0"/>
-              <a:t> 28 minutes 39, sans </a:t>
-            </a:r>
-            <a:r>
-              <a:rPr dirty="0" err="1"/>
-              <a:t>incidentchaque</a:t>
-            </a:r>
-            <a:r>
-              <a:rPr dirty="0"/>
-              <a:t> </a:t>
-            </a:r>
-            <a:r>
-              <a:rPr dirty="0" err="1"/>
-              <a:t>candidat</a:t>
-            </a:r>
-            <a:r>
-              <a:rPr dirty="0"/>
-              <a:t> </a:t>
-            </a:r>
-            <a:r>
-              <a:rPr dirty="0" err="1"/>
-              <a:t>n'apparaît</a:t>
-            </a:r>
-            <a:r>
-              <a:rPr dirty="0"/>
-              <a:t> que dans un </a:t>
-            </a:r>
-            <a:r>
-              <a:rPr dirty="0" err="1"/>
-              <a:t>seul</a:t>
-            </a:r>
-            <a:r>
-              <a:rPr dirty="0"/>
-              <a:t> </a:t>
-            </a:r>
-            <a:r>
-              <a:rPr dirty="0" err="1"/>
-              <a:t>niveau</a:t>
-            </a:r>
-            <a:r>
-              <a:rPr dirty="0"/>
-              <a:t>. Et </a:t>
-            </a:r>
-            <a:r>
-              <a:rPr dirty="0" err="1"/>
-              <a:t>l'échantillon</a:t>
-            </a:r>
-            <a:r>
-              <a:rPr dirty="0"/>
-              <a:t> </a:t>
-            </a:r>
-            <a:r>
-              <a:rPr dirty="0" err="1"/>
-              <a:t>niveau</a:t>
-            </a:r>
-            <a:r>
-              <a:rPr dirty="0"/>
-              <a:t> 3 </a:t>
-            </a:r>
-            <a:r>
-              <a:rPr dirty="0" err="1"/>
-              <a:t>est</a:t>
-            </a:r>
-            <a:r>
-              <a:rPr dirty="0"/>
-              <a:t> </a:t>
-            </a:r>
-            <a:r>
-              <a:rPr dirty="0" err="1"/>
-              <a:t>qualitativement</a:t>
-            </a:r>
-            <a:r>
-              <a:rPr dirty="0"/>
-              <a:t> </a:t>
-            </a:r>
-            <a:r>
-              <a:rPr dirty="0" err="1"/>
-              <a:t>cohérent</a:t>
-            </a:r>
-            <a:r>
-              <a:rPr dirty="0"/>
-              <a:t> avec le </a:t>
-            </a:r>
-            <a:r>
-              <a:rPr dirty="0" err="1"/>
-              <a:t>domaine</a:t>
-            </a:r>
-            <a:r>
-              <a:rPr dirty="0"/>
-              <a:t> du corpus.</a:t>
+              <a:t>Pour valider objectivement, on s'est aussi mesuré contre ACTER, un corpus public annoté à la main indépendamment de nous — 18 900 termes, français et anglais, quatre domaines. Trois indicateurs mesurés, micro-moyenne sur les 8 combinaisons domaine/langue, algorithme PositionRank : précision 0.551 (parmi ce qu'on propose, la part de vrais termes), rappel 0.454 (parmi les vrais termes du domaine, la part qu'on retrouve), F1 0.498 — équilibre des deux, notre chiffre de référence. Face à D-Terminer, la référence qui utilise un gros modèle de langue sur GPU, on se situe dans la fourchette haute de leurs résultats, sans aucun GPU.</a:t>
             </a:r>
           </a:p>
         </p:txBody>
@@ -1558,7 +1735,172 @@
           <a:lstStyle/>
           <a:p>
             <a:r>
-              <a:t>Pour valider objectivement, on s'est aussi mesuré contre ACTER, un corpus public annoté à la main indépendamment de nous — 18 900 termes, français et anglais, quatre domaines. Trois indicateurs mesurés, micro-moyenne sur les 8 combinaisons domaine/langue, algorithme PositionRank : précision 0.551 (parmi ce qu'on propose, la part de vrais termes), rappel 0.454 (parmi les vrais termes du domaine, la part qu'on retrouve), F1 0.498 — équilibre des deux, notre chiffre de référence. Face à D-Terminer, la référence qui utilise un gros modèle de langue sur GPU, on se situe dans la fourchette haute de leurs résultats, sans aucun GPU.</a:t>
+              <a:rPr dirty="0" err="1"/>
+              <a:t>Concrètement</a:t>
+            </a:r>
+            <a:r>
+              <a:rPr dirty="0"/>
+              <a:t>, sur un </a:t>
+            </a:r>
+            <a:r>
+              <a:rPr dirty="0" err="1"/>
+              <a:t>vrai</a:t>
+            </a:r>
+            <a:r>
+              <a:rPr dirty="0"/>
+              <a:t> corpus de production : </a:t>
+            </a:r>
+            <a:r>
+              <a:rPr dirty="0" err="1"/>
+              <a:t>RevueESR</a:t>
+            </a:r>
+            <a:r>
+              <a:rPr dirty="0"/>
+              <a:t>, 1539 documents, </a:t>
+            </a:r>
+            <a:r>
+              <a:rPr dirty="0" err="1"/>
+              <a:t>presque</a:t>
+            </a:r>
+            <a:r>
+              <a:rPr dirty="0"/>
+              <a:t> 6 millions de tokens, sur le </a:t>
+            </a:r>
+            <a:r>
+              <a:rPr dirty="0" err="1"/>
+              <a:t>vocabulaire</a:t>
+            </a:r>
+            <a:r>
+              <a:rPr dirty="0"/>
+              <a:t> SEN (</a:t>
+            </a:r>
+            <a:r>
+              <a:rPr dirty="0" err="1"/>
+              <a:t>santé</a:t>
+            </a:r>
+            <a:r>
+              <a:rPr dirty="0"/>
+              <a:t> </a:t>
+            </a:r>
+            <a:r>
+              <a:rPr dirty="0" err="1"/>
+              <a:t>environnementale</a:t>
+            </a:r>
+            <a:r>
+              <a:rPr dirty="0"/>
+              <a:t>). Le run </a:t>
+            </a:r>
+            <a:r>
+              <a:rPr dirty="0" err="1"/>
+              <a:t>complet</a:t>
+            </a:r>
+            <a:r>
+              <a:rPr dirty="0"/>
+              <a:t> a </a:t>
+            </a:r>
+            <a:r>
+              <a:rPr dirty="0" err="1"/>
+              <a:t>tourné</a:t>
+            </a:r>
+            <a:r>
+              <a:rPr dirty="0"/>
+              <a:t> </a:t>
+            </a:r>
+            <a:r>
+              <a:rPr dirty="0" err="1"/>
+              <a:t>en</a:t>
+            </a:r>
+            <a:r>
+              <a:rPr dirty="0"/>
+              <a:t> 28 minutes 39, sans </a:t>
+            </a:r>
+            <a:r>
+              <a:rPr dirty="0" err="1"/>
+              <a:t>incidentchaque</a:t>
+            </a:r>
+            <a:r>
+              <a:rPr dirty="0"/>
+              <a:t> </a:t>
+            </a:r>
+            <a:r>
+              <a:rPr dirty="0" err="1"/>
+              <a:t>candidat</a:t>
+            </a:r>
+            <a:r>
+              <a:rPr dirty="0"/>
+              <a:t> </a:t>
+            </a:r>
+            <a:r>
+              <a:rPr dirty="0" err="1"/>
+              <a:t>n'apparaît</a:t>
+            </a:r>
+            <a:r>
+              <a:rPr dirty="0"/>
+              <a:t> que dans un </a:t>
+            </a:r>
+            <a:r>
+              <a:rPr dirty="0" err="1"/>
+              <a:t>seul</a:t>
+            </a:r>
+            <a:r>
+              <a:rPr dirty="0"/>
+              <a:t> </a:t>
+            </a:r>
+            <a:r>
+              <a:rPr dirty="0" err="1"/>
+              <a:t>niveau</a:t>
+            </a:r>
+            <a:r>
+              <a:rPr dirty="0"/>
+              <a:t>. Et </a:t>
+            </a:r>
+            <a:r>
+              <a:rPr dirty="0" err="1"/>
+              <a:t>l'échantillon</a:t>
+            </a:r>
+            <a:r>
+              <a:rPr dirty="0"/>
+              <a:t> </a:t>
+            </a:r>
+            <a:r>
+              <a:rPr dirty="0" err="1"/>
+              <a:t>niveau</a:t>
+            </a:r>
+            <a:r>
+              <a:rPr dirty="0"/>
+              <a:t> 3 </a:t>
+            </a:r>
+            <a:r>
+              <a:rPr dirty="0" err="1"/>
+              <a:t>est</a:t>
+            </a:r>
+            <a:r>
+              <a:rPr dirty="0"/>
+              <a:t> </a:t>
+            </a:r>
+            <a:r>
+              <a:rPr dirty="0" err="1"/>
+              <a:t>qualitativement</a:t>
+            </a:r>
+            <a:r>
+              <a:rPr dirty="0"/>
+              <a:t> </a:t>
+            </a:r>
+            <a:r>
+              <a:rPr dirty="0" err="1"/>
+              <a:t>cohérent</a:t>
+            </a:r>
+            <a:r>
+              <a:rPr dirty="0"/>
+              <a:t> avec le </a:t>
+            </a:r>
+            <a:r>
+              <a:rPr dirty="0" err="1"/>
+              <a:t>domaine</a:t>
+            </a:r>
+            <a:r>
+              <a:rPr dirty="0"/>
+              <a:t> du corpus.</a:t>
             </a:r>
           </a:p>
         </p:txBody>
@@ -1898,7 +2240,7 @@
           <a:p>
             <a:fld id="{5BCAD085-E8A6-8845-BD4E-CB4CCA059FC4}" type="datetimeFigureOut">
               <a:rPr lang="en-US" smtClean="0"/>
-              <a:t>9/15/2026</a:t>
+              <a:t>10/9/2026</a:t>
             </a:fld>
             <a:endParaRPr lang="en-US"/>
           </a:p>
@@ -2160,7 +2502,7 @@
           <a:p>
             <a:fld id="{5BCAD085-E8A6-8845-BD4E-CB4CCA059FC4}" type="datetimeFigureOut">
               <a:rPr lang="en-US" smtClean="0"/>
-              <a:t>9/15/2026</a:t>
+              <a:t>10/9/2026</a:t>
             </a:fld>
             <a:endParaRPr lang="en-US"/>
           </a:p>
@@ -2395,7 +2737,7 @@
           <a:p>
             <a:fld id="{5BCAD085-E8A6-8845-BD4E-CB4CCA059FC4}" type="datetimeFigureOut">
               <a:rPr lang="en-US" smtClean="0"/>
-              <a:t>9/15/2026</a:t>
+              <a:t>10/9/2026</a:t>
             </a:fld>
             <a:endParaRPr lang="en-US"/>
           </a:p>
@@ -2635,7 +2977,7 @@
           <a:p>
             <a:fld id="{5BCAD085-E8A6-8845-BD4E-CB4CCA059FC4}" type="datetimeFigureOut">
               <a:rPr lang="en-US" smtClean="0"/>
-              <a:t>9/15/2026</a:t>
+              <a:t>10/9/2026</a:t>
             </a:fld>
             <a:endParaRPr lang="en-US"/>
           </a:p>
@@ -2942,7 +3284,7 @@
           <a:p>
             <a:fld id="{5BCAD085-E8A6-8845-BD4E-CB4CCA059FC4}" type="datetimeFigureOut">
               <a:rPr lang="en-US" smtClean="0"/>
-              <a:t>9/15/2026</a:t>
+              <a:t>10/9/2026</a:t>
             </a:fld>
             <a:endParaRPr lang="en-US"/>
           </a:p>
@@ -3244,7 +3586,7 @@
           <a:p>
             <a:fld id="{5BCAD085-E8A6-8845-BD4E-CB4CCA059FC4}" type="datetimeFigureOut">
               <a:rPr lang="en-US" smtClean="0"/>
-              <a:t>9/15/2026</a:t>
+              <a:t>10/9/2026</a:t>
             </a:fld>
             <a:endParaRPr lang="en-US"/>
           </a:p>
@@ -3666,7 +4008,7 @@
           <a:p>
             <a:fld id="{5BCAD085-E8A6-8845-BD4E-CB4CCA059FC4}" type="datetimeFigureOut">
               <a:rPr lang="en-US" smtClean="0"/>
-              <a:t>9/15/2026</a:t>
+              <a:t>10/9/2026</a:t>
             </a:fld>
             <a:endParaRPr lang="en-US"/>
           </a:p>
@@ -3828,7 +4170,7 @@
           <a:p>
             <a:fld id="{5BCAD085-E8A6-8845-BD4E-CB4CCA059FC4}" type="datetimeFigureOut">
               <a:rPr lang="en-US" smtClean="0"/>
-              <a:t>9/15/2026</a:t>
+              <a:t>10/9/2026</a:t>
             </a:fld>
             <a:endParaRPr lang="en-US"/>
           </a:p>
@@ -3923,7 +4265,7 @@
           <a:p>
             <a:fld id="{5BCAD085-E8A6-8845-BD4E-CB4CCA059FC4}" type="datetimeFigureOut">
               <a:rPr lang="en-US" smtClean="0"/>
-              <a:t>9/15/2026</a:t>
+              <a:t>10/9/2026</a:t>
             </a:fld>
             <a:endParaRPr lang="en-US"/>
           </a:p>
@@ -4301,7 +4643,7 @@
           <a:p>
             <a:fld id="{5BCAD085-E8A6-8845-BD4E-CB4CCA059FC4}" type="datetimeFigureOut">
               <a:rPr lang="en-US" smtClean="0"/>
-              <a:t>9/15/2026</a:t>
+              <a:t>10/9/2026</a:t>
             </a:fld>
             <a:endParaRPr lang="en-US"/>
           </a:p>
@@ -4590,7 +4932,7 @@
           <a:p>
             <a:fld id="{5BCAD085-E8A6-8845-BD4E-CB4CCA059FC4}" type="datetimeFigureOut">
               <a:rPr lang="en-US" smtClean="0"/>
-              <a:t>9/15/2026</a:t>
+              <a:t>10/9/2026</a:t>
             </a:fld>
             <a:endParaRPr lang="en-US"/>
           </a:p>
@@ -4801,7 +5143,7 @@
           <a:p>
             <a:fld id="{5BCAD085-E8A6-8845-BD4E-CB4CCA059FC4}" type="datetimeFigureOut">
               <a:rPr lang="en-US" smtClean="0"/>
-              <a:t>9/15/2026</a:t>
+              <a:t>10/9/2026</a:t>
             </a:fld>
             <a:endParaRPr lang="en-US"/>
           </a:p>
@@ -5869,6 +6211,916 @@
 </p:sld>
 </file>
 
+<file path=ppt/slides/slide10.xml><?xml version="1.0" encoding="utf-8"?>
+<p:sld xmlns:a="http://schemas.openxmlformats.org/drawingml/2006/main" xmlns:r="http://schemas.openxmlformats.org/officeDocument/2006/relationships" xmlns:p="http://schemas.openxmlformats.org/presentationml/2006/main">
+  <p:cSld>
+    <p:spTree>
+      <p:nvGrpSpPr>
+        <p:cNvPr id="1" name=""/>
+        <p:cNvGrpSpPr/>
+        <p:nvPr/>
+      </p:nvGrpSpPr>
+      <p:grpSpPr>
+        <a:xfrm>
+          <a:off x="0" y="0"/>
+          <a:ext cx="0" cy="0"/>
+          <a:chOff x="0" y="0"/>
+          <a:chExt cx="0" cy="0"/>
+        </a:xfrm>
+      </p:grpSpPr>
+      <p:sp>
+        <p:nvSpPr>
+          <p:cNvPr id="3" name="TextBox 2"/>
+          <p:cNvSpPr txBox="1"/>
+          <p:nvPr/>
+        </p:nvSpPr>
+        <p:spPr>
+          <a:xfrm>
+            <a:off x="452511" y="205740"/>
+            <a:ext cx="5486400" cy="320040"/>
+          </a:xfrm>
+          <a:prstGeom prst="rect">
+            <a:avLst/>
+          </a:prstGeom>
+          <a:noFill/>
+        </p:spPr>
+        <p:txBody>
+          <a:bodyPr wrap="square" lIns="0" tIns="0" rIns="0" bIns="0" anchor="t">
+            <a:spAutoFit/>
+          </a:bodyPr>
+          <a:lstStyle/>
+          <a:p>
+            <a:pPr algn="l">
+              <a:lnSpc>
+                <a:spcPct val="115000"/>
+              </a:lnSpc>
+              <a:spcAft>
+                <a:spcPts val="0"/>
+              </a:spcAft>
+            </a:pPr>
+            <a:r>
+              <a:rPr sz="1200" b="0" i="0" spc="140">
+                <a:solidFill>
+                  <a:srgbClr val="7C8886"/>
+                </a:solidFill>
+                <a:latin typeface="Consolas"/>
+              </a:rPr>
+              <a:t>SUITE</a:t>
+            </a:r>
+          </a:p>
+        </p:txBody>
+      </p:sp>
+      <p:sp>
+        <p:nvSpPr>
+          <p:cNvPr id="4" name="TextBox 3"/>
+          <p:cNvSpPr txBox="1"/>
+          <p:nvPr/>
+        </p:nvSpPr>
+        <p:spPr>
+          <a:xfrm>
+            <a:off x="640080" y="777240"/>
+            <a:ext cx="8686800" cy="1005840"/>
+          </a:xfrm>
+          <a:prstGeom prst="rect">
+            <a:avLst/>
+          </a:prstGeom>
+          <a:noFill/>
+        </p:spPr>
+        <p:txBody>
+          <a:bodyPr wrap="square" lIns="0" tIns="0" rIns="0" bIns="0" anchor="t">
+            <a:spAutoFit/>
+          </a:bodyPr>
+          <a:lstStyle/>
+          <a:p>
+            <a:pPr algn="l">
+              <a:lnSpc>
+                <a:spcPct val="100000"/>
+              </a:lnSpc>
+              <a:spcAft>
+                <a:spcPts val="0"/>
+              </a:spcAft>
+            </a:pPr>
+            <a:r>
+              <a:rPr sz="3200" b="1" i="0">
+                <a:solidFill>
+                  <a:srgbClr val="1B2429"/>
+                </a:solidFill>
+                <a:latin typeface="Cambria"/>
+              </a:rPr>
+              <a:t>Prochaines étapes</a:t>
+            </a:r>
+          </a:p>
+        </p:txBody>
+      </p:sp>
+      <p:sp>
+        <p:nvSpPr>
+          <p:cNvPr id="5" name="Rectangle 4"/>
+          <p:cNvSpPr/>
+          <p:nvPr/>
+        </p:nvSpPr>
+        <p:spPr>
+          <a:xfrm>
+            <a:off x="640080" y="2880360"/>
+            <a:ext cx="3456432" cy="38100"/>
+          </a:xfrm>
+          <a:prstGeom prst="rect">
+            <a:avLst/>
+          </a:prstGeom>
+          <a:solidFill>
+            <a:srgbClr val="52605F"/>
+          </a:solidFill>
+          <a:ln>
+            <a:noFill/>
+          </a:ln>
+          <a:effectLst/>
+        </p:spPr>
+        <p:style>
+          <a:lnRef idx="1">
+            <a:schemeClr val="accent1"/>
+          </a:lnRef>
+          <a:fillRef idx="3">
+            <a:schemeClr val="accent1"/>
+          </a:fillRef>
+          <a:effectRef idx="2">
+            <a:schemeClr val="accent1"/>
+          </a:effectRef>
+          <a:fontRef idx="minor">
+            <a:schemeClr val="lt1"/>
+          </a:fontRef>
+        </p:style>
+        <p:txBody>
+          <a:bodyPr rtlCol="0" anchor="ctr"/>
+          <a:lstStyle/>
+          <a:p>
+            <a:pPr algn="ctr"/>
+            <a:endParaRPr sz="2400"/>
+          </a:p>
+        </p:txBody>
+      </p:sp>
+      <p:sp>
+        <p:nvSpPr>
+          <p:cNvPr id="6" name="Rectangle 5"/>
+          <p:cNvSpPr/>
+          <p:nvPr/>
+        </p:nvSpPr>
+        <p:spPr>
+          <a:xfrm>
+            <a:off x="640080" y="2918460"/>
+            <a:ext cx="3456432" cy="2065020"/>
+          </a:xfrm>
+          <a:prstGeom prst="rect">
+            <a:avLst/>
+          </a:prstGeom>
+          <a:solidFill>
+            <a:srgbClr val="FBFBF8"/>
+          </a:solidFill>
+          <a:ln w="9525">
+            <a:solidFill>
+              <a:srgbClr val="D9DDD4"/>
+            </a:solidFill>
+          </a:ln>
+          <a:effectLst/>
+        </p:spPr>
+        <p:style>
+          <a:lnRef idx="1">
+            <a:schemeClr val="accent1"/>
+          </a:lnRef>
+          <a:fillRef idx="3">
+            <a:schemeClr val="accent1"/>
+          </a:fillRef>
+          <a:effectRef idx="2">
+            <a:schemeClr val="accent1"/>
+          </a:effectRef>
+          <a:fontRef idx="minor">
+            <a:schemeClr val="lt1"/>
+          </a:fontRef>
+        </p:style>
+        <p:txBody>
+          <a:bodyPr rtlCol="0" anchor="ctr"/>
+          <a:lstStyle/>
+          <a:p>
+            <a:pPr algn="ctr"/>
+            <a:endParaRPr sz="2400"/>
+          </a:p>
+        </p:txBody>
+      </p:sp>
+      <p:sp>
+        <p:nvSpPr>
+          <p:cNvPr id="7" name="TextBox 6"/>
+          <p:cNvSpPr txBox="1"/>
+          <p:nvPr/>
+        </p:nvSpPr>
+        <p:spPr>
+          <a:xfrm>
+            <a:off x="804672" y="3046476"/>
+            <a:ext cx="3127248" cy="198837"/>
+          </a:xfrm>
+          <a:prstGeom prst="rect">
+            <a:avLst/>
+          </a:prstGeom>
+          <a:noFill/>
+        </p:spPr>
+        <p:txBody>
+          <a:bodyPr wrap="square" lIns="0" tIns="0" rIns="0" bIns="0" anchor="t">
+            <a:spAutoFit/>
+          </a:bodyPr>
+          <a:lstStyle/>
+          <a:p>
+            <a:pPr algn="l">
+              <a:lnSpc>
+                <a:spcPct val="115000"/>
+              </a:lnSpc>
+              <a:spcAft>
+                <a:spcPts val="0"/>
+              </a:spcAft>
+            </a:pPr>
+            <a:r>
+              <a:rPr sz="1200" b="1" i="0" spc="80">
+                <a:solidFill>
+                  <a:srgbClr val="52605F"/>
+                </a:solidFill>
+                <a:latin typeface="Consolas"/>
+              </a:rPr>
+              <a:t>RELEASE</a:t>
+            </a:r>
+          </a:p>
+        </p:txBody>
+      </p:sp>
+      <p:sp>
+        <p:nvSpPr>
+          <p:cNvPr id="8" name="TextBox 7"/>
+          <p:cNvSpPr txBox="1"/>
+          <p:nvPr/>
+        </p:nvSpPr>
+        <p:spPr>
+          <a:xfrm>
+            <a:off x="804672" y="3357372"/>
+            <a:ext cx="3127248" cy="291426"/>
+          </a:xfrm>
+          <a:prstGeom prst="rect">
+            <a:avLst/>
+          </a:prstGeom>
+          <a:noFill/>
+        </p:spPr>
+        <p:txBody>
+          <a:bodyPr wrap="square" lIns="0" tIns="0" rIns="0" bIns="0" anchor="t">
+            <a:spAutoFit/>
+          </a:bodyPr>
+          <a:lstStyle/>
+          <a:p>
+            <a:pPr algn="l">
+              <a:lnSpc>
+                <a:spcPct val="115000"/>
+              </a:lnSpc>
+              <a:spcAft>
+                <a:spcPts val="0"/>
+              </a:spcAft>
+            </a:pPr>
+            <a:r>
+              <a:rPr b="1" i="0">
+                <a:solidFill>
+                  <a:srgbClr val="1B2429"/>
+                </a:solidFill>
+                <a:latin typeface="Cambria"/>
+              </a:rPr>
+              <a:t>Tag officiel</a:t>
+            </a:r>
+          </a:p>
+        </p:txBody>
+      </p:sp>
+      <p:sp>
+        <p:nvSpPr>
+          <p:cNvPr id="9" name="TextBox 8"/>
+          <p:cNvSpPr txBox="1"/>
+          <p:nvPr/>
+        </p:nvSpPr>
+        <p:spPr>
+          <a:xfrm>
+            <a:off x="804672" y="3723132"/>
+            <a:ext cx="3127248" cy="241285"/>
+          </a:xfrm>
+          <a:prstGeom prst="rect">
+            <a:avLst/>
+          </a:prstGeom>
+          <a:noFill/>
+        </p:spPr>
+        <p:txBody>
+          <a:bodyPr wrap="square" lIns="0" tIns="0" rIns="0" bIns="0" anchor="t">
+            <a:spAutoFit/>
+          </a:bodyPr>
+          <a:lstStyle/>
+          <a:p>
+            <a:pPr algn="l">
+              <a:lnSpc>
+                <a:spcPct val="120000"/>
+              </a:lnSpc>
+              <a:spcAft>
+                <a:spcPts val="0"/>
+              </a:spcAft>
+            </a:pPr>
+            <a:r>
+              <a:rPr sz="1400" b="0" i="0" dirty="0" err="1">
+                <a:solidFill>
+                  <a:srgbClr val="52605F"/>
+                </a:solidFill>
+                <a:latin typeface="Calibri"/>
+              </a:rPr>
+              <a:t>Finaliser</a:t>
+            </a:r>
+            <a:r>
+              <a:rPr sz="1400" b="0" i="0" dirty="0">
+                <a:solidFill>
+                  <a:srgbClr val="52605F"/>
+                </a:solidFill>
+                <a:latin typeface="Calibri"/>
+              </a:rPr>
+              <a:t> et </a:t>
+            </a:r>
+            <a:r>
+              <a:rPr sz="1400" b="0" i="0" dirty="0" err="1">
+                <a:solidFill>
+                  <a:srgbClr val="52605F"/>
+                </a:solidFill>
+                <a:latin typeface="Calibri"/>
+              </a:rPr>
+              <a:t>publier</a:t>
+            </a:r>
+            <a:r>
+              <a:rPr sz="1400" b="0" i="0" dirty="0">
+                <a:solidFill>
+                  <a:srgbClr val="52605F"/>
+                </a:solidFill>
+                <a:latin typeface="Calibri"/>
+              </a:rPr>
+              <a:t> la release 2.0.</a:t>
+            </a:r>
+          </a:p>
+        </p:txBody>
+      </p:sp>
+      <p:sp>
+        <p:nvSpPr>
+          <p:cNvPr id="10" name="Rectangle 9"/>
+          <p:cNvSpPr/>
+          <p:nvPr/>
+        </p:nvSpPr>
+        <p:spPr>
+          <a:xfrm>
+            <a:off x="4325112" y="2880360"/>
+            <a:ext cx="3456432" cy="38100"/>
+          </a:xfrm>
+          <a:prstGeom prst="rect">
+            <a:avLst/>
+          </a:prstGeom>
+          <a:solidFill>
+            <a:srgbClr val="A8752A"/>
+          </a:solidFill>
+          <a:ln>
+            <a:noFill/>
+          </a:ln>
+          <a:effectLst/>
+        </p:spPr>
+        <p:style>
+          <a:lnRef idx="1">
+            <a:schemeClr val="accent1"/>
+          </a:lnRef>
+          <a:fillRef idx="3">
+            <a:schemeClr val="accent1"/>
+          </a:fillRef>
+          <a:effectRef idx="2">
+            <a:schemeClr val="accent1"/>
+          </a:effectRef>
+          <a:fontRef idx="minor">
+            <a:schemeClr val="lt1"/>
+          </a:fontRef>
+        </p:style>
+        <p:txBody>
+          <a:bodyPr rtlCol="0" anchor="ctr"/>
+          <a:lstStyle/>
+          <a:p>
+            <a:pPr algn="ctr"/>
+            <a:endParaRPr sz="2400"/>
+          </a:p>
+        </p:txBody>
+      </p:sp>
+      <p:sp>
+        <p:nvSpPr>
+          <p:cNvPr id="11" name="Rectangle 10"/>
+          <p:cNvSpPr/>
+          <p:nvPr/>
+        </p:nvSpPr>
+        <p:spPr>
+          <a:xfrm>
+            <a:off x="4325112" y="2918460"/>
+            <a:ext cx="3456432" cy="2065020"/>
+          </a:xfrm>
+          <a:prstGeom prst="rect">
+            <a:avLst/>
+          </a:prstGeom>
+          <a:solidFill>
+            <a:srgbClr val="FBFBF8"/>
+          </a:solidFill>
+          <a:ln w="9525">
+            <a:solidFill>
+              <a:srgbClr val="D9DDD4"/>
+            </a:solidFill>
+          </a:ln>
+          <a:effectLst/>
+        </p:spPr>
+        <p:style>
+          <a:lnRef idx="1">
+            <a:schemeClr val="accent1"/>
+          </a:lnRef>
+          <a:fillRef idx="3">
+            <a:schemeClr val="accent1"/>
+          </a:fillRef>
+          <a:effectRef idx="2">
+            <a:schemeClr val="accent1"/>
+          </a:effectRef>
+          <a:fontRef idx="minor">
+            <a:schemeClr val="lt1"/>
+          </a:fontRef>
+        </p:style>
+        <p:txBody>
+          <a:bodyPr rtlCol="0" anchor="ctr"/>
+          <a:lstStyle/>
+          <a:p>
+            <a:pPr algn="ctr"/>
+            <a:endParaRPr sz="2400"/>
+          </a:p>
+        </p:txBody>
+      </p:sp>
+      <p:sp>
+        <p:nvSpPr>
+          <p:cNvPr id="12" name="TextBox 11"/>
+          <p:cNvSpPr txBox="1"/>
+          <p:nvPr/>
+        </p:nvSpPr>
+        <p:spPr>
+          <a:xfrm>
+            <a:off x="4489704" y="3046476"/>
+            <a:ext cx="3127248" cy="198837"/>
+          </a:xfrm>
+          <a:prstGeom prst="rect">
+            <a:avLst/>
+          </a:prstGeom>
+          <a:noFill/>
+        </p:spPr>
+        <p:txBody>
+          <a:bodyPr wrap="square" lIns="0" tIns="0" rIns="0" bIns="0" anchor="t">
+            <a:spAutoFit/>
+          </a:bodyPr>
+          <a:lstStyle/>
+          <a:p>
+            <a:pPr algn="l">
+              <a:lnSpc>
+                <a:spcPct val="115000"/>
+              </a:lnSpc>
+              <a:spcAft>
+                <a:spcPts val="0"/>
+              </a:spcAft>
+            </a:pPr>
+            <a:r>
+              <a:rPr sz="1200" b="1" i="0" spc="80">
+                <a:solidFill>
+                  <a:srgbClr val="A8752A"/>
+                </a:solidFill>
+                <a:latin typeface="Consolas"/>
+              </a:rPr>
+              <a:t>PERFORMANCE</a:t>
+            </a:r>
+          </a:p>
+        </p:txBody>
+      </p:sp>
+      <p:sp>
+        <p:nvSpPr>
+          <p:cNvPr id="13" name="TextBox 12"/>
+          <p:cNvSpPr txBox="1"/>
+          <p:nvPr/>
+        </p:nvSpPr>
+        <p:spPr>
+          <a:xfrm>
+            <a:off x="4489704" y="3357372"/>
+            <a:ext cx="3127248" cy="291426"/>
+          </a:xfrm>
+          <a:prstGeom prst="rect">
+            <a:avLst/>
+          </a:prstGeom>
+          <a:noFill/>
+        </p:spPr>
+        <p:txBody>
+          <a:bodyPr wrap="square" lIns="0" tIns="0" rIns="0" bIns="0" anchor="t">
+            <a:spAutoFit/>
+          </a:bodyPr>
+          <a:lstStyle/>
+          <a:p>
+            <a:pPr algn="l">
+              <a:lnSpc>
+                <a:spcPct val="115000"/>
+              </a:lnSpc>
+              <a:spcAft>
+                <a:spcPts val="0"/>
+              </a:spcAft>
+            </a:pPr>
+            <a:r>
+              <a:rPr b="1" i="0">
+                <a:solidFill>
+                  <a:srgbClr val="1B2429"/>
+                </a:solidFill>
+                <a:latin typeface="Cambria"/>
+              </a:rPr>
+              <a:t>Gros corpus</a:t>
+            </a:r>
+          </a:p>
+        </p:txBody>
+      </p:sp>
+      <p:sp>
+        <p:nvSpPr>
+          <p:cNvPr id="14" name="TextBox 13"/>
+          <p:cNvSpPr txBox="1"/>
+          <p:nvPr/>
+        </p:nvSpPr>
+        <p:spPr>
+          <a:xfrm>
+            <a:off x="4489704" y="3723132"/>
+            <a:ext cx="3127248" cy="499817"/>
+          </a:xfrm>
+          <a:prstGeom prst="rect">
+            <a:avLst/>
+          </a:prstGeom>
+          <a:noFill/>
+        </p:spPr>
+        <p:txBody>
+          <a:bodyPr wrap="square" lIns="0" tIns="0" rIns="0" bIns="0" anchor="t">
+            <a:spAutoFit/>
+          </a:bodyPr>
+          <a:lstStyle/>
+          <a:p>
+            <a:pPr algn="l">
+              <a:lnSpc>
+                <a:spcPct val="120000"/>
+              </a:lnSpc>
+              <a:spcAft>
+                <a:spcPts val="0"/>
+              </a:spcAft>
+            </a:pPr>
+            <a:r>
+              <a:rPr sz="1400" b="0" i="0">
+                <a:solidFill>
+                  <a:srgbClr val="52605F"/>
+                </a:solidFill>
+                <a:latin typeface="Calibri"/>
+              </a:rPr>
+              <a:t>Fiabiliser la détection de variantes sur les très gros volumes.</a:t>
+            </a:r>
+          </a:p>
+        </p:txBody>
+      </p:sp>
+      <p:sp>
+        <p:nvSpPr>
+          <p:cNvPr id="15" name="Rectangle 14"/>
+          <p:cNvSpPr/>
+          <p:nvPr/>
+        </p:nvSpPr>
+        <p:spPr>
+          <a:xfrm>
+            <a:off x="8010144" y="2880360"/>
+            <a:ext cx="3456432" cy="38100"/>
+          </a:xfrm>
+          <a:prstGeom prst="rect">
+            <a:avLst/>
+          </a:prstGeom>
+          <a:solidFill>
+            <a:srgbClr val="0E6B66"/>
+          </a:solidFill>
+          <a:ln>
+            <a:noFill/>
+          </a:ln>
+          <a:effectLst/>
+        </p:spPr>
+        <p:style>
+          <a:lnRef idx="1">
+            <a:schemeClr val="accent1"/>
+          </a:lnRef>
+          <a:fillRef idx="3">
+            <a:schemeClr val="accent1"/>
+          </a:fillRef>
+          <a:effectRef idx="2">
+            <a:schemeClr val="accent1"/>
+          </a:effectRef>
+          <a:fontRef idx="minor">
+            <a:schemeClr val="lt1"/>
+          </a:fontRef>
+        </p:style>
+        <p:txBody>
+          <a:bodyPr rtlCol="0" anchor="ctr"/>
+          <a:lstStyle/>
+          <a:p>
+            <a:pPr algn="ctr"/>
+            <a:endParaRPr sz="2400"/>
+          </a:p>
+        </p:txBody>
+      </p:sp>
+      <p:sp>
+        <p:nvSpPr>
+          <p:cNvPr id="16" name="Rectangle 15"/>
+          <p:cNvSpPr/>
+          <p:nvPr/>
+        </p:nvSpPr>
+        <p:spPr>
+          <a:xfrm>
+            <a:off x="8010144" y="2918460"/>
+            <a:ext cx="3456432" cy="2065020"/>
+          </a:xfrm>
+          <a:prstGeom prst="rect">
+            <a:avLst/>
+          </a:prstGeom>
+          <a:solidFill>
+            <a:srgbClr val="FBFBF8"/>
+          </a:solidFill>
+          <a:ln w="9525">
+            <a:solidFill>
+              <a:srgbClr val="D9DDD4"/>
+            </a:solidFill>
+          </a:ln>
+          <a:effectLst/>
+        </p:spPr>
+        <p:style>
+          <a:lnRef idx="1">
+            <a:schemeClr val="accent1"/>
+          </a:lnRef>
+          <a:fillRef idx="3">
+            <a:schemeClr val="accent1"/>
+          </a:fillRef>
+          <a:effectRef idx="2">
+            <a:schemeClr val="accent1"/>
+          </a:effectRef>
+          <a:fontRef idx="minor">
+            <a:schemeClr val="lt1"/>
+          </a:fontRef>
+        </p:style>
+        <p:txBody>
+          <a:bodyPr rtlCol="0" anchor="ctr"/>
+          <a:lstStyle/>
+          <a:p>
+            <a:pPr algn="ctr"/>
+            <a:endParaRPr sz="2400"/>
+          </a:p>
+        </p:txBody>
+      </p:sp>
+      <p:sp>
+        <p:nvSpPr>
+          <p:cNvPr id="17" name="TextBox 16"/>
+          <p:cNvSpPr txBox="1"/>
+          <p:nvPr/>
+        </p:nvSpPr>
+        <p:spPr>
+          <a:xfrm>
+            <a:off x="8174736" y="3046476"/>
+            <a:ext cx="3127248" cy="198837"/>
+          </a:xfrm>
+          <a:prstGeom prst="rect">
+            <a:avLst/>
+          </a:prstGeom>
+          <a:noFill/>
+        </p:spPr>
+        <p:txBody>
+          <a:bodyPr wrap="square" lIns="0" tIns="0" rIns="0" bIns="0" anchor="t">
+            <a:spAutoFit/>
+          </a:bodyPr>
+          <a:lstStyle/>
+          <a:p>
+            <a:pPr algn="l">
+              <a:lnSpc>
+                <a:spcPct val="115000"/>
+              </a:lnSpc>
+              <a:spcAft>
+                <a:spcPts val="0"/>
+              </a:spcAft>
+            </a:pPr>
+            <a:r>
+              <a:rPr lang="fr-FR" sz="1200" b="1" i="0" spc="80" dirty="0">
+                <a:solidFill>
+                  <a:srgbClr val="0E6B66"/>
+                </a:solidFill>
+                <a:latin typeface="Consolas"/>
+              </a:rPr>
+              <a:t>GUIDER</a:t>
+            </a:r>
+            <a:endParaRPr sz="1200" b="1" i="0" spc="80" dirty="0">
+              <a:solidFill>
+                <a:srgbClr val="0E6B66"/>
+              </a:solidFill>
+              <a:latin typeface="Consolas"/>
+            </a:endParaRPr>
+          </a:p>
+        </p:txBody>
+      </p:sp>
+      <p:sp>
+        <p:nvSpPr>
+          <p:cNvPr id="18" name="TextBox 17"/>
+          <p:cNvSpPr txBox="1"/>
+          <p:nvPr/>
+        </p:nvSpPr>
+        <p:spPr>
+          <a:xfrm>
+            <a:off x="8174736" y="3357372"/>
+            <a:ext cx="3127248" cy="291426"/>
+          </a:xfrm>
+          <a:prstGeom prst="rect">
+            <a:avLst/>
+          </a:prstGeom>
+          <a:noFill/>
+        </p:spPr>
+        <p:txBody>
+          <a:bodyPr wrap="square" lIns="0" tIns="0" rIns="0" bIns="0" anchor="t">
+            <a:spAutoFit/>
+          </a:bodyPr>
+          <a:lstStyle/>
+          <a:p>
+            <a:pPr algn="l">
+              <a:lnSpc>
+                <a:spcPct val="115000"/>
+              </a:lnSpc>
+              <a:spcAft>
+                <a:spcPts val="0"/>
+              </a:spcAft>
+            </a:pPr>
+            <a:r>
+              <a:rPr b="1" i="0">
+                <a:solidFill>
+                  <a:srgbClr val="1B2429"/>
+                </a:solidFill>
+                <a:latin typeface="Cambria"/>
+              </a:rPr>
+              <a:t>Guide du curateur</a:t>
+            </a:r>
+          </a:p>
+        </p:txBody>
+      </p:sp>
+      <p:sp>
+        <p:nvSpPr>
+          <p:cNvPr id="19" name="TextBox 18"/>
+          <p:cNvSpPr txBox="1"/>
+          <p:nvPr/>
+        </p:nvSpPr>
+        <p:spPr>
+          <a:xfrm>
+            <a:off x="8174736" y="3723132"/>
+            <a:ext cx="3127248" cy="499817"/>
+          </a:xfrm>
+          <a:prstGeom prst="rect">
+            <a:avLst/>
+          </a:prstGeom>
+          <a:noFill/>
+        </p:spPr>
+        <p:txBody>
+          <a:bodyPr wrap="square" lIns="0" tIns="0" rIns="0" bIns="0" anchor="t">
+            <a:spAutoFit/>
+          </a:bodyPr>
+          <a:lstStyle/>
+          <a:p>
+            <a:pPr algn="l">
+              <a:lnSpc>
+                <a:spcPct val="120000"/>
+              </a:lnSpc>
+              <a:spcAft>
+                <a:spcPts val="0"/>
+              </a:spcAft>
+            </a:pPr>
+            <a:r>
+              <a:rPr sz="1400" b="0" i="0" dirty="0">
+                <a:solidFill>
+                  <a:srgbClr val="52605F"/>
+                </a:solidFill>
+                <a:latin typeface="Calibri"/>
+              </a:rPr>
+              <a:t>Déjà </a:t>
+            </a:r>
+            <a:r>
+              <a:rPr sz="1400" b="0" i="0" dirty="0" err="1">
+                <a:solidFill>
+                  <a:srgbClr val="52605F"/>
+                </a:solidFill>
+                <a:latin typeface="Calibri"/>
+              </a:rPr>
+              <a:t>rédigé</a:t>
+            </a:r>
+            <a:r>
+              <a:rPr sz="1400" b="0" i="0" dirty="0">
+                <a:solidFill>
+                  <a:srgbClr val="52605F"/>
+                </a:solidFill>
+                <a:latin typeface="Calibri"/>
+              </a:rPr>
+              <a:t> — prêt à </a:t>
+            </a:r>
+            <a:r>
+              <a:rPr sz="1400" b="0" i="0" dirty="0" err="1">
+                <a:solidFill>
+                  <a:srgbClr val="52605F"/>
+                </a:solidFill>
+                <a:latin typeface="Calibri"/>
+              </a:rPr>
+              <a:t>l'usage</a:t>
+            </a:r>
+            <a:r>
+              <a:rPr sz="1400" b="0" i="0" dirty="0">
+                <a:solidFill>
+                  <a:srgbClr val="52605F"/>
+                </a:solidFill>
+                <a:latin typeface="Calibri"/>
+              </a:rPr>
+              <a:t> </a:t>
+            </a:r>
+            <a:r>
+              <a:rPr sz="1400" b="0" i="0" dirty="0" err="1">
+                <a:solidFill>
+                  <a:srgbClr val="52605F"/>
+                </a:solidFill>
+                <a:latin typeface="Calibri"/>
+              </a:rPr>
+              <a:t>dès</a:t>
+            </a:r>
+            <a:r>
+              <a:rPr sz="1400" b="0" i="0" dirty="0">
+                <a:solidFill>
+                  <a:srgbClr val="52605F"/>
+                </a:solidFill>
+                <a:latin typeface="Calibri"/>
+              </a:rPr>
+              <a:t> </a:t>
+            </a:r>
+            <a:r>
+              <a:rPr sz="1400" b="0" i="0" dirty="0" err="1">
+                <a:solidFill>
+                  <a:srgbClr val="52605F"/>
+                </a:solidFill>
+                <a:latin typeface="Calibri"/>
+              </a:rPr>
+              <a:t>aujourd'hui</a:t>
+            </a:r>
+            <a:r>
+              <a:rPr sz="1400" b="0" i="0" dirty="0">
+                <a:solidFill>
+                  <a:srgbClr val="52605F"/>
+                </a:solidFill>
+                <a:latin typeface="Calibri"/>
+              </a:rPr>
+              <a:t>.</a:t>
+            </a:r>
+          </a:p>
+        </p:txBody>
+      </p:sp>
+      <p:sp>
+        <p:nvSpPr>
+          <p:cNvPr id="21" name="TextBox 20"/>
+          <p:cNvSpPr txBox="1"/>
+          <p:nvPr/>
+        </p:nvSpPr>
+        <p:spPr>
+          <a:xfrm>
+            <a:off x="11002975" y="6355080"/>
+            <a:ext cx="914400" cy="320040"/>
+          </a:xfrm>
+          <a:prstGeom prst="rect">
+            <a:avLst/>
+          </a:prstGeom>
+          <a:noFill/>
+        </p:spPr>
+        <p:txBody>
+          <a:bodyPr wrap="square" lIns="0" tIns="0" rIns="0" bIns="0" anchor="t">
+            <a:spAutoFit/>
+          </a:bodyPr>
+          <a:lstStyle/>
+          <a:p>
+            <a:pPr algn="r">
+              <a:lnSpc>
+                <a:spcPct val="115000"/>
+              </a:lnSpc>
+              <a:spcAft>
+                <a:spcPts val="0"/>
+              </a:spcAft>
+            </a:pPr>
+            <a:r>
+              <a:rPr sz="1050" b="0" i="0">
+                <a:solidFill>
+                  <a:srgbClr val="7C8886"/>
+                </a:solidFill>
+                <a:latin typeface="Consolas"/>
+              </a:rPr>
+              <a:t>12 / 12</a:t>
+            </a:r>
+          </a:p>
+        </p:txBody>
+      </p:sp>
+    </p:spTree>
+  </p:cSld>
+  <p:clrMapOvr>
+    <a:masterClrMapping/>
+  </p:clrMapOvr>
+</p:sld>
+</file>
+
 <file path=ppt/slides/slide2.xml><?xml version="1.0" encoding="utf-8"?>
 <p:sld xmlns:a="http://schemas.openxmlformats.org/drawingml/2006/main" xmlns:r="http://schemas.openxmlformats.org/officeDocument/2006/relationships" xmlns:p="http://schemas.openxmlformats.org/presentationml/2006/main">
   <p:cSld>
@@ -12448,7 +13700,7 @@
         </p:nvSpPr>
         <p:spPr>
           <a:xfrm>
-            <a:off x="457200" y="149665"/>
+            <a:off x="452510" y="175260"/>
             <a:ext cx="5486400" cy="320040"/>
           </a:xfrm>
           <a:prstGeom prst="rect">
@@ -12477,7 +13729,7 @@
                 </a:solidFill>
                 <a:latin typeface="Consolas"/>
               </a:rPr>
-              <a:t>EXEMPLE RÉEL</a:t>
+              <a:t>RÉSULTATS MESURÉS</a:t>
             </a:r>
           </a:p>
         </p:txBody>
@@ -12491,7 +13743,7 @@
         <p:spPr>
           <a:xfrm>
             <a:off x="640080" y="777240"/>
-            <a:ext cx="8686800" cy="1005840"/>
+            <a:ext cx="8686800" cy="492443"/>
           </a:xfrm>
           <a:prstGeom prst="rect">
             <a:avLst/>
@@ -12513,13 +13765,40 @@
               </a:spcAft>
             </a:pPr>
             <a:r>
-              <a:rPr sz="3200" b="1" i="0">
+              <a:rPr sz="3200" b="1" i="0" dirty="0" err="1">
                 <a:solidFill>
                   <a:srgbClr val="1B2429"/>
                 </a:solidFill>
                 <a:latin typeface="Cambria"/>
               </a:rPr>
-              <a:t>Passage à l'échelle : RevueESR</a:t>
+              <a:t>Testé</a:t>
+            </a:r>
+            <a:r>
+              <a:rPr sz="3200" b="1" i="0" dirty="0">
+                <a:solidFill>
+                  <a:srgbClr val="1B2429"/>
+                </a:solidFill>
+                <a:latin typeface="Cambria"/>
+              </a:rPr>
+              <a:t> </a:t>
+            </a:r>
+            <a:r>
+              <a:rPr sz="3200" b="1" i="0" dirty="0" err="1">
+                <a:solidFill>
+                  <a:srgbClr val="1B2429"/>
+                </a:solidFill>
+                <a:latin typeface="Cambria"/>
+              </a:rPr>
+              <a:t>contre</a:t>
+            </a:r>
+            <a:r>
+              <a:rPr sz="3200" b="1" i="0" dirty="0">
+                <a:solidFill>
+                  <a:srgbClr val="1B2429"/>
+                </a:solidFill>
+                <a:latin typeface="Cambria"/>
+              </a:rPr>
+              <a:t> un gold standard</a:t>
             </a:r>
           </a:p>
         </p:txBody>
@@ -12533,7 +13812,7 @@
         <p:spPr>
           <a:xfrm>
             <a:off x="640080" y="1600200"/>
-            <a:ext cx="8961120" cy="822960"/>
+            <a:ext cx="8961120" cy="592726"/>
           </a:xfrm>
           <a:prstGeom prst="rect">
             <a:avLst/>
@@ -12555,344 +13834,222 @@
               </a:spcAft>
             </a:pPr>
             <a:r>
-              <a:rPr sz="1500" b="0" i="0">
-                <a:solidFill>
-                  <a:srgbClr val="52605F"/>
-                </a:solidFill>
-                <a:latin typeface="Calibri"/>
-              </a:rPr>
-              <a:t>1 539 documents, 5 954 459 tokens, vocabulaire SEN (santé environnementale). Run complet en 28 min 39, sans incident.</a:t>
-            </a:r>
-          </a:p>
-        </p:txBody>
-      </p:sp>
-      <p:sp>
-        <p:nvSpPr>
-          <p:cNvPr id="6" name="TextBox 5"/>
-          <p:cNvSpPr txBox="1"/>
-          <p:nvPr/>
-        </p:nvSpPr>
-        <p:spPr>
-          <a:xfrm>
-            <a:off x="640080" y="2331720"/>
-            <a:ext cx="2377440" cy="381130"/>
-          </a:xfrm>
-          <a:prstGeom prst="rect">
-            <a:avLst/>
-          </a:prstGeom>
-          <a:noFill/>
-        </p:spPr>
-        <p:txBody>
-          <a:bodyPr wrap="square" lIns="0" tIns="0" rIns="0" bIns="0" anchor="t">
-            <a:spAutoFit/>
-          </a:bodyPr>
-          <a:lstStyle/>
-          <a:p>
-            <a:pPr algn="l">
-              <a:lnSpc>
-                <a:spcPct val="115000"/>
-              </a:lnSpc>
-              <a:spcAft>
-                <a:spcPts val="0"/>
-              </a:spcAft>
-            </a:pPr>
-            <a:r>
-              <a:rPr sz="2300" b="1" i="0" dirty="0">
-                <a:solidFill>
-                  <a:srgbClr val="1B2429"/>
-                </a:solidFill>
-                <a:latin typeface="Consolas"/>
-              </a:rPr>
-              <a:t>3</a:t>
-            </a:r>
-            <a:r>
-              <a:rPr lang="fr-FR" sz="2300" b="1" i="0" dirty="0">
-                <a:solidFill>
-                  <a:srgbClr val="1B2429"/>
-                </a:solidFill>
-                <a:latin typeface="Consolas"/>
-              </a:rPr>
-              <a:t>6 546</a:t>
-            </a:r>
-            <a:endParaRPr sz="2300" b="1" i="0" dirty="0">
-              <a:solidFill>
-                <a:srgbClr val="1B2429"/>
-              </a:solidFill>
-              <a:latin typeface="Consolas"/>
-            </a:endParaRPr>
-          </a:p>
-        </p:txBody>
-      </p:sp>
-      <p:sp>
-        <p:nvSpPr>
-          <p:cNvPr id="7" name="TextBox 6"/>
-          <p:cNvSpPr txBox="1"/>
-          <p:nvPr/>
-        </p:nvSpPr>
-        <p:spPr>
-          <a:xfrm>
-            <a:off x="640080" y="2743200"/>
-            <a:ext cx="2377440" cy="274320"/>
-          </a:xfrm>
-          <a:prstGeom prst="rect">
-            <a:avLst/>
-          </a:prstGeom>
-          <a:noFill/>
-        </p:spPr>
-        <p:txBody>
-          <a:bodyPr wrap="square" lIns="0" tIns="0" rIns="0" bIns="0" anchor="t">
-            <a:spAutoFit/>
-          </a:bodyPr>
-          <a:lstStyle/>
-          <a:p>
-            <a:pPr algn="l">
-              <a:lnSpc>
-                <a:spcPct val="115000"/>
-              </a:lnSpc>
-              <a:spcAft>
-                <a:spcPts val="0"/>
-              </a:spcAft>
-            </a:pPr>
-            <a:r>
-              <a:rPr sz="1150" b="0" i="0">
-                <a:solidFill>
-                  <a:srgbClr val="52605F"/>
-                </a:solidFill>
-                <a:latin typeface="Calibri"/>
-              </a:rPr>
-              <a:t>candidats extraits</a:t>
-            </a:r>
-          </a:p>
-        </p:txBody>
-      </p:sp>
-      <p:sp>
-        <p:nvSpPr>
-          <p:cNvPr id="8" name="TextBox 7"/>
-          <p:cNvSpPr txBox="1"/>
-          <p:nvPr/>
-        </p:nvSpPr>
-        <p:spPr>
-          <a:xfrm>
-            <a:off x="3291840" y="2331720"/>
-            <a:ext cx="2377440" cy="381130"/>
-          </a:xfrm>
-          <a:prstGeom prst="rect">
-            <a:avLst/>
-          </a:prstGeom>
-          <a:noFill/>
-        </p:spPr>
-        <p:txBody>
-          <a:bodyPr wrap="square" lIns="0" tIns="0" rIns="0" bIns="0" anchor="t">
-            <a:spAutoFit/>
-          </a:bodyPr>
-          <a:lstStyle/>
-          <a:p>
-            <a:pPr algn="l">
-              <a:lnSpc>
-                <a:spcPct val="115000"/>
-              </a:lnSpc>
-              <a:spcAft>
-                <a:spcPts val="0"/>
-              </a:spcAft>
-            </a:pPr>
-            <a:r>
-              <a:rPr sz="2300" b="1" i="0" dirty="0">
-                <a:solidFill>
-                  <a:srgbClr val="1B2429"/>
-                </a:solidFill>
-                <a:latin typeface="Consolas"/>
-              </a:rPr>
-              <a:t>2</a:t>
-            </a:r>
-            <a:r>
-              <a:rPr lang="fr-FR" sz="2300" b="1" i="0" dirty="0">
-                <a:solidFill>
-                  <a:srgbClr val="1B2429"/>
-                </a:solidFill>
-                <a:latin typeface="Consolas"/>
-              </a:rPr>
-              <a:t>3</a:t>
-            </a:r>
-            <a:r>
-              <a:rPr sz="2300" b="1" i="0" dirty="0">
-                <a:solidFill>
-                  <a:srgbClr val="1B2429"/>
-                </a:solidFill>
-                <a:latin typeface="Consolas"/>
-              </a:rPr>
-              <a:t>2</a:t>
-            </a:r>
-          </a:p>
-        </p:txBody>
-      </p:sp>
-      <p:sp>
-        <p:nvSpPr>
-          <p:cNvPr id="9" name="TextBox 8"/>
-          <p:cNvSpPr txBox="1"/>
-          <p:nvPr/>
-        </p:nvSpPr>
-        <p:spPr>
-          <a:xfrm>
-            <a:off x="3291840" y="2743200"/>
-            <a:ext cx="2377440" cy="274320"/>
-          </a:xfrm>
-          <a:prstGeom prst="rect">
-            <a:avLst/>
-          </a:prstGeom>
-          <a:noFill/>
-        </p:spPr>
-        <p:txBody>
-          <a:bodyPr wrap="square" lIns="0" tIns="0" rIns="0" bIns="0" anchor="t">
-            <a:spAutoFit/>
-          </a:bodyPr>
-          <a:lstStyle/>
-          <a:p>
-            <a:pPr algn="l">
-              <a:lnSpc>
-                <a:spcPct val="115000"/>
-              </a:lnSpc>
-              <a:spcAft>
-                <a:spcPts val="0"/>
-              </a:spcAft>
-            </a:pPr>
-            <a:r>
-              <a:rPr sz="1150" b="0" i="0">
-                <a:solidFill>
-                  <a:srgbClr val="52605F"/>
-                </a:solidFill>
-                <a:latin typeface="Calibri"/>
-              </a:rPr>
-              <a:t>déjà dans le vocabulaire</a:t>
-            </a:r>
-          </a:p>
-        </p:txBody>
-      </p:sp>
-      <p:sp>
-        <p:nvSpPr>
-          <p:cNvPr id="10" name="TextBox 9"/>
-          <p:cNvSpPr txBox="1"/>
-          <p:nvPr/>
-        </p:nvSpPr>
-        <p:spPr>
-          <a:xfrm>
-            <a:off x="5943600" y="2331720"/>
-            <a:ext cx="2377440" cy="381130"/>
-          </a:xfrm>
-          <a:prstGeom prst="rect">
-            <a:avLst/>
-          </a:prstGeom>
-          <a:noFill/>
-        </p:spPr>
-        <p:txBody>
-          <a:bodyPr wrap="square" lIns="0" tIns="0" rIns="0" bIns="0" anchor="t">
-            <a:spAutoFit/>
-          </a:bodyPr>
-          <a:lstStyle/>
-          <a:p>
-            <a:pPr algn="l">
-              <a:lnSpc>
-                <a:spcPct val="115000"/>
-              </a:lnSpc>
-              <a:spcAft>
-                <a:spcPts val="0"/>
-              </a:spcAft>
-            </a:pPr>
-            <a:r>
-              <a:rPr sz="2300" b="1" i="0" dirty="0">
-                <a:solidFill>
-                  <a:srgbClr val="1B2429"/>
-                </a:solidFill>
-                <a:latin typeface="Consolas"/>
-              </a:rPr>
-              <a:t>3</a:t>
-            </a:r>
-            <a:r>
-              <a:rPr lang="fr-FR" sz="2300" b="1" dirty="0">
-                <a:solidFill>
-                  <a:srgbClr val="1B2429"/>
-                </a:solidFill>
-                <a:latin typeface="Consolas"/>
-              </a:rPr>
-              <a:t>6</a:t>
-            </a:r>
-            <a:r>
-              <a:rPr sz="2300" b="1" i="0" dirty="0">
-                <a:solidFill>
-                  <a:srgbClr val="1B2429"/>
-                </a:solidFill>
-                <a:latin typeface="Consolas"/>
+              <a:rPr sz="1500" b="0" i="0" dirty="0">
+                <a:solidFill>
+                  <a:srgbClr val="52605F"/>
+                </a:solidFill>
+                <a:latin typeface="Calibri"/>
+              </a:rPr>
+              <a:t>Corpus ACTER — 18 900 </a:t>
+            </a:r>
+            <a:r>
+              <a:rPr sz="1500" b="0" i="0" dirty="0" err="1">
+                <a:solidFill>
+                  <a:srgbClr val="52605F"/>
+                </a:solidFill>
+                <a:latin typeface="Calibri"/>
+              </a:rPr>
+              <a:t>termes</a:t>
+            </a:r>
+            <a:r>
+              <a:rPr sz="1500" b="0" i="0" dirty="0">
+                <a:solidFill>
+                  <a:srgbClr val="52605F"/>
+                </a:solidFill>
+                <a:latin typeface="Calibri"/>
               </a:rPr>
               <a:t> </a:t>
             </a:r>
             <a:r>
-              <a:rPr lang="fr-FR" sz="2300" b="1" dirty="0">
-                <a:solidFill>
-                  <a:srgbClr val="1B2429"/>
-                </a:solidFill>
-                <a:latin typeface="Consolas"/>
-              </a:rPr>
-              <a:t>314</a:t>
-            </a:r>
-            <a:endParaRPr sz="2300" b="1" i="0" dirty="0">
-              <a:solidFill>
-                <a:srgbClr val="1B2429"/>
-              </a:solidFill>
-              <a:latin typeface="Consolas"/>
-            </a:endParaRPr>
-          </a:p>
-        </p:txBody>
-      </p:sp>
-      <p:sp>
-        <p:nvSpPr>
-          <p:cNvPr id="11" name="TextBox 10"/>
-          <p:cNvSpPr txBox="1"/>
-          <p:nvPr/>
-        </p:nvSpPr>
-        <p:spPr>
-          <a:xfrm>
-            <a:off x="5943600" y="2743200"/>
-            <a:ext cx="2377440" cy="274320"/>
-          </a:xfrm>
-          <a:prstGeom prst="rect">
-            <a:avLst/>
-          </a:prstGeom>
-          <a:noFill/>
-        </p:spPr>
-        <p:txBody>
-          <a:bodyPr wrap="square" lIns="0" tIns="0" rIns="0" bIns="0" anchor="t">
-            <a:spAutoFit/>
-          </a:bodyPr>
-          <a:lstStyle/>
-          <a:p>
-            <a:pPr algn="l">
-              <a:lnSpc>
-                <a:spcPct val="115000"/>
-              </a:lnSpc>
-              <a:spcAft>
-                <a:spcPts val="0"/>
-              </a:spcAft>
-            </a:pPr>
-            <a:r>
-              <a:rPr sz="1150" b="0" i="0">
-                <a:solidFill>
-                  <a:srgbClr val="52605F"/>
-                </a:solidFill>
-                <a:latin typeface="Calibri"/>
-              </a:rPr>
-              <a:t>nouveaux à trier</a:t>
-            </a:r>
-          </a:p>
-        </p:txBody>
-      </p:sp>
-      <p:sp>
-        <p:nvSpPr>
-          <p:cNvPr id="12" name="Rectangle 11"/>
+              <a:rPr sz="1500" b="0" i="0" dirty="0" err="1">
+                <a:solidFill>
+                  <a:srgbClr val="52605F"/>
+                </a:solidFill>
+                <a:latin typeface="Calibri"/>
+              </a:rPr>
+              <a:t>annotés</a:t>
+            </a:r>
+            <a:r>
+              <a:rPr sz="1500" b="0" i="0" dirty="0">
+                <a:solidFill>
+                  <a:srgbClr val="52605F"/>
+                </a:solidFill>
+                <a:latin typeface="Calibri"/>
+              </a:rPr>
+              <a:t> à la main, FR + EN, 4 </a:t>
+            </a:r>
+            <a:r>
+              <a:rPr sz="1500" b="0" i="0" dirty="0" err="1">
+                <a:solidFill>
+                  <a:srgbClr val="52605F"/>
+                </a:solidFill>
+                <a:latin typeface="Calibri"/>
+              </a:rPr>
+              <a:t>domaines</a:t>
+            </a:r>
+            <a:r>
+              <a:rPr lang="fr-FR" sz="1500" b="0" i="0" dirty="0">
+                <a:solidFill>
+                  <a:srgbClr val="52605F"/>
+                </a:solidFill>
+                <a:latin typeface="Calibri"/>
+              </a:rPr>
+              <a:t> </a:t>
+            </a:r>
+            <a:r>
+              <a:rPr lang="fr-FR" sz="1500" b="0" i="0" dirty="0">
+                <a:solidFill>
+                  <a:schemeClr val="tx2">
+                    <a:lumMod val="60000"/>
+                    <a:lumOff val="40000"/>
+                  </a:schemeClr>
+                </a:solidFill>
+                <a:latin typeface="Calibri"/>
+              </a:rPr>
+              <a:t>(</a:t>
+            </a:r>
+            <a:r>
+              <a:rPr lang="fr-FR" sz="1600" b="0" i="0" dirty="0">
+                <a:solidFill>
+                  <a:schemeClr val="tx2">
+                    <a:lumMod val="60000"/>
+                    <a:lumOff val="40000"/>
+                  </a:schemeClr>
+                </a:solidFill>
+                <a:effectLst/>
+                <a:latin typeface="-apple-system"/>
+              </a:rPr>
+              <a:t>corruption, équitation, insuffisance cardiaque, énergie éolienne)</a:t>
+            </a:r>
+            <a:r>
+              <a:rPr sz="1500" b="0" i="0" dirty="0">
+                <a:solidFill>
+                  <a:srgbClr val="52605F"/>
+                </a:solidFill>
+                <a:latin typeface="Calibri"/>
+              </a:rPr>
+              <a:t>. Trois </a:t>
+            </a:r>
+            <a:r>
+              <a:rPr sz="1500" b="0" i="0" dirty="0" err="1">
+                <a:solidFill>
+                  <a:srgbClr val="52605F"/>
+                </a:solidFill>
+                <a:latin typeface="Calibri"/>
+              </a:rPr>
+              <a:t>indicateurs</a:t>
+            </a:r>
+            <a:r>
+              <a:rPr sz="1500" b="0" i="0" dirty="0">
+                <a:solidFill>
+                  <a:srgbClr val="52605F"/>
+                </a:solidFill>
+                <a:latin typeface="Calibri"/>
+              </a:rPr>
+              <a:t> </a:t>
+            </a:r>
+            <a:r>
+              <a:rPr sz="1500" b="0" i="0" dirty="0" err="1">
+                <a:solidFill>
+                  <a:srgbClr val="52605F"/>
+                </a:solidFill>
+                <a:latin typeface="Calibri"/>
+              </a:rPr>
+              <a:t>complémentaires</a:t>
+            </a:r>
+            <a:r>
+              <a:rPr sz="1500" b="0" i="0" dirty="0">
+                <a:solidFill>
+                  <a:srgbClr val="52605F"/>
+                </a:solidFill>
+                <a:latin typeface="Calibri"/>
+              </a:rPr>
+              <a:t>, </a:t>
+            </a:r>
+            <a:r>
+              <a:rPr sz="1500" b="0" i="0" dirty="0" err="1">
+                <a:solidFill>
+                  <a:srgbClr val="52605F"/>
+                </a:solidFill>
+                <a:latin typeface="Calibri"/>
+              </a:rPr>
+              <a:t>mesurés</a:t>
+            </a:r>
+            <a:r>
+              <a:rPr sz="1500" b="0" i="0" dirty="0">
+                <a:solidFill>
+                  <a:srgbClr val="52605F"/>
+                </a:solidFill>
+                <a:latin typeface="Calibri"/>
+              </a:rPr>
+              <a:t> à </a:t>
+            </a:r>
+            <a:r>
+              <a:rPr sz="1500" b="0" i="0" dirty="0" err="1">
+                <a:solidFill>
+                  <a:srgbClr val="52605F"/>
+                </a:solidFill>
+                <a:latin typeface="Calibri"/>
+              </a:rPr>
+              <a:t>froid</a:t>
+            </a:r>
+            <a:r>
+              <a:rPr sz="1500" b="0" i="0" dirty="0">
+                <a:solidFill>
+                  <a:srgbClr val="52605F"/>
+                </a:solidFill>
+                <a:latin typeface="Calibri"/>
+              </a:rPr>
+              <a:t> (sans </a:t>
+            </a:r>
+            <a:r>
+              <a:rPr sz="1500" b="0" i="0" dirty="0" err="1">
+                <a:solidFill>
+                  <a:srgbClr val="52605F"/>
+                </a:solidFill>
+                <a:latin typeface="Calibri"/>
+              </a:rPr>
+              <a:t>vocabulaire</a:t>
+            </a:r>
+            <a:r>
+              <a:rPr sz="1500" b="0" i="0" dirty="0">
+                <a:solidFill>
+                  <a:srgbClr val="52605F"/>
+                </a:solidFill>
+                <a:latin typeface="Calibri"/>
+              </a:rPr>
+              <a:t> </a:t>
+            </a:r>
+            <a:r>
+              <a:rPr sz="1500" b="0" i="0" dirty="0" err="1">
+                <a:solidFill>
+                  <a:srgbClr val="52605F"/>
+                </a:solidFill>
+                <a:latin typeface="Calibri"/>
+              </a:rPr>
+              <a:t>cible</a:t>
+            </a:r>
+            <a:r>
+              <a:rPr sz="1500" b="0" i="0" dirty="0">
+                <a:solidFill>
+                  <a:srgbClr val="52605F"/>
+                </a:solidFill>
+                <a:latin typeface="Calibri"/>
+              </a:rPr>
+              <a:t>).</a:t>
+            </a:r>
+          </a:p>
+        </p:txBody>
+      </p:sp>
+      <p:sp>
+        <p:nvSpPr>
+          <p:cNvPr id="6" name="Rectangle 5"/>
           <p:cNvSpPr/>
           <p:nvPr/>
         </p:nvSpPr>
         <p:spPr>
           <a:xfrm>
-            <a:off x="640080" y="3246120"/>
+            <a:off x="640080" y="2468880"/>
             <a:ext cx="3456432" cy="38100"/>
           </a:xfrm>
           <a:prstGeom prst="rect">
@@ -12931,14 +14088,14 @@
       </p:sp>
       <p:sp>
         <p:nvSpPr>
-          <p:cNvPr id="13" name="Rectangle 12"/>
+          <p:cNvPr id="7" name="Rectangle 6"/>
           <p:cNvSpPr/>
           <p:nvPr/>
         </p:nvSpPr>
         <p:spPr>
           <a:xfrm>
-            <a:off x="640080" y="3284220"/>
-            <a:ext cx="3456432" cy="1562100"/>
+            <a:off x="640080" y="2506980"/>
+            <a:ext cx="3456432" cy="1516380"/>
           </a:xfrm>
           <a:prstGeom prst="rect">
             <a:avLst/>
@@ -12978,13 +14135,13 @@
       </p:sp>
       <p:sp>
         <p:nvSpPr>
-          <p:cNvPr id="14" name="TextBox 13"/>
+          <p:cNvPr id="8" name="TextBox 7"/>
           <p:cNvSpPr txBox="1"/>
           <p:nvPr/>
         </p:nvSpPr>
         <p:spPr>
           <a:xfrm>
-            <a:off x="804672" y="3412236"/>
+            <a:off x="804672" y="2634996"/>
             <a:ext cx="3127248" cy="274320"/>
           </a:xfrm>
           <a:prstGeom prst="rect">
@@ -13013,21 +14170,21 @@
                 </a:solidFill>
                 <a:latin typeface="Consolas"/>
               </a:rPr>
-              <a:t>NIVEAU 1 · SÉMANTIQUE</a:t>
-            </a:r>
-          </a:p>
-        </p:txBody>
-      </p:sp>
-      <p:sp>
-        <p:nvSpPr>
-          <p:cNvPr id="15" name="TextBox 14"/>
+              <a:t>PRÉCISION</a:t>
+            </a:r>
+          </a:p>
+        </p:txBody>
+      </p:sp>
+      <p:sp>
+        <p:nvSpPr>
+          <p:cNvPr id="9" name="TextBox 8"/>
           <p:cNvSpPr txBox="1"/>
           <p:nvPr/>
         </p:nvSpPr>
         <p:spPr>
           <a:xfrm>
-            <a:off x="804672" y="3723132"/>
-            <a:ext cx="3127248" cy="463973"/>
+            <a:off x="804672" y="2945892"/>
+            <a:ext cx="3127248" cy="457200"/>
           </a:xfrm>
           <a:prstGeom prst="rect">
             <a:avLst/>
@@ -13049,132 +14206,27 @@
               </a:spcAft>
             </a:pPr>
             <a:r>
-              <a:rPr sz="2800" b="1" i="0" dirty="0">
+              <a:rPr sz="2800" b="1" i="0">
                 <a:solidFill>
                   <a:srgbClr val="0E6B66"/>
                 </a:solidFill>
                 <a:latin typeface="Consolas"/>
               </a:rPr>
-              <a:t>1</a:t>
-            </a:r>
-            <a:r>
-              <a:rPr lang="fr-FR" sz="2800" b="1" i="0" dirty="0">
-                <a:solidFill>
-                  <a:srgbClr val="0E6B66"/>
-                </a:solidFill>
-                <a:latin typeface="Consolas"/>
-              </a:rPr>
-              <a:t>83</a:t>
-            </a:r>
-            <a:endParaRPr sz="2800" b="1" i="0" dirty="0">
-              <a:solidFill>
-                <a:srgbClr val="0E6B66"/>
-              </a:solidFill>
-              <a:latin typeface="Consolas"/>
-            </a:endParaRPr>
-          </a:p>
-        </p:txBody>
-      </p:sp>
-      <p:sp>
-        <p:nvSpPr>
-          <p:cNvPr id="16" name="Rectangle 15"/>
-          <p:cNvSpPr/>
-          <p:nvPr/>
-        </p:nvSpPr>
-        <p:spPr>
-          <a:xfrm>
-            <a:off x="804672" y="4180332"/>
-            <a:ext cx="3127248" cy="63500"/>
-          </a:xfrm>
-          <a:prstGeom prst="rect">
-            <a:avLst/>
-          </a:prstGeom>
-          <a:solidFill>
-            <a:srgbClr val="D9DDD4"/>
-          </a:solidFill>
-          <a:ln>
-            <a:noFill/>
-          </a:ln>
-          <a:effectLst/>
-        </p:spPr>
-        <p:style>
-          <a:lnRef idx="1">
-            <a:schemeClr val="accent1"/>
-          </a:lnRef>
-          <a:fillRef idx="3">
-            <a:schemeClr val="accent1"/>
-          </a:fillRef>
-          <a:effectRef idx="2">
-            <a:schemeClr val="accent1"/>
-          </a:effectRef>
-          <a:fontRef idx="minor">
-            <a:schemeClr val="lt1"/>
-          </a:fontRef>
-        </p:style>
-        <p:txBody>
-          <a:bodyPr rtlCol="0" anchor="ctr"/>
-          <a:lstStyle/>
-          <a:p>
-            <a:pPr algn="ctr"/>
-            <a:endParaRPr/>
-          </a:p>
-        </p:txBody>
-      </p:sp>
-      <p:sp>
-        <p:nvSpPr>
-          <p:cNvPr id="17" name="Rectangle 16"/>
-          <p:cNvSpPr/>
-          <p:nvPr/>
-        </p:nvSpPr>
-        <p:spPr>
-          <a:xfrm>
-            <a:off x="804672" y="4180332"/>
-            <a:ext cx="150107" cy="63500"/>
-          </a:xfrm>
-          <a:prstGeom prst="rect">
-            <a:avLst/>
-          </a:prstGeom>
-          <a:solidFill>
-            <a:srgbClr val="0E6B66"/>
-          </a:solidFill>
-          <a:ln>
-            <a:noFill/>
-          </a:ln>
-          <a:effectLst/>
-        </p:spPr>
-        <p:style>
-          <a:lnRef idx="1">
-            <a:schemeClr val="accent1"/>
-          </a:lnRef>
-          <a:fillRef idx="3">
-            <a:schemeClr val="accent1"/>
-          </a:fillRef>
-          <a:effectRef idx="2">
-            <a:schemeClr val="accent1"/>
-          </a:effectRef>
-          <a:fontRef idx="minor">
-            <a:schemeClr val="lt1"/>
-          </a:fontRef>
-        </p:style>
-        <p:txBody>
-          <a:bodyPr rtlCol="0" anchor="ctr"/>
-          <a:lstStyle/>
-          <a:p>
-            <a:pPr algn="ctr"/>
-            <a:endParaRPr/>
-          </a:p>
-        </p:txBody>
-      </p:sp>
-      <p:sp>
-        <p:nvSpPr>
-          <p:cNvPr id="18" name="TextBox 17"/>
+              <a:t>0.551</a:t>
+            </a:r>
+          </a:p>
+        </p:txBody>
+      </p:sp>
+      <p:sp>
+        <p:nvSpPr>
+          <p:cNvPr id="10" name="TextBox 9"/>
           <p:cNvSpPr txBox="1"/>
           <p:nvPr/>
         </p:nvSpPr>
         <p:spPr>
           <a:xfrm>
-            <a:off x="804672" y="4363212"/>
-            <a:ext cx="3127248" cy="373380"/>
+            <a:off x="804672" y="3403092"/>
+            <a:ext cx="3127248" cy="510540"/>
           </a:xfrm>
           <a:prstGeom prst="rect">
             <a:avLst/>
@@ -13202,27 +14254,27 @@
                 </a:solidFill>
                 <a:latin typeface="Calibri"/>
               </a:rPr>
-              <a:t>candidats proches d'un terme déjà connu</a:t>
-            </a:r>
-          </a:p>
-        </p:txBody>
-      </p:sp>
-      <p:sp>
-        <p:nvSpPr>
-          <p:cNvPr id="19" name="Rectangle 18"/>
+              <a:t>parmi les candidats retenus, part de vrais termes</a:t>
+            </a:r>
+          </a:p>
+        </p:txBody>
+      </p:sp>
+      <p:sp>
+        <p:nvSpPr>
+          <p:cNvPr id="11" name="Rectangle 10"/>
           <p:cNvSpPr/>
           <p:nvPr/>
         </p:nvSpPr>
         <p:spPr>
           <a:xfrm>
-            <a:off x="4325112" y="3246120"/>
+            <a:off x="4325112" y="2468880"/>
             <a:ext cx="3456432" cy="38100"/>
           </a:xfrm>
           <a:prstGeom prst="rect">
             <a:avLst/>
           </a:prstGeom>
           <a:solidFill>
-            <a:srgbClr val="A8752A"/>
+            <a:srgbClr val="0E6B66"/>
           </a:solidFill>
           <a:ln>
             <a:noFill/>
@@ -13254,14 +14306,14 @@
       </p:sp>
       <p:sp>
         <p:nvSpPr>
-          <p:cNvPr id="20" name="Rectangle 19"/>
+          <p:cNvPr id="12" name="Rectangle 11"/>
           <p:cNvSpPr/>
           <p:nvPr/>
         </p:nvSpPr>
         <p:spPr>
           <a:xfrm>
-            <a:off x="4325112" y="3284220"/>
-            <a:ext cx="3456432" cy="1562100"/>
+            <a:off x="4325112" y="2506980"/>
+            <a:ext cx="3456432" cy="1516380"/>
           </a:xfrm>
           <a:prstGeom prst="rect">
             <a:avLst/>
@@ -13301,13 +14353,13 @@
       </p:sp>
       <p:sp>
         <p:nvSpPr>
-          <p:cNvPr id="21" name="TextBox 20"/>
+          <p:cNvPr id="13" name="TextBox 12"/>
           <p:cNvSpPr txBox="1"/>
           <p:nvPr/>
         </p:nvSpPr>
         <p:spPr>
           <a:xfrm>
-            <a:off x="4489704" y="3412236"/>
+            <a:off x="4489704" y="2634996"/>
             <a:ext cx="3127248" cy="274320"/>
           </a:xfrm>
           <a:prstGeom prst="rect">
@@ -13332,25 +14384,25 @@
             <a:r>
               <a:rPr sz="1050" b="1" i="0" spc="80">
                 <a:solidFill>
-                  <a:srgbClr val="A8752A"/>
+                  <a:srgbClr val="0E6B66"/>
                 </a:solidFill>
                 <a:latin typeface="Consolas"/>
               </a:rPr>
-              <a:t>NIVEAU 2 · STRUCTUREL</a:t>
-            </a:r>
-          </a:p>
-        </p:txBody>
-      </p:sp>
-      <p:sp>
-        <p:nvSpPr>
-          <p:cNvPr id="22" name="TextBox 21"/>
+              <a:t>RAPPEL</a:t>
+            </a:r>
+          </a:p>
+        </p:txBody>
+      </p:sp>
+      <p:sp>
+        <p:nvSpPr>
+          <p:cNvPr id="14" name="TextBox 13"/>
           <p:cNvSpPr txBox="1"/>
           <p:nvPr/>
         </p:nvSpPr>
         <p:spPr>
           <a:xfrm>
-            <a:off x="4489704" y="3723132"/>
-            <a:ext cx="3127248" cy="463973"/>
+            <a:off x="4489704" y="2945892"/>
+            <a:ext cx="3127248" cy="457200"/>
           </a:xfrm>
           <a:prstGeom prst="rect">
             <a:avLst/>
@@ -13372,17 +14424,26 @@
               </a:spcAft>
             </a:pPr>
             <a:r>
-              <a:rPr lang="fr-FR" sz="2800" b="1" dirty="0">
-                <a:solidFill>
-                  <a:srgbClr val="A8752A"/>
+              <a:rPr sz="2800" b="1" i="0" dirty="0">
+                <a:solidFill>
+                  <a:srgbClr val="0E6B66"/>
                 </a:solidFill>
                 <a:latin typeface="Consolas"/>
               </a:rPr>
-              <a:t>654</a:t>
+              <a:t>0.45</a:t>
+            </a:r>
+            <a:r>
+              <a:rPr lang="fr-FR" sz="2800" b="1" i="0" dirty="0">
+                <a:solidFill>
+                  <a:srgbClr val="0E6B66"/>
+                </a:solidFill>
+                <a:latin typeface="Consolas"/>
+              </a:rPr>
+              <a:t>4</a:t>
             </a:r>
             <a:endParaRPr sz="2800" b="1" i="0" dirty="0">
               <a:solidFill>
-                <a:srgbClr val="A8752A"/>
+                <a:srgbClr val="0E6B66"/>
               </a:solidFill>
               <a:latin typeface="Consolas"/>
             </a:endParaRPr>
@@ -13391,104 +14452,14 @@
       </p:sp>
       <p:sp>
         <p:nvSpPr>
-          <p:cNvPr id="23" name="Rectangle 22"/>
-          <p:cNvSpPr/>
-          <p:nvPr/>
-        </p:nvSpPr>
-        <p:spPr>
-          <a:xfrm>
-            <a:off x="4489704" y="4180332"/>
-            <a:ext cx="3127248" cy="63500"/>
-          </a:xfrm>
-          <a:prstGeom prst="rect">
-            <a:avLst/>
-          </a:prstGeom>
-          <a:solidFill>
-            <a:srgbClr val="D9DDD4"/>
-          </a:solidFill>
-          <a:ln>
-            <a:noFill/>
-          </a:ln>
-          <a:effectLst/>
-        </p:spPr>
-        <p:style>
-          <a:lnRef idx="1">
-            <a:schemeClr val="accent1"/>
-          </a:lnRef>
-          <a:fillRef idx="3">
-            <a:schemeClr val="accent1"/>
-          </a:fillRef>
-          <a:effectRef idx="2">
-            <a:schemeClr val="accent1"/>
-          </a:effectRef>
-          <a:fontRef idx="minor">
-            <a:schemeClr val="lt1"/>
-          </a:fontRef>
-        </p:style>
-        <p:txBody>
-          <a:bodyPr rtlCol="0" anchor="ctr"/>
-          <a:lstStyle/>
-          <a:p>
-            <a:pPr algn="ctr"/>
-            <a:endParaRPr/>
-          </a:p>
-        </p:txBody>
-      </p:sp>
-      <p:sp>
-        <p:nvSpPr>
-          <p:cNvPr id="24" name="Rectangle 23"/>
-          <p:cNvSpPr/>
-          <p:nvPr/>
-        </p:nvSpPr>
-        <p:spPr>
-          <a:xfrm>
-            <a:off x="4489704" y="4180332"/>
-            <a:ext cx="597304" cy="63500"/>
-          </a:xfrm>
-          <a:prstGeom prst="rect">
-            <a:avLst/>
-          </a:prstGeom>
-          <a:solidFill>
-            <a:srgbClr val="A8752A"/>
-          </a:solidFill>
-          <a:ln>
-            <a:noFill/>
-          </a:ln>
-          <a:effectLst/>
-        </p:spPr>
-        <p:style>
-          <a:lnRef idx="1">
-            <a:schemeClr val="accent1"/>
-          </a:lnRef>
-          <a:fillRef idx="3">
-            <a:schemeClr val="accent1"/>
-          </a:fillRef>
-          <a:effectRef idx="2">
-            <a:schemeClr val="accent1"/>
-          </a:effectRef>
-          <a:fontRef idx="minor">
-            <a:schemeClr val="lt1"/>
-          </a:fontRef>
-        </p:style>
-        <p:txBody>
-          <a:bodyPr rtlCol="0" anchor="ctr"/>
-          <a:lstStyle/>
-          <a:p>
-            <a:pPr algn="ctr"/>
-            <a:endParaRPr/>
-          </a:p>
-        </p:txBody>
-      </p:sp>
-      <p:sp>
-        <p:nvSpPr>
-          <p:cNvPr id="25" name="TextBox 24"/>
+          <p:cNvPr id="15" name="TextBox 14"/>
           <p:cNvSpPr txBox="1"/>
           <p:nvPr/>
         </p:nvSpPr>
         <p:spPr>
           <a:xfrm>
-            <a:off x="4489704" y="4363212"/>
-            <a:ext cx="3127248" cy="373380"/>
+            <a:off x="4489704" y="3403092"/>
+            <a:ext cx="3127248" cy="510540"/>
           </a:xfrm>
           <a:prstGeom prst="rect">
             <a:avLst/>
@@ -13516,27 +14487,27 @@
                 </a:solidFill>
                 <a:latin typeface="Calibri"/>
               </a:rPr>
-              <a:t>profil de terme important dans le texte</a:t>
-            </a:r>
-          </a:p>
-        </p:txBody>
-      </p:sp>
-      <p:sp>
-        <p:nvSpPr>
-          <p:cNvPr id="26" name="Rectangle 25"/>
+              <a:t>parmi les vrais termes du domaine, part retrouvée</a:t>
+            </a:r>
+          </a:p>
+        </p:txBody>
+      </p:sp>
+      <p:sp>
+        <p:nvSpPr>
+          <p:cNvPr id="16" name="Rectangle 15"/>
           <p:cNvSpPr/>
           <p:nvPr/>
         </p:nvSpPr>
         <p:spPr>
           <a:xfrm>
-            <a:off x="8010144" y="3246120"/>
+            <a:off x="8010144" y="2468880"/>
             <a:ext cx="3456432" cy="38100"/>
           </a:xfrm>
           <a:prstGeom prst="rect">
             <a:avLst/>
           </a:prstGeom>
           <a:solidFill>
-            <a:srgbClr val="6E5A8C"/>
+            <a:srgbClr val="0E6B66"/>
           </a:solidFill>
           <a:ln>
             <a:noFill/>
@@ -13568,14 +14539,14 @@
       </p:sp>
       <p:sp>
         <p:nvSpPr>
-          <p:cNvPr id="27" name="Rectangle 26"/>
+          <p:cNvPr id="17" name="Rectangle 16"/>
           <p:cNvSpPr/>
           <p:nvPr/>
         </p:nvSpPr>
         <p:spPr>
           <a:xfrm>
-            <a:off x="8010144" y="3284220"/>
-            <a:ext cx="3456432" cy="1562100"/>
+            <a:off x="8010144" y="2506980"/>
+            <a:ext cx="3456432" cy="1516380"/>
           </a:xfrm>
           <a:prstGeom prst="rect">
             <a:avLst/>
@@ -13615,13 +14586,13 @@
       </p:sp>
       <p:sp>
         <p:nvSpPr>
-          <p:cNvPr id="28" name="TextBox 27"/>
+          <p:cNvPr id="18" name="TextBox 17"/>
           <p:cNvSpPr txBox="1"/>
           <p:nvPr/>
         </p:nvSpPr>
         <p:spPr>
           <a:xfrm>
-            <a:off x="8174736" y="3412236"/>
+            <a:off x="8174736" y="2634996"/>
             <a:ext cx="3127248" cy="274320"/>
           </a:xfrm>
           <a:prstGeom prst="rect">
@@ -13646,25 +14617,25 @@
             <a:r>
               <a:rPr sz="1050" b="1" i="0" spc="80">
                 <a:solidFill>
-                  <a:srgbClr val="6E5A8C"/>
+                  <a:srgbClr val="0E6B66"/>
                 </a:solidFill>
                 <a:latin typeface="Consolas"/>
               </a:rPr>
-              <a:t>NIVEAU 3 · SPÉCIFICITÉ</a:t>
-            </a:r>
-          </a:p>
-        </p:txBody>
-      </p:sp>
-      <p:sp>
-        <p:nvSpPr>
-          <p:cNvPr id="29" name="TextBox 28"/>
+              <a:t>F1</a:t>
+            </a:r>
+          </a:p>
+        </p:txBody>
+      </p:sp>
+      <p:sp>
+        <p:nvSpPr>
+          <p:cNvPr id="19" name="TextBox 18"/>
           <p:cNvSpPr txBox="1"/>
           <p:nvPr/>
         </p:nvSpPr>
         <p:spPr>
           <a:xfrm>
-            <a:off x="8174736" y="3723132"/>
-            <a:ext cx="3127248" cy="463973"/>
+            <a:off x="8174736" y="2945892"/>
+            <a:ext cx="3127248" cy="457200"/>
           </a:xfrm>
           <a:prstGeom prst="rect">
             <a:avLst/>
@@ -13688,24 +14659,24 @@
             <a:r>
               <a:rPr sz="2800" b="1" i="0" dirty="0">
                 <a:solidFill>
-                  <a:srgbClr val="6E5A8C"/>
+                  <a:srgbClr val="0E6B66"/>
                 </a:solidFill>
                 <a:latin typeface="Consolas"/>
               </a:rPr>
-              <a:t>3 </a:t>
-            </a:r>
-            <a:r>
-              <a:rPr lang="fr-FR" sz="2800" b="1" dirty="0">
-                <a:solidFill>
-                  <a:srgbClr val="6E5A8C"/>
+              <a:t>0.49</a:t>
+            </a:r>
+            <a:r>
+              <a:rPr lang="fr-FR" sz="2800" b="1" i="0" dirty="0">
+                <a:solidFill>
+                  <a:srgbClr val="0E6B66"/>
                 </a:solidFill>
                 <a:latin typeface="Consolas"/>
               </a:rPr>
-              <a:t>471</a:t>
+              <a:t>8</a:t>
             </a:r>
             <a:endParaRPr sz="2800" b="1" i="0" dirty="0">
               <a:solidFill>
-                <a:srgbClr val="6E5A8C"/>
+                <a:srgbClr val="0E6B66"/>
               </a:solidFill>
               <a:latin typeface="Consolas"/>
             </a:endParaRPr>
@@ -13714,104 +14685,14 @@
       </p:sp>
       <p:sp>
         <p:nvSpPr>
-          <p:cNvPr id="30" name="Rectangle 29"/>
-          <p:cNvSpPr/>
-          <p:nvPr/>
-        </p:nvSpPr>
-        <p:spPr>
-          <a:xfrm>
-            <a:off x="8174736" y="4180332"/>
-            <a:ext cx="3127248" cy="63500"/>
-          </a:xfrm>
-          <a:prstGeom prst="rect">
-            <a:avLst/>
-          </a:prstGeom>
-          <a:solidFill>
-            <a:srgbClr val="D9DDD4"/>
-          </a:solidFill>
-          <a:ln>
-            <a:noFill/>
-          </a:ln>
-          <a:effectLst/>
-        </p:spPr>
-        <p:style>
-          <a:lnRef idx="1">
-            <a:schemeClr val="accent1"/>
-          </a:lnRef>
-          <a:fillRef idx="3">
-            <a:schemeClr val="accent1"/>
-          </a:fillRef>
-          <a:effectRef idx="2">
-            <a:schemeClr val="accent1"/>
-          </a:effectRef>
-          <a:fontRef idx="minor">
-            <a:schemeClr val="lt1"/>
-          </a:fontRef>
-        </p:style>
-        <p:txBody>
-          <a:bodyPr rtlCol="0" anchor="ctr"/>
-          <a:lstStyle/>
-          <a:p>
-            <a:pPr algn="ctr"/>
-            <a:endParaRPr/>
-          </a:p>
-        </p:txBody>
-      </p:sp>
-      <p:sp>
-        <p:nvSpPr>
-          <p:cNvPr id="31" name="Rectangle 30"/>
-          <p:cNvSpPr/>
-          <p:nvPr/>
-        </p:nvSpPr>
-        <p:spPr>
-          <a:xfrm>
-            <a:off x="8174736" y="4180332"/>
-            <a:ext cx="3127248" cy="63500"/>
-          </a:xfrm>
-          <a:prstGeom prst="rect">
-            <a:avLst/>
-          </a:prstGeom>
-          <a:solidFill>
-            <a:srgbClr val="6E5A8C"/>
-          </a:solidFill>
-          <a:ln>
-            <a:noFill/>
-          </a:ln>
-          <a:effectLst/>
-        </p:spPr>
-        <p:style>
-          <a:lnRef idx="1">
-            <a:schemeClr val="accent1"/>
-          </a:lnRef>
-          <a:fillRef idx="3">
-            <a:schemeClr val="accent1"/>
-          </a:fillRef>
-          <a:effectRef idx="2">
-            <a:schemeClr val="accent1"/>
-          </a:effectRef>
-          <a:fontRef idx="minor">
-            <a:schemeClr val="lt1"/>
-          </a:fontRef>
-        </p:style>
-        <p:txBody>
-          <a:bodyPr rtlCol="0" anchor="ctr"/>
-          <a:lstStyle/>
-          <a:p>
-            <a:pPr algn="ctr"/>
-            <a:endParaRPr/>
-          </a:p>
-        </p:txBody>
-      </p:sp>
-      <p:sp>
-        <p:nvSpPr>
-          <p:cNvPr id="32" name="TextBox 31"/>
+          <p:cNvPr id="20" name="TextBox 19"/>
           <p:cNvSpPr txBox="1"/>
           <p:nvPr/>
         </p:nvSpPr>
         <p:spPr>
           <a:xfrm>
-            <a:off x="8174736" y="4363212"/>
-            <a:ext cx="3127248" cy="373380"/>
+            <a:off x="8174736" y="3403092"/>
+            <a:ext cx="3127248" cy="510540"/>
           </a:xfrm>
           <a:prstGeom prst="rect">
             <a:avLst/>
@@ -13839,113 +14720,21 @@
                 </a:solidFill>
                 <a:latin typeface="Calibri"/>
               </a:rPr>
-              <a:t>mots rares vs langue courante</a:t>
-            </a:r>
-          </a:p>
-        </p:txBody>
-      </p:sp>
-      <p:sp>
-        <p:nvSpPr>
-          <p:cNvPr id="33" name="Rectangle 32"/>
-          <p:cNvSpPr/>
-          <p:nvPr/>
-        </p:nvSpPr>
-        <p:spPr>
-          <a:xfrm>
-            <a:off x="640080" y="5074920"/>
-            <a:ext cx="38100" cy="1051560"/>
-          </a:xfrm>
-          <a:prstGeom prst="rect">
-            <a:avLst/>
-          </a:prstGeom>
-          <a:solidFill>
-            <a:srgbClr val="6E5A8C"/>
-          </a:solidFill>
-          <a:ln>
-            <a:noFill/>
-          </a:ln>
-          <a:effectLst/>
-        </p:spPr>
-        <p:style>
-          <a:lnRef idx="1">
-            <a:schemeClr val="accent1"/>
-          </a:lnRef>
-          <a:fillRef idx="3">
-            <a:schemeClr val="accent1"/>
-          </a:fillRef>
-          <a:effectRef idx="2">
-            <a:schemeClr val="accent1"/>
-          </a:effectRef>
-          <a:fontRef idx="minor">
-            <a:schemeClr val="lt1"/>
-          </a:fontRef>
-        </p:style>
-        <p:txBody>
-          <a:bodyPr rtlCol="0" anchor="ctr"/>
-          <a:lstStyle/>
-          <a:p>
-            <a:pPr algn="ctr"/>
-            <a:endParaRPr/>
-          </a:p>
-        </p:txBody>
-      </p:sp>
-      <p:sp>
-        <p:nvSpPr>
-          <p:cNvPr id="34" name="Rectangle 33"/>
-          <p:cNvSpPr/>
-          <p:nvPr/>
-        </p:nvSpPr>
-        <p:spPr>
-          <a:xfrm>
-            <a:off x="678180" y="5074920"/>
-            <a:ext cx="10843260" cy="1051560"/>
-          </a:xfrm>
-          <a:prstGeom prst="rect">
-            <a:avLst/>
-          </a:prstGeom>
-          <a:solidFill>
-            <a:srgbClr val="FBFBF8"/>
-          </a:solidFill>
-          <a:ln w="9525">
-            <a:solidFill>
-              <a:srgbClr val="D9DDD4"/>
-            </a:solidFill>
-          </a:ln>
-          <a:effectLst/>
-        </p:spPr>
-        <p:style>
-          <a:lnRef idx="1">
-            <a:schemeClr val="accent1"/>
-          </a:lnRef>
-          <a:fillRef idx="3">
-            <a:schemeClr val="accent1"/>
-          </a:fillRef>
-          <a:effectRef idx="2">
-            <a:schemeClr val="accent1"/>
-          </a:effectRef>
-          <a:fontRef idx="minor">
-            <a:schemeClr val="lt1"/>
-          </a:fontRef>
-        </p:style>
-        <p:txBody>
-          <a:bodyPr rtlCol="0" anchor="ctr"/>
-          <a:lstStyle/>
-          <a:p>
-            <a:pPr algn="ctr"/>
-            <a:endParaRPr/>
-          </a:p>
-        </p:txBody>
-      </p:sp>
-      <p:sp>
-        <p:nvSpPr>
-          <p:cNvPr id="35" name="TextBox 34"/>
+              <a:t>équilibre précision/rappel — notre chiffre de référence</a:t>
+            </a:r>
+          </a:p>
+        </p:txBody>
+      </p:sp>
+      <p:sp>
+        <p:nvSpPr>
+          <p:cNvPr id="21" name="TextBox 20"/>
           <p:cNvSpPr txBox="1"/>
           <p:nvPr/>
         </p:nvSpPr>
         <p:spPr>
           <a:xfrm>
-            <a:off x="914400" y="5212080"/>
-            <a:ext cx="10241280" cy="274320"/>
+            <a:off x="640080" y="4343400"/>
+            <a:ext cx="7315200" cy="274320"/>
           </a:xfrm>
           <a:prstGeom prst="rect">
             <a:avLst/>
@@ -13967,27 +14756,117 @@
               </a:spcAft>
             </a:pPr>
             <a:r>
-              <a:rPr sz="1050" b="1" i="0" spc="80">
-                <a:solidFill>
-                  <a:srgbClr val="6E5A8C"/>
-                </a:solidFill>
-                <a:latin typeface="Consolas"/>
-              </a:rPr>
-              <a:t>ÉCHANTILLON NIVEAU 3</a:t>
-            </a:r>
-          </a:p>
-        </p:txBody>
-      </p:sp>
-      <p:sp>
-        <p:nvSpPr>
-          <p:cNvPr id="36" name="TextBox 35"/>
+              <a:rPr sz="1250" b="1" i="0">
+                <a:solidFill>
+                  <a:srgbClr val="52605F"/>
+                </a:solidFill>
+                <a:latin typeface="Calibri"/>
+              </a:rPr>
+              <a:t>Où se situe notre F1 face à la référence GPU (D-Terminer)</a:t>
+            </a:r>
+          </a:p>
+        </p:txBody>
+      </p:sp>
+      <p:sp>
+        <p:nvSpPr>
+          <p:cNvPr id="22" name="Rectangle 21"/>
+          <p:cNvSpPr/>
+          <p:nvPr/>
+        </p:nvSpPr>
+        <p:spPr>
+          <a:xfrm>
+            <a:off x="640080" y="4709160"/>
+            <a:ext cx="6949440" cy="365760"/>
+          </a:xfrm>
+          <a:prstGeom prst="rect">
+            <a:avLst/>
+          </a:prstGeom>
+          <a:solidFill>
+            <a:srgbClr val="D9DDD4"/>
+          </a:solidFill>
+          <a:ln>
+            <a:noFill/>
+          </a:ln>
+          <a:effectLst/>
+        </p:spPr>
+        <p:style>
+          <a:lnRef idx="1">
+            <a:schemeClr val="accent1"/>
+          </a:lnRef>
+          <a:fillRef idx="3">
+            <a:schemeClr val="accent1"/>
+          </a:fillRef>
+          <a:effectRef idx="2">
+            <a:schemeClr val="accent1"/>
+          </a:effectRef>
+          <a:fontRef idx="minor">
+            <a:schemeClr val="lt1"/>
+          </a:fontRef>
+        </p:style>
+        <p:txBody>
+          <a:bodyPr rtlCol="0" anchor="ctr"/>
+          <a:lstStyle/>
+          <a:p>
+            <a:pPr algn="ctr"/>
+            <a:endParaRPr/>
+          </a:p>
+        </p:txBody>
+      </p:sp>
+      <p:sp>
+        <p:nvSpPr>
+          <p:cNvPr id="23" name="Rectangle 22"/>
+          <p:cNvSpPr/>
+          <p:nvPr/>
+        </p:nvSpPr>
+        <p:spPr>
+          <a:xfrm>
+            <a:off x="2863900" y="4709160"/>
+            <a:ext cx="1250899" cy="365760"/>
+          </a:xfrm>
+          <a:prstGeom prst="rect">
+            <a:avLst/>
+          </a:prstGeom>
+          <a:solidFill>
+            <a:srgbClr val="A8752A"/>
+          </a:solidFill>
+          <a:ln>
+            <a:noFill/>
+          </a:ln>
+          <a:effectLst/>
+        </p:spPr>
+        <p:style>
+          <a:lnRef idx="1">
+            <a:schemeClr val="accent1"/>
+          </a:lnRef>
+          <a:fillRef idx="3">
+            <a:schemeClr val="accent1"/>
+          </a:fillRef>
+          <a:effectRef idx="2">
+            <a:schemeClr val="accent1"/>
+          </a:effectRef>
+          <a:fontRef idx="minor">
+            <a:schemeClr val="lt1"/>
+          </a:fontRef>
+        </p:style>
+        <p:txBody>
+          <a:bodyPr rtlCol="0" anchor="ctr"/>
+          <a:lstStyle/>
+          <a:p>
+            <a:pPr algn="ctr"/>
+            <a:endParaRPr/>
+          </a:p>
+        </p:txBody>
+      </p:sp>
+      <p:sp>
+        <p:nvSpPr>
+          <p:cNvPr id="24" name="TextBox 23"/>
           <p:cNvSpPr txBox="1"/>
           <p:nvPr/>
         </p:nvSpPr>
         <p:spPr>
           <a:xfrm>
-            <a:off x="914400" y="5513832"/>
-            <a:ext cx="10241280" cy="206851"/>
+            <a:off x="2422744" y="5129784"/>
+            <a:ext cx="1250899" cy="359842"/>
           </a:xfrm>
           <a:prstGeom prst="rect">
             <a:avLst/>
@@ -14000,170 +14879,361 @@
           </a:bodyPr>
           <a:lstStyle/>
           <a:p>
-            <a:pPr algn="l">
+            <a:pPr algn="ctr">
               <a:lnSpc>
-                <a:spcPct val="120000"/>
+                <a:spcPct val="115000"/>
               </a:lnSpc>
               <a:spcAft>
                 <a:spcPts val="0"/>
               </a:spcAft>
             </a:pPr>
             <a:r>
-              <a:rPr sz="1200" b="0" i="0" dirty="0">
-                <a:solidFill>
-                  <a:srgbClr val="52605F"/>
-                </a:solidFill>
-                <a:latin typeface="Calibri"/>
-              </a:rPr>
-              <a:t>« intoxication </a:t>
-            </a:r>
-            <a:r>
-              <a:rPr sz="1200" b="0" i="0" dirty="0" err="1">
-                <a:solidFill>
-                  <a:srgbClr val="52605F"/>
-                </a:solidFill>
-                <a:latin typeface="Calibri"/>
-              </a:rPr>
-              <a:t>ciguatérique</a:t>
-            </a:r>
-            <a:r>
-              <a:rPr sz="1200" b="0" i="0" dirty="0">
-                <a:solidFill>
-                  <a:srgbClr val="52605F"/>
-                </a:solidFill>
-                <a:latin typeface="Calibri"/>
-              </a:rPr>
-              <a:t> »  ·  « </a:t>
-            </a:r>
-            <a:r>
-              <a:rPr sz="1200" b="0" i="0" dirty="0" err="1">
-                <a:solidFill>
-                  <a:srgbClr val="52605F"/>
-                </a:solidFill>
-                <a:latin typeface="Calibri"/>
-              </a:rPr>
-              <a:t>toxicité</a:t>
-            </a:r>
-            <a:r>
-              <a:rPr sz="1200" b="0" i="0" dirty="0">
-                <a:solidFill>
-                  <a:srgbClr val="52605F"/>
-                </a:solidFill>
-                <a:latin typeface="Calibri"/>
+              <a:rPr sz="1050" b="1" i="0" dirty="0">
+                <a:solidFill>
+                  <a:srgbClr val="A8752A"/>
+                </a:solidFill>
+                <a:latin typeface="Consolas"/>
+              </a:rPr>
+              <a:t>D-</a:t>
+            </a:r>
+            <a:r>
+              <a:rPr sz="1050" b="1" i="0" dirty="0" err="1">
+                <a:solidFill>
+                  <a:srgbClr val="A8752A"/>
+                </a:solidFill>
+                <a:latin typeface="Consolas"/>
+              </a:rPr>
+              <a:t>Terminer</a:t>
+            </a:r>
+            <a:r>
+              <a:rPr sz="1050" b="1" i="0" dirty="0">
+                <a:solidFill>
+                  <a:srgbClr val="A8752A"/>
+                </a:solidFill>
+                <a:latin typeface="Consolas"/>
               </a:rPr>
               <a:t> </a:t>
             </a:r>
-            <a:r>
-              <a:rPr sz="1200" b="0" i="0" dirty="0" err="1">
-                <a:solidFill>
-                  <a:srgbClr val="52605F"/>
-                </a:solidFill>
-                <a:latin typeface="Calibri"/>
-              </a:rPr>
-              <a:t>chimique</a:t>
-            </a:r>
-            <a:r>
-              <a:rPr sz="1200" b="0" i="0" dirty="0">
-                <a:solidFill>
-                  <a:srgbClr val="52605F"/>
-                </a:solidFill>
-                <a:latin typeface="Calibri"/>
-              </a:rPr>
-              <a:t> »  ·  « micro-</a:t>
-            </a:r>
-            <a:r>
-              <a:rPr sz="1200" b="0" i="0" dirty="0" err="1">
-                <a:solidFill>
-                  <a:srgbClr val="52605F"/>
-                </a:solidFill>
-                <a:latin typeface="Calibri"/>
-              </a:rPr>
-              <a:t>organismes</a:t>
-            </a:r>
-            <a:r>
-              <a:rPr sz="1200" b="0" i="0" dirty="0">
-                <a:solidFill>
-                  <a:srgbClr val="52605F"/>
-                </a:solidFill>
-                <a:latin typeface="Calibri"/>
-              </a:rPr>
-              <a:t> </a:t>
-            </a:r>
-            <a:r>
-              <a:rPr sz="1200" b="0" i="0" dirty="0" err="1">
-                <a:solidFill>
-                  <a:srgbClr val="52605F"/>
-                </a:solidFill>
-                <a:latin typeface="Calibri"/>
-              </a:rPr>
-              <a:t>infectieux</a:t>
-            </a:r>
-            <a:r>
-              <a:rPr sz="1200" b="0" i="0" dirty="0">
-                <a:solidFill>
-                  <a:srgbClr val="52605F"/>
-                </a:solidFill>
-                <a:latin typeface="Calibri"/>
-              </a:rPr>
-              <a:t> » — </a:t>
-            </a:r>
-            <a:r>
-              <a:rPr sz="1200" b="0" i="0" dirty="0" err="1">
-                <a:solidFill>
-                  <a:srgbClr val="52605F"/>
-                </a:solidFill>
-                <a:latin typeface="Calibri"/>
-              </a:rPr>
-              <a:t>cohérent</a:t>
-            </a:r>
-            <a:r>
-              <a:rPr sz="1200" b="0" i="0" dirty="0">
-                <a:solidFill>
-                  <a:srgbClr val="52605F"/>
-                </a:solidFill>
-                <a:latin typeface="Calibri"/>
-              </a:rPr>
-              <a:t> avec le </a:t>
-            </a:r>
-            <a:r>
-              <a:rPr sz="1200" b="0" i="0" dirty="0" err="1">
-                <a:solidFill>
-                  <a:srgbClr val="52605F"/>
-                </a:solidFill>
-                <a:latin typeface="Calibri"/>
-              </a:rPr>
-              <a:t>domaine</a:t>
-            </a:r>
-            <a:r>
-              <a:rPr sz="1200" b="0" i="0" dirty="0">
-                <a:solidFill>
-                  <a:srgbClr val="52605F"/>
-                </a:solidFill>
-                <a:latin typeface="Calibri"/>
-              </a:rPr>
-              <a:t> du corpus </a:t>
-            </a:r>
-            <a:r>
-              <a:rPr sz="1200" b="0" i="0" dirty="0" err="1">
-                <a:solidFill>
-                  <a:srgbClr val="52605F"/>
-                </a:solidFill>
-                <a:latin typeface="Calibri"/>
-              </a:rPr>
-              <a:t>toxicologie</a:t>
-            </a:r>
-            <a:endParaRPr sz="1200" b="0" i="0" dirty="0">
-              <a:solidFill>
-                <a:srgbClr val="52605F"/>
-              </a:solidFill>
-              <a:latin typeface="Calibri"/>
-            </a:endParaRPr>
-          </a:p>
-        </p:txBody>
-      </p:sp>
-      <p:sp>
-        <p:nvSpPr>
-          <p:cNvPr id="37" name="TextBox 36"/>
+            <a:br>
+              <a:rPr lang="fr-FR" sz="1050" b="1" i="0" dirty="0">
+                <a:solidFill>
+                  <a:srgbClr val="A8752A"/>
+                </a:solidFill>
+                <a:latin typeface="Consolas"/>
+              </a:rPr>
+            </a:br>
+            <a:r>
+              <a:rPr sz="1050" b="1" i="0" dirty="0">
+                <a:solidFill>
+                  <a:srgbClr val="A8752A"/>
+                </a:solidFill>
+                <a:latin typeface="Consolas"/>
+              </a:rPr>
+              <a:t> 0.32–0.50</a:t>
+            </a:r>
+          </a:p>
+        </p:txBody>
+      </p:sp>
+      <p:sp>
+        <p:nvSpPr>
+          <p:cNvPr id="25" name="Rectangle 24"/>
+          <p:cNvSpPr/>
+          <p:nvPr/>
+        </p:nvSpPr>
+        <p:spPr>
+          <a:xfrm>
+            <a:off x="4088201" y="4636008"/>
+            <a:ext cx="25400" cy="512064"/>
+          </a:xfrm>
+          <a:prstGeom prst="rect">
+            <a:avLst/>
+          </a:prstGeom>
+          <a:solidFill>
+            <a:srgbClr val="0E6B66"/>
+          </a:solidFill>
+          <a:ln>
+            <a:noFill/>
+          </a:ln>
+          <a:effectLst/>
+        </p:spPr>
+        <p:style>
+          <a:lnRef idx="1">
+            <a:schemeClr val="accent1"/>
+          </a:lnRef>
+          <a:fillRef idx="3">
+            <a:schemeClr val="accent1"/>
+          </a:fillRef>
+          <a:effectRef idx="2">
+            <a:schemeClr val="accent1"/>
+          </a:effectRef>
+          <a:fontRef idx="minor">
+            <a:schemeClr val="lt1"/>
+          </a:fontRef>
+        </p:style>
+        <p:txBody>
+          <a:bodyPr rtlCol="0" anchor="ctr"/>
+          <a:lstStyle/>
+          <a:p>
+            <a:pPr algn="ctr"/>
+            <a:endParaRPr/>
+          </a:p>
+        </p:txBody>
+      </p:sp>
+      <p:sp>
+        <p:nvSpPr>
+          <p:cNvPr id="26" name="TextBox 25"/>
+          <p:cNvSpPr txBox="1"/>
+          <p:nvPr/>
+        </p:nvSpPr>
+        <p:spPr>
+          <a:xfrm>
+            <a:off x="3597981" y="5129784"/>
+            <a:ext cx="1005840" cy="256032"/>
+          </a:xfrm>
+          <a:prstGeom prst="rect">
+            <a:avLst/>
+          </a:prstGeom>
+          <a:noFill/>
+        </p:spPr>
+        <p:txBody>
+          <a:bodyPr wrap="square" lIns="0" tIns="0" rIns="0" bIns="0" anchor="t">
+            <a:spAutoFit/>
+          </a:bodyPr>
+          <a:lstStyle/>
+          <a:p>
+            <a:pPr algn="ctr">
+              <a:lnSpc>
+                <a:spcPct val="115000"/>
+              </a:lnSpc>
+              <a:spcAft>
+                <a:spcPts val="0"/>
+              </a:spcAft>
+            </a:pPr>
+            <a:r>
+              <a:rPr sz="1050" b="1" i="0">
+                <a:solidFill>
+                  <a:srgbClr val="0E6B66"/>
+                </a:solidFill>
+                <a:latin typeface="Consolas"/>
+              </a:rPr>
+              <a:t>notre F1  0.498</a:t>
+            </a:r>
+          </a:p>
+        </p:txBody>
+      </p:sp>
+      <p:sp>
+        <p:nvSpPr>
+          <p:cNvPr id="27" name="TextBox 26"/>
+          <p:cNvSpPr txBox="1"/>
+          <p:nvPr/>
+        </p:nvSpPr>
+        <p:spPr>
+          <a:xfrm>
+            <a:off x="365760" y="5486400"/>
+            <a:ext cx="548640" cy="274320"/>
+          </a:xfrm>
+          <a:prstGeom prst="rect">
+            <a:avLst/>
+          </a:prstGeom>
+          <a:noFill/>
+        </p:spPr>
+        <p:txBody>
+          <a:bodyPr wrap="square" lIns="0" tIns="0" rIns="0" bIns="0" anchor="t">
+            <a:spAutoFit/>
+          </a:bodyPr>
+          <a:lstStyle/>
+          <a:p>
+            <a:pPr algn="ctr">
+              <a:lnSpc>
+                <a:spcPct val="115000"/>
+              </a:lnSpc>
+              <a:spcAft>
+                <a:spcPts val="0"/>
+              </a:spcAft>
+            </a:pPr>
+            <a:r>
+              <a:rPr sz="1050" b="0" i="0">
+                <a:solidFill>
+                  <a:srgbClr val="7C8886"/>
+                </a:solidFill>
+                <a:latin typeface="Consolas"/>
+              </a:rPr>
+              <a:t>0.0</a:t>
+            </a:r>
+          </a:p>
+        </p:txBody>
+      </p:sp>
+      <p:sp>
+        <p:nvSpPr>
+          <p:cNvPr id="28" name="TextBox 27"/>
+          <p:cNvSpPr txBox="1"/>
+          <p:nvPr/>
+        </p:nvSpPr>
+        <p:spPr>
+          <a:xfrm>
+            <a:off x="2103120" y="5486400"/>
+            <a:ext cx="548640" cy="274320"/>
+          </a:xfrm>
+          <a:prstGeom prst="rect">
+            <a:avLst/>
+          </a:prstGeom>
+          <a:noFill/>
+        </p:spPr>
+        <p:txBody>
+          <a:bodyPr wrap="square" lIns="0" tIns="0" rIns="0" bIns="0" anchor="t">
+            <a:spAutoFit/>
+          </a:bodyPr>
+          <a:lstStyle/>
+          <a:p>
+            <a:pPr algn="ctr">
+              <a:lnSpc>
+                <a:spcPct val="115000"/>
+              </a:lnSpc>
+              <a:spcAft>
+                <a:spcPts val="0"/>
+              </a:spcAft>
+            </a:pPr>
+            <a:r>
+              <a:rPr sz="1050" b="0" i="0">
+                <a:solidFill>
+                  <a:srgbClr val="7C8886"/>
+                </a:solidFill>
+                <a:latin typeface="Consolas"/>
+              </a:rPr>
+              <a:t>0.25</a:t>
+            </a:r>
+          </a:p>
+        </p:txBody>
+      </p:sp>
+      <p:sp>
+        <p:nvSpPr>
+          <p:cNvPr id="29" name="TextBox 28"/>
+          <p:cNvSpPr txBox="1"/>
+          <p:nvPr/>
+        </p:nvSpPr>
+        <p:spPr>
+          <a:xfrm>
+            <a:off x="3840480" y="5486400"/>
+            <a:ext cx="548640" cy="274320"/>
+          </a:xfrm>
+          <a:prstGeom prst="rect">
+            <a:avLst/>
+          </a:prstGeom>
+          <a:noFill/>
+        </p:spPr>
+        <p:txBody>
+          <a:bodyPr wrap="square" lIns="0" tIns="0" rIns="0" bIns="0" anchor="t">
+            <a:spAutoFit/>
+          </a:bodyPr>
+          <a:lstStyle/>
+          <a:p>
+            <a:pPr algn="ctr">
+              <a:lnSpc>
+                <a:spcPct val="115000"/>
+              </a:lnSpc>
+              <a:spcAft>
+                <a:spcPts val="0"/>
+              </a:spcAft>
+            </a:pPr>
+            <a:r>
+              <a:rPr sz="1050" b="0" i="0">
+                <a:solidFill>
+                  <a:srgbClr val="7C8886"/>
+                </a:solidFill>
+                <a:latin typeface="Consolas"/>
+              </a:rPr>
+              <a:t>0.5</a:t>
+            </a:r>
+          </a:p>
+        </p:txBody>
+      </p:sp>
+      <p:sp>
+        <p:nvSpPr>
+          <p:cNvPr id="30" name="TextBox 29"/>
+          <p:cNvSpPr txBox="1"/>
+          <p:nvPr/>
+        </p:nvSpPr>
+        <p:spPr>
+          <a:xfrm>
+            <a:off x="5577840" y="5486400"/>
+            <a:ext cx="548640" cy="274320"/>
+          </a:xfrm>
+          <a:prstGeom prst="rect">
+            <a:avLst/>
+          </a:prstGeom>
+          <a:noFill/>
+        </p:spPr>
+        <p:txBody>
+          <a:bodyPr wrap="square" lIns="0" tIns="0" rIns="0" bIns="0" anchor="t">
+            <a:spAutoFit/>
+          </a:bodyPr>
+          <a:lstStyle/>
+          <a:p>
+            <a:pPr algn="ctr">
+              <a:lnSpc>
+                <a:spcPct val="115000"/>
+              </a:lnSpc>
+              <a:spcAft>
+                <a:spcPts val="0"/>
+              </a:spcAft>
+            </a:pPr>
+            <a:r>
+              <a:rPr sz="1050" b="0" i="0">
+                <a:solidFill>
+                  <a:srgbClr val="7C8886"/>
+                </a:solidFill>
+                <a:latin typeface="Consolas"/>
+              </a:rPr>
+              <a:t>0.75</a:t>
+            </a:r>
+          </a:p>
+        </p:txBody>
+      </p:sp>
+      <p:sp>
+        <p:nvSpPr>
+          <p:cNvPr id="31" name="TextBox 30"/>
+          <p:cNvSpPr txBox="1"/>
+          <p:nvPr/>
+        </p:nvSpPr>
+        <p:spPr>
+          <a:xfrm>
+            <a:off x="7315200" y="5486400"/>
+            <a:ext cx="548640" cy="274320"/>
+          </a:xfrm>
+          <a:prstGeom prst="rect">
+            <a:avLst/>
+          </a:prstGeom>
+          <a:noFill/>
+        </p:spPr>
+        <p:txBody>
+          <a:bodyPr wrap="square" lIns="0" tIns="0" rIns="0" bIns="0" anchor="t">
+            <a:spAutoFit/>
+          </a:bodyPr>
+          <a:lstStyle/>
+          <a:p>
+            <a:pPr algn="ctr">
+              <a:lnSpc>
+                <a:spcPct val="115000"/>
+              </a:lnSpc>
+              <a:spcAft>
+                <a:spcPts val="0"/>
+              </a:spcAft>
+            </a:pPr>
+            <a:r>
+              <a:rPr sz="1050" b="0" i="0">
+                <a:solidFill>
+                  <a:srgbClr val="7C8886"/>
+                </a:solidFill>
+                <a:latin typeface="Consolas"/>
+              </a:rPr>
+              <a:t>1.0</a:t>
+            </a:r>
+          </a:p>
+        </p:txBody>
+      </p:sp>
+      <p:sp>
+        <p:nvSpPr>
+          <p:cNvPr id="32" name="TextBox 31"/>
           <p:cNvSpPr txBox="1"/>
           <p:nvPr/>
         </p:nvSpPr>
@@ -14198,7 +15268,7 @@
                 </a:solidFill>
                 <a:latin typeface="Consolas"/>
               </a:rPr>
-              <a:t>8 / 12</a:t>
+              <a:t>9 / 12</a:t>
             </a:r>
           </a:p>
         </p:txBody>
@@ -14230,13 +15300,13 @@
       </p:grpSpPr>
       <p:sp>
         <p:nvSpPr>
-          <p:cNvPr id="3" name="TextBox 2"/>
+          <p:cNvPr id="2" name="Rubrique"/>
           <p:cNvSpPr txBox="1"/>
           <p:nvPr/>
         </p:nvSpPr>
         <p:spPr>
           <a:xfrm>
-            <a:off x="452510" y="175260"/>
+            <a:off x="457200" y="155448"/>
             <a:ext cx="5486400" cy="320040"/>
           </a:xfrm>
           <a:prstGeom prst="rect">
@@ -14250,36 +15320,29 @@
           </a:bodyPr>
           <a:lstStyle/>
           <a:p>
-            <a:pPr algn="l">
-              <a:lnSpc>
-                <a:spcPct val="115000"/>
-              </a:lnSpc>
-              <a:spcAft>
-                <a:spcPts val="0"/>
-              </a:spcAft>
-            </a:pPr>
-            <a:r>
-              <a:rPr sz="1200" b="0" i="0" spc="140" dirty="0">
+            <a:pPr algn="l"/>
+            <a:r>
+              <a:rPr sz="1200" b="0">
                 <a:solidFill>
                   <a:srgbClr val="7C8886"/>
                 </a:solidFill>
                 <a:latin typeface="Consolas"/>
               </a:rPr>
-              <a:t>RÉSULTATS MESURÉS</a:t>
-            </a:r>
-          </a:p>
-        </p:txBody>
-      </p:sp>
-      <p:sp>
-        <p:nvSpPr>
-          <p:cNvPr id="4" name="TextBox 3"/>
+              <a:t>COMPARAISON · TERMSUITE</a:t>
+            </a:r>
+          </a:p>
+        </p:txBody>
+      </p:sp>
+      <p:sp>
+        <p:nvSpPr>
+          <p:cNvPr id="3" name="Titre"/>
           <p:cNvSpPr txBox="1"/>
           <p:nvPr/>
         </p:nvSpPr>
         <p:spPr>
           <a:xfrm>
             <a:off x="640080" y="777240"/>
-            <a:ext cx="8686800" cy="492443"/>
+            <a:ext cx="10881360" cy="493776"/>
           </a:xfrm>
           <a:prstGeom prst="rect">
             <a:avLst/>
@@ -14292,63 +15355,29 @@
           </a:bodyPr>
           <a:lstStyle/>
           <a:p>
-            <a:pPr algn="l">
-              <a:lnSpc>
-                <a:spcPct val="100000"/>
-              </a:lnSpc>
-              <a:spcAft>
-                <a:spcPts val="0"/>
-              </a:spcAft>
-            </a:pPr>
-            <a:r>
-              <a:rPr sz="3200" b="1" i="0" dirty="0" err="1">
+            <a:pPr algn="l"/>
+            <a:r>
+              <a:rPr sz="3200" b="1">
                 <a:solidFill>
                   <a:srgbClr val="1B2429"/>
                 </a:solidFill>
                 <a:latin typeface="Cambria"/>
               </a:rPr>
-              <a:t>Testé</a:t>
-            </a:r>
-            <a:r>
-              <a:rPr sz="3200" b="1" i="0" dirty="0">
-                <a:solidFill>
-                  <a:srgbClr val="1B2429"/>
-                </a:solidFill>
-                <a:latin typeface="Cambria"/>
-              </a:rPr>
-              <a:t> </a:t>
-            </a:r>
-            <a:r>
-              <a:rPr sz="3200" b="1" i="0" dirty="0" err="1">
-                <a:solidFill>
-                  <a:srgbClr val="1B2429"/>
-                </a:solidFill>
-                <a:latin typeface="Cambria"/>
-              </a:rPr>
-              <a:t>contre</a:t>
-            </a:r>
-            <a:r>
-              <a:rPr sz="3200" b="1" i="0" dirty="0">
-                <a:solidFill>
-                  <a:srgbClr val="1B2429"/>
-                </a:solidFill>
-                <a:latin typeface="Cambria"/>
-              </a:rPr>
-              <a:t> un gold standard</a:t>
-            </a:r>
-          </a:p>
-        </p:txBody>
-      </p:sp>
-      <p:sp>
-        <p:nvSpPr>
-          <p:cNvPr id="5" name="TextBox 4"/>
+              <a:t>Embed : les suggestions les plus fiables</a:t>
+            </a:r>
+          </a:p>
+        </p:txBody>
+      </p:sp>
+      <p:sp>
+        <p:nvSpPr>
+          <p:cNvPr id="4" name="Sous-titre"/>
           <p:cNvSpPr txBox="1"/>
           <p:nvPr/>
         </p:nvSpPr>
         <p:spPr>
           <a:xfrm>
             <a:off x="640080" y="1600200"/>
-            <a:ext cx="8961120" cy="822960"/>
+            <a:ext cx="10881360" cy="320040"/>
           </a:xfrm>
           <a:prstGeom prst="rect">
             <a:avLst/>
@@ -14361,36 +15390,29 @@
           </a:bodyPr>
           <a:lstStyle/>
           <a:p>
-            <a:pPr algn="l">
-              <a:lnSpc>
-                <a:spcPct val="125000"/>
-              </a:lnSpc>
-              <a:spcAft>
-                <a:spcPts val="0"/>
-              </a:spcAft>
-            </a:pPr>
-            <a:r>
-              <a:rPr sz="1500" b="0" i="0">
-                <a:solidFill>
-                  <a:srgbClr val="52605F"/>
-                </a:solidFill>
-                <a:latin typeface="Calibri"/>
-              </a:rPr>
-              <a:t>Corpus ACTER — 18 900 termes annotés à la main, FR + EN, 4 domaines. Trois indicateurs complémentaires, mesurés à froid (sans vocabulaire cible).</a:t>
-            </a:r>
-          </a:p>
-        </p:txBody>
-      </p:sp>
-      <p:sp>
-        <p:nvSpPr>
-          <p:cNvPr id="6" name="Rectangle 5"/>
+            <a:pPr algn="l"/>
+            <a:r>
+              <a:rPr sz="1500" b="0">
+                <a:solidFill>
+                  <a:srgbClr val="52605F"/>
+                </a:solidFill>
+                <a:latin typeface="Calibri"/>
+              </a:rPr>
+              <a:t>Corpus ACTER avec un vocabulaire cible — comparé à TermSuite 3.0.10 à nombre de suggestions égal</a:t>
+            </a:r>
+          </a:p>
+        </p:txBody>
+      </p:sp>
+      <p:sp>
+        <p:nvSpPr>
+          <p:cNvPr id="5" name="Carte comparaison filet"/>
           <p:cNvSpPr/>
           <p:nvPr/>
         </p:nvSpPr>
         <p:spPr>
           <a:xfrm>
-            <a:off x="640080" y="2468880"/>
-            <a:ext cx="3456432" cy="38100"/>
+            <a:off x="640080" y="2331720"/>
+            <a:ext cx="6720840" cy="36576"/>
           </a:xfrm>
           <a:prstGeom prst="rect">
             <a:avLst/>
@@ -14428,14 +15450,14 @@
       </p:sp>
       <p:sp>
         <p:nvSpPr>
-          <p:cNvPr id="7" name="Rectangle 6"/>
+          <p:cNvPr id="6" name="Carte comparaison"/>
           <p:cNvSpPr/>
           <p:nvPr/>
         </p:nvSpPr>
         <p:spPr>
           <a:xfrm>
-            <a:off x="640080" y="2506980"/>
-            <a:ext cx="3456432" cy="1516380"/>
+            <a:off x="640080" y="2368296"/>
+            <a:ext cx="6720840" cy="3575304"/>
           </a:xfrm>
           <a:prstGeom prst="rect">
             <a:avLst/>
@@ -14443,10 +15465,8 @@
           <a:solidFill>
             <a:srgbClr val="FBFBF8"/>
           </a:solidFill>
-          <a:ln w="9525">
-            <a:solidFill>
-              <a:srgbClr val="D9DDD4"/>
-            </a:solidFill>
+          <a:ln>
+            <a:noFill/>
           </a:ln>
           <a:effectLst/>
         </p:spPr>
@@ -14475,14 +15495,14 @@
       </p:sp>
       <p:sp>
         <p:nvSpPr>
-          <p:cNvPr id="8" name="TextBox 7"/>
+          <p:cNvPr id="7" name="Label comparaison"/>
           <p:cNvSpPr txBox="1"/>
           <p:nvPr/>
         </p:nvSpPr>
         <p:spPr>
           <a:xfrm>
-            <a:off x="804672" y="2634996"/>
-            <a:ext cx="3127248" cy="274320"/>
+            <a:off x="804671" y="2478024"/>
+            <a:ext cx="6391655" cy="274320"/>
           </a:xfrm>
           <a:prstGeom prst="rect">
             <a:avLst/>
@@ -14495,36 +15515,137 @@
           </a:bodyPr>
           <a:lstStyle/>
           <a:p>
-            <a:pPr algn="l">
-              <a:lnSpc>
-                <a:spcPct val="115000"/>
-              </a:lnSpc>
-              <a:spcAft>
-                <a:spcPts val="0"/>
-              </a:spcAft>
-            </a:pPr>
-            <a:r>
-              <a:rPr sz="1050" b="1" i="0" spc="80">
+            <a:pPr algn="l"/>
+            <a:r>
+              <a:rPr sz="1050" b="1">
                 <a:solidFill>
                   <a:srgbClr val="0E6B66"/>
                 </a:solidFill>
                 <a:latin typeface="Consolas"/>
               </a:rPr>
-              <a:t>PRÉCISION</a:t>
-            </a:r>
-          </a:p>
-        </p:txBody>
-      </p:sp>
-      <p:sp>
-        <p:nvSpPr>
-          <p:cNvPr id="9" name="TextBox 8"/>
+              <a:t>AVEC VOCABULAIRE · MÊME NOMBRE DE SUGGESTIONS</a:t>
+            </a:r>
+          </a:p>
+        </p:txBody>
+      </p:sp>
+      <p:graphicFrame>
+        <p:nvGraphicFramePr>
+          <p:cNvPr id="8" name="Graphique embed contre TermSuite"/>
+          <p:cNvGraphicFramePr>
+            <a:graphicFrameLocks noGrp="1"/>
+          </p:cNvGraphicFramePr>
+          <p:nvPr/>
+        </p:nvGraphicFramePr>
+        <p:xfrm>
+          <a:off x="731519" y="2788920"/>
+          <a:ext cx="6537959" cy="3063240"/>
+        </p:xfrm>
+        <a:graphic>
+          <a:graphicData uri="http://schemas.openxmlformats.org/drawingml/2006/chart">
+            <c:chart xmlns:c="http://schemas.openxmlformats.org/drawingml/2006/chart" xmlns:r="http://schemas.openxmlformats.org/officeDocument/2006/relationships" r:id="rId2"/>
+          </a:graphicData>
+        </a:graphic>
+      </p:graphicFrame>
+      <p:sp>
+        <p:nvSpPr>
+          <p:cNvPr id="9" name="Carte essentiel filet"/>
+          <p:cNvSpPr/>
+          <p:nvPr/>
+        </p:nvSpPr>
+        <p:spPr>
+          <a:xfrm>
+            <a:off x="7589520" y="2331720"/>
+            <a:ext cx="3931920" cy="36576"/>
+          </a:xfrm>
+          <a:prstGeom prst="rect">
+            <a:avLst/>
+          </a:prstGeom>
+          <a:solidFill>
+            <a:srgbClr val="52605F"/>
+          </a:solidFill>
+          <a:ln>
+            <a:noFill/>
+          </a:ln>
+          <a:effectLst/>
+        </p:spPr>
+        <p:style>
+          <a:lnRef idx="1">
+            <a:schemeClr val="accent1"/>
+          </a:lnRef>
+          <a:fillRef idx="3">
+            <a:schemeClr val="accent1"/>
+          </a:fillRef>
+          <a:effectRef idx="2">
+            <a:schemeClr val="accent1"/>
+          </a:effectRef>
+          <a:fontRef idx="minor">
+            <a:schemeClr val="lt1"/>
+          </a:fontRef>
+        </p:style>
+        <p:txBody>
+          <a:bodyPr rtlCol="0" anchor="ctr"/>
+          <a:lstStyle/>
+          <a:p>
+            <a:pPr algn="ctr"/>
+            <a:endParaRPr/>
+          </a:p>
+        </p:txBody>
+      </p:sp>
+      <p:sp>
+        <p:nvSpPr>
+          <p:cNvPr id="10" name="Carte essentiel"/>
+          <p:cNvSpPr/>
+          <p:nvPr/>
+        </p:nvSpPr>
+        <p:spPr>
+          <a:xfrm>
+            <a:off x="7589520" y="2368296"/>
+            <a:ext cx="3931920" cy="3575304"/>
+          </a:xfrm>
+          <a:prstGeom prst="rect">
+            <a:avLst/>
+          </a:prstGeom>
+          <a:solidFill>
+            <a:srgbClr val="FBFBF8"/>
+          </a:solidFill>
+          <a:ln>
+            <a:noFill/>
+          </a:ln>
+          <a:effectLst/>
+        </p:spPr>
+        <p:style>
+          <a:lnRef idx="1">
+            <a:schemeClr val="accent1"/>
+          </a:lnRef>
+          <a:fillRef idx="3">
+            <a:schemeClr val="accent1"/>
+          </a:fillRef>
+          <a:effectRef idx="2">
+            <a:schemeClr val="accent1"/>
+          </a:effectRef>
+          <a:fontRef idx="minor">
+            <a:schemeClr val="lt1"/>
+          </a:fontRef>
+        </p:style>
+        <p:txBody>
+          <a:bodyPr rtlCol="0" anchor="ctr"/>
+          <a:lstStyle/>
+          <a:p>
+            <a:pPr algn="ctr"/>
+            <a:endParaRPr/>
+          </a:p>
+        </p:txBody>
+      </p:sp>
+      <p:sp>
+        <p:nvSpPr>
+          <p:cNvPr id="11" name="Label essentiel"/>
           <p:cNvSpPr txBox="1"/>
           <p:nvPr/>
         </p:nvSpPr>
         <p:spPr>
           <a:xfrm>
-            <a:off x="804672" y="2945892"/>
-            <a:ext cx="3127248" cy="457200"/>
+            <a:off x="7754112" y="2478024"/>
+            <a:ext cx="3602736" cy="274320"/>
           </a:xfrm>
           <a:prstGeom prst="rect">
             <a:avLst/>
@@ -14537,80 +15658,31 @@
           </a:bodyPr>
           <a:lstStyle/>
           <a:p>
-            <a:pPr algn="l">
-              <a:lnSpc>
-                <a:spcPct val="115000"/>
-              </a:lnSpc>
-              <a:spcAft>
-                <a:spcPts val="0"/>
-              </a:spcAft>
-            </a:pPr>
-            <a:r>
-              <a:rPr sz="2800" b="1" i="0">
-                <a:solidFill>
-                  <a:srgbClr val="0E6B66"/>
+            <a:pPr algn="l"/>
+            <a:r>
+              <a:rPr sz="1050" b="1">
+                <a:solidFill>
+                  <a:srgbClr val="52605F"/>
                 </a:solidFill>
                 <a:latin typeface="Consolas"/>
               </a:rPr>
-              <a:t>0.551</a:t>
-            </a:r>
-          </a:p>
-        </p:txBody>
-      </p:sp>
-      <p:sp>
-        <p:nvSpPr>
-          <p:cNvPr id="10" name="TextBox 9"/>
-          <p:cNvSpPr txBox="1"/>
-          <p:nvPr/>
-        </p:nvSpPr>
-        <p:spPr>
-          <a:xfrm>
-            <a:off x="804672" y="3403092"/>
-            <a:ext cx="3127248" cy="510540"/>
-          </a:xfrm>
-          <a:prstGeom prst="rect">
-            <a:avLst/>
-          </a:prstGeom>
-          <a:noFill/>
-        </p:spPr>
-        <p:txBody>
-          <a:bodyPr wrap="square" lIns="0" tIns="0" rIns="0" bIns="0" anchor="t">
-            <a:spAutoFit/>
-          </a:bodyPr>
-          <a:lstStyle/>
-          <a:p>
-            <a:pPr algn="l">
-              <a:lnSpc>
-                <a:spcPct val="120000"/>
-              </a:lnSpc>
-              <a:spcAft>
-                <a:spcPts val="0"/>
-              </a:spcAft>
-            </a:pPr>
-            <a:r>
-              <a:rPr sz="1150" b="0" i="0">
-                <a:solidFill>
-                  <a:srgbClr val="52605F"/>
-                </a:solidFill>
-                <a:latin typeface="Calibri"/>
-              </a:rPr>
-              <a:t>parmi les candidats retenus, part de vrais termes</a:t>
-            </a:r>
-          </a:p>
-        </p:txBody>
-      </p:sp>
-      <p:sp>
-        <p:nvSpPr>
-          <p:cNvPr id="11" name="Rectangle 10"/>
+              <a:t>L'ESSENTIEL</a:t>
+            </a:r>
+          </a:p>
+        </p:txBody>
+      </p:sp>
+      <p:sp>
+        <p:nvSpPr>
+          <p:cNvPr id="12" name="Puce 1"/>
           <p:cNvSpPr/>
           <p:nvPr/>
         </p:nvSpPr>
         <p:spPr>
           <a:xfrm>
-            <a:off x="4325112" y="2468880"/>
-            <a:ext cx="3456432" cy="38100"/>
-          </a:xfrm>
-          <a:prstGeom prst="rect">
+            <a:off x="7754112" y="2898648"/>
+            <a:ext cx="329184" cy="329184"/>
+          </a:xfrm>
+          <a:prstGeom prst="ellipse">
             <a:avLst/>
           </a:prstGeom>
           <a:solidFill>
@@ -14636,35 +15708,111 @@
           </a:fontRef>
         </p:style>
         <p:txBody>
-          <a:bodyPr rtlCol="0" anchor="ctr"/>
+          <a:bodyPr lIns="0" tIns="0" rIns="0" bIns="0" rtlCol="0" anchor="ctr"/>
           <a:lstStyle/>
           <a:p>
             <a:pPr algn="ctr"/>
-            <a:endParaRPr/>
-          </a:p>
-        </p:txBody>
-      </p:sp>
-      <p:sp>
-        <p:nvSpPr>
-          <p:cNvPr id="12" name="Rectangle 11"/>
+            <a:r>
+              <a:rPr sz="1300" b="1">
+                <a:solidFill>
+                  <a:srgbClr val="FFFFFF"/>
+                </a:solidFill>
+                <a:latin typeface="Consolas"/>
+              </a:rPr>
+              <a:t>1</a:t>
+            </a:r>
+          </a:p>
+        </p:txBody>
+      </p:sp>
+      <p:sp>
+        <p:nvSpPr>
+          <p:cNvPr id="13" name="Point 1 titre"/>
+          <p:cNvSpPr txBox="1"/>
+          <p:nvPr/>
+        </p:nvSpPr>
+        <p:spPr>
+          <a:xfrm>
+            <a:off x="8229600" y="2880360"/>
+            <a:ext cx="3127248" cy="292608"/>
+          </a:xfrm>
+          <a:prstGeom prst="rect">
+            <a:avLst/>
+          </a:prstGeom>
+          <a:noFill/>
+        </p:spPr>
+        <p:txBody>
+          <a:bodyPr wrap="square" lIns="0" tIns="0" rIns="0" bIns="0" anchor="t">
+            <a:spAutoFit/>
+          </a:bodyPr>
+          <a:lstStyle/>
+          <a:p>
+            <a:pPr algn="l"/>
+            <a:r>
+              <a:rPr sz="1550" b="1">
+                <a:solidFill>
+                  <a:srgbClr val="1B2429"/>
+                </a:solidFill>
+                <a:latin typeface="Cambria"/>
+              </a:rPr>
+              <a:t>Embed vise juste</a:t>
+            </a:r>
+          </a:p>
+        </p:txBody>
+      </p:sp>
+      <p:sp>
+        <p:nvSpPr>
+          <p:cNvPr id="14" name="Point 1 texte"/>
+          <p:cNvSpPr txBox="1"/>
+          <p:nvPr/>
+        </p:nvSpPr>
+        <p:spPr>
+          <a:xfrm>
+            <a:off x="8229600" y="3209544"/>
+            <a:ext cx="3127248" cy="548640"/>
+          </a:xfrm>
+          <a:prstGeom prst="rect">
+            <a:avLst/>
+          </a:prstGeom>
+          <a:noFill/>
+        </p:spPr>
+        <p:txBody>
+          <a:bodyPr wrap="square" lIns="0" tIns="0" rIns="0" bIns="0" anchor="t">
+            <a:spAutoFit/>
+          </a:bodyPr>
+          <a:lstStyle/>
+          <a:p>
+            <a:pPr algn="l"/>
+            <a:r>
+              <a:rPr sz="1200" b="0">
+                <a:solidFill>
+                  <a:srgbClr val="52605F"/>
+                </a:solidFill>
+                <a:latin typeface="Calibri"/>
+              </a:rPr>
+              <a:t>85 % des suggestions de la liste 1 sont justes, contre 53 % pour TermSuite.</a:t>
+            </a:r>
+          </a:p>
+        </p:txBody>
+      </p:sp>
+      <p:sp>
+        <p:nvSpPr>
+          <p:cNvPr id="15" name="Puce 2"/>
           <p:cNvSpPr/>
           <p:nvPr/>
         </p:nvSpPr>
         <p:spPr>
           <a:xfrm>
-            <a:off x="4325112" y="2506980"/>
-            <a:ext cx="3456432" cy="1516380"/>
-          </a:xfrm>
-          <a:prstGeom prst="rect">
+            <a:off x="7754112" y="3886200"/>
+            <a:ext cx="329184" cy="329184"/>
+          </a:xfrm>
+          <a:prstGeom prst="ellipse">
             <a:avLst/>
           </a:prstGeom>
           <a:solidFill>
-            <a:srgbClr val="FBFBF8"/>
+            <a:srgbClr val="52605F"/>
           </a:solidFill>
-          <a:ln w="9525">
-            <a:solidFill>
-              <a:srgbClr val="D9DDD4"/>
-            </a:solidFill>
+          <a:ln>
+            <a:noFill/>
           </a:ln>
           <a:effectLst/>
         </p:spPr>
@@ -14683,24 +15831,32 @@
           </a:fontRef>
         </p:style>
         <p:txBody>
-          <a:bodyPr rtlCol="0" anchor="ctr"/>
+          <a:bodyPr lIns="0" tIns="0" rIns="0" bIns="0" rtlCol="0" anchor="ctr"/>
           <a:lstStyle/>
           <a:p>
             <a:pPr algn="ctr"/>
-            <a:endParaRPr/>
-          </a:p>
-        </p:txBody>
-      </p:sp>
-      <p:sp>
-        <p:nvSpPr>
-          <p:cNvPr id="13" name="TextBox 12"/>
+            <a:r>
+              <a:rPr sz="1300" b="1">
+                <a:solidFill>
+                  <a:srgbClr val="FFFFFF"/>
+                </a:solidFill>
+                <a:latin typeface="Consolas"/>
+              </a:rPr>
+              <a:t>2</a:t>
+            </a:r>
+          </a:p>
+        </p:txBody>
+      </p:sp>
+      <p:sp>
+        <p:nvSpPr>
+          <p:cNvPr id="16" name="Point 2 titre"/>
           <p:cNvSpPr txBox="1"/>
           <p:nvPr/>
         </p:nvSpPr>
         <p:spPr>
           <a:xfrm>
-            <a:off x="4489704" y="2634996"/>
-            <a:ext cx="3127248" cy="274320"/>
+            <a:off x="8229600" y="3867912"/>
+            <a:ext cx="3127248" cy="292608"/>
           </a:xfrm>
           <a:prstGeom prst="rect">
             <a:avLst/>
@@ -14713,36 +15869,29 @@
           </a:bodyPr>
           <a:lstStyle/>
           <a:p>
-            <a:pPr algn="l">
-              <a:lnSpc>
-                <a:spcPct val="115000"/>
-              </a:lnSpc>
-              <a:spcAft>
-                <a:spcPts val="0"/>
-              </a:spcAft>
-            </a:pPr>
-            <a:r>
-              <a:rPr sz="1050" b="1" i="0" spc="80">
-                <a:solidFill>
-                  <a:srgbClr val="0E6B66"/>
-                </a:solidFill>
-                <a:latin typeface="Consolas"/>
-              </a:rPr>
-              <a:t>RAPPEL</a:t>
-            </a:r>
-          </a:p>
-        </p:txBody>
-      </p:sp>
-      <p:sp>
-        <p:nvSpPr>
-          <p:cNvPr id="14" name="TextBox 13"/>
+            <a:pPr algn="l"/>
+            <a:r>
+              <a:rPr sz="1550" b="1">
+                <a:solidFill>
+                  <a:srgbClr val="1B2429"/>
+                </a:solidFill>
+                <a:latin typeface="Cambria"/>
+              </a:rPr>
+              <a:t>TermSuite ratisse large</a:t>
+            </a:r>
+          </a:p>
+        </p:txBody>
+      </p:sp>
+      <p:sp>
+        <p:nvSpPr>
+          <p:cNvPr id="17" name="Point 2 texte"/>
           <p:cNvSpPr txBox="1"/>
           <p:nvPr/>
         </p:nvSpPr>
         <p:spPr>
           <a:xfrm>
-            <a:off x="4489704" y="2945892"/>
-            <a:ext cx="3127248" cy="457200"/>
+            <a:off x="8229600" y="4197096"/>
+            <a:ext cx="3127248" cy="548640"/>
           </a:xfrm>
           <a:prstGeom prst="rect">
             <a:avLst/>
@@ -14755,80 +15904,31 @@
           </a:bodyPr>
           <a:lstStyle/>
           <a:p>
-            <a:pPr algn="l">
-              <a:lnSpc>
-                <a:spcPct val="115000"/>
-              </a:lnSpc>
-              <a:spcAft>
-                <a:spcPts val="0"/>
-              </a:spcAft>
-            </a:pPr>
-            <a:r>
-              <a:rPr sz="2800" b="1" i="0">
-                <a:solidFill>
-                  <a:srgbClr val="0E6B66"/>
-                </a:solidFill>
-                <a:latin typeface="Consolas"/>
-              </a:rPr>
-              <a:t>0.454</a:t>
-            </a:r>
-          </a:p>
-        </p:txBody>
-      </p:sp>
-      <p:sp>
-        <p:nvSpPr>
-          <p:cNvPr id="15" name="TextBox 14"/>
-          <p:cNvSpPr txBox="1"/>
-          <p:nvPr/>
-        </p:nvSpPr>
-        <p:spPr>
-          <a:xfrm>
-            <a:off x="4489704" y="3403092"/>
-            <a:ext cx="3127248" cy="510540"/>
-          </a:xfrm>
-          <a:prstGeom prst="rect">
-            <a:avLst/>
-          </a:prstGeom>
-          <a:noFill/>
-        </p:spPr>
-        <p:txBody>
-          <a:bodyPr wrap="square" lIns="0" tIns="0" rIns="0" bIns="0" anchor="t">
-            <a:spAutoFit/>
-          </a:bodyPr>
-          <a:lstStyle/>
-          <a:p>
-            <a:pPr algn="l">
-              <a:lnSpc>
-                <a:spcPct val="120000"/>
-              </a:lnSpc>
-              <a:spcAft>
-                <a:spcPts val="0"/>
-              </a:spcAft>
-            </a:pPr>
-            <a:r>
-              <a:rPr sz="1150" b="0" i="0">
-                <a:solidFill>
-                  <a:srgbClr val="52605F"/>
-                </a:solidFill>
-                <a:latin typeface="Calibri"/>
-              </a:rPr>
-              <a:t>parmi les vrais termes du domaine, part retrouvée</a:t>
-            </a:r>
-          </a:p>
-        </p:txBody>
-      </p:sp>
-      <p:sp>
-        <p:nvSpPr>
-          <p:cNvPr id="16" name="Rectangle 15"/>
+            <a:pPr algn="l"/>
+            <a:r>
+              <a:rPr sz="1200" b="0">
+                <a:solidFill>
+                  <a:srgbClr val="52605F"/>
+                </a:solidFill>
+                <a:latin typeface="Calibri"/>
+              </a:rPr>
+              <a:t>Il retrouve plus de termes (rappel 0.30 contre 0.13), d'où un F1 plus haut.</a:t>
+            </a:r>
+          </a:p>
+        </p:txBody>
+      </p:sp>
+      <p:sp>
+        <p:nvSpPr>
+          <p:cNvPr id="18" name="Puce 3"/>
           <p:cNvSpPr/>
           <p:nvPr/>
         </p:nvSpPr>
         <p:spPr>
           <a:xfrm>
-            <a:off x="8010144" y="2468880"/>
-            <a:ext cx="3456432" cy="38100"/>
-          </a:xfrm>
-          <a:prstGeom prst="rect">
+            <a:off x="7754112" y="4873752"/>
+            <a:ext cx="329184" cy="329184"/>
+          </a:xfrm>
+          <a:prstGeom prst="ellipse">
             <a:avLst/>
           </a:prstGeom>
           <a:solidFill>
@@ -14854,71 +15954,32 @@
           </a:fontRef>
         </p:style>
         <p:txBody>
-          <a:bodyPr rtlCol="0" anchor="ctr"/>
+          <a:bodyPr lIns="0" tIns="0" rIns="0" bIns="0" rtlCol="0" anchor="ctr"/>
           <a:lstStyle/>
           <a:p>
             <a:pPr algn="ctr"/>
-            <a:endParaRPr/>
-          </a:p>
-        </p:txBody>
-      </p:sp>
-      <p:sp>
-        <p:nvSpPr>
-          <p:cNvPr id="17" name="Rectangle 16"/>
-          <p:cNvSpPr/>
-          <p:nvPr/>
-        </p:nvSpPr>
-        <p:spPr>
-          <a:xfrm>
-            <a:off x="8010144" y="2506980"/>
-            <a:ext cx="3456432" cy="1516380"/>
-          </a:xfrm>
-          <a:prstGeom prst="rect">
-            <a:avLst/>
-          </a:prstGeom>
-          <a:solidFill>
-            <a:srgbClr val="FBFBF8"/>
-          </a:solidFill>
-          <a:ln w="9525">
-            <a:solidFill>
-              <a:srgbClr val="D9DDD4"/>
-            </a:solidFill>
-          </a:ln>
-          <a:effectLst/>
-        </p:spPr>
-        <p:style>
-          <a:lnRef idx="1">
-            <a:schemeClr val="accent1"/>
-          </a:lnRef>
-          <a:fillRef idx="3">
-            <a:schemeClr val="accent1"/>
-          </a:fillRef>
-          <a:effectRef idx="2">
-            <a:schemeClr val="accent1"/>
-          </a:effectRef>
-          <a:fontRef idx="minor">
-            <a:schemeClr val="lt1"/>
-          </a:fontRef>
-        </p:style>
-        <p:txBody>
-          <a:bodyPr rtlCol="0" anchor="ctr"/>
-          <a:lstStyle/>
-          <a:p>
-            <a:pPr algn="ctr"/>
-            <a:endParaRPr/>
-          </a:p>
-        </p:txBody>
-      </p:sp>
-      <p:sp>
-        <p:nvSpPr>
-          <p:cNvPr id="18" name="TextBox 17"/>
+            <a:r>
+              <a:rPr sz="1300" b="1">
+                <a:solidFill>
+                  <a:srgbClr val="FFFFFF"/>
+                </a:solidFill>
+                <a:latin typeface="Consolas"/>
+              </a:rPr>
+              <a:t>3</a:t>
+            </a:r>
+          </a:p>
+        </p:txBody>
+      </p:sp>
+      <p:sp>
+        <p:nvSpPr>
+          <p:cNvPr id="19" name="Point 3 titre"/>
           <p:cNvSpPr txBox="1"/>
           <p:nvPr/>
         </p:nvSpPr>
         <p:spPr>
           <a:xfrm>
-            <a:off x="8174736" y="2634996"/>
-            <a:ext cx="3127248" cy="274320"/>
+            <a:off x="8229600" y="4855464"/>
+            <a:ext cx="3127248" cy="292608"/>
           </a:xfrm>
           <a:prstGeom prst="rect">
             <a:avLst/>
@@ -14931,36 +15992,29 @@
           </a:bodyPr>
           <a:lstStyle/>
           <a:p>
-            <a:pPr algn="l">
-              <a:lnSpc>
-                <a:spcPct val="115000"/>
-              </a:lnSpc>
-              <a:spcAft>
-                <a:spcPts val="0"/>
-              </a:spcAft>
-            </a:pPr>
-            <a:r>
-              <a:rPr sz="1050" b="1" i="0" spc="80">
-                <a:solidFill>
-                  <a:srgbClr val="0E6B66"/>
-                </a:solidFill>
-                <a:latin typeface="Consolas"/>
-              </a:rPr>
-              <a:t>F1</a:t>
-            </a:r>
-          </a:p>
-        </p:txBody>
-      </p:sp>
-      <p:sp>
-        <p:nvSpPr>
-          <p:cNvPr id="19" name="TextBox 18"/>
+            <a:pPr algn="l"/>
+            <a:r>
+              <a:rPr sz="1550" b="1">
+                <a:solidFill>
+                  <a:srgbClr val="1B2429"/>
+                </a:solidFill>
+                <a:latin typeface="Cambria"/>
+              </a:rPr>
+              <a:t>Le curateur gagne avec embed</a:t>
+            </a:r>
+          </a:p>
+        </p:txBody>
+      </p:sp>
+      <p:sp>
+        <p:nvSpPr>
+          <p:cNvPr id="20" name="Point 3 texte"/>
           <p:cNvSpPr txBox="1"/>
           <p:nvPr/>
         </p:nvSpPr>
         <p:spPr>
           <a:xfrm>
-            <a:off x="8174736" y="2945892"/>
-            <a:ext cx="3127248" cy="457200"/>
+            <a:off x="8229600" y="5184648"/>
+            <a:ext cx="3127248" cy="548640"/>
           </a:xfrm>
           <a:prstGeom prst="rect">
             <a:avLst/>
@@ -14973,36 +16027,29 @@
           </a:bodyPr>
           <a:lstStyle/>
           <a:p>
-            <a:pPr algn="l">
-              <a:lnSpc>
-                <a:spcPct val="115000"/>
-              </a:lnSpc>
-              <a:spcAft>
-                <a:spcPts val="0"/>
-              </a:spcAft>
-            </a:pPr>
-            <a:r>
-              <a:rPr sz="2800" b="1" i="0">
-                <a:solidFill>
-                  <a:srgbClr val="0E6B66"/>
-                </a:solidFill>
-                <a:latin typeface="Consolas"/>
-              </a:rPr>
-              <a:t>0.498</a:t>
-            </a:r>
-          </a:p>
-        </p:txBody>
-      </p:sp>
-      <p:sp>
-        <p:nvSpPr>
-          <p:cNvPr id="20" name="TextBox 19"/>
+            <a:pPr algn="l"/>
+            <a:r>
+              <a:rPr sz="1200" b="0">
+                <a:solidFill>
+                  <a:srgbClr val="52605F"/>
+                </a:solidFill>
+                <a:latin typeface="Calibri"/>
+              </a:rPr>
+              <a:t>Il valide chaque suggestion : peu de bruit compte plus que l'exhaustivité.</a:t>
+            </a:r>
+          </a:p>
+        </p:txBody>
+      </p:sp>
+      <p:sp>
+        <p:nvSpPr>
+          <p:cNvPr id="21" name="Note de méthode"/>
           <p:cNvSpPr txBox="1"/>
           <p:nvPr/>
         </p:nvSpPr>
         <p:spPr>
           <a:xfrm>
-            <a:off x="8174736" y="3403092"/>
-            <a:ext cx="3127248" cy="510540"/>
+            <a:off x="640080" y="6144768"/>
+            <a:ext cx="10058400" cy="457200"/>
           </a:xfrm>
           <a:prstGeom prst="rect">
             <a:avLst/>
@@ -15015,553 +16062,15 @@
           </a:bodyPr>
           <a:lstStyle/>
           <a:p>
-            <a:pPr algn="l">
-              <a:lnSpc>
-                <a:spcPct val="120000"/>
-              </a:lnSpc>
-              <a:spcAft>
-                <a:spcPts val="0"/>
-              </a:spcAft>
-            </a:pPr>
-            <a:r>
-              <a:rPr sz="1150" b="0" i="0">
-                <a:solidFill>
-                  <a:srgbClr val="52605F"/>
-                </a:solidFill>
-                <a:latin typeface="Calibri"/>
-              </a:rPr>
-              <a:t>équilibre précision/rappel — notre chiffre de référence</a:t>
-            </a:r>
-          </a:p>
-        </p:txBody>
-      </p:sp>
-      <p:sp>
-        <p:nvSpPr>
-          <p:cNvPr id="21" name="TextBox 20"/>
-          <p:cNvSpPr txBox="1"/>
-          <p:nvPr/>
-        </p:nvSpPr>
-        <p:spPr>
-          <a:xfrm>
-            <a:off x="640080" y="4343400"/>
-            <a:ext cx="7315200" cy="274320"/>
-          </a:xfrm>
-          <a:prstGeom prst="rect">
-            <a:avLst/>
-          </a:prstGeom>
-          <a:noFill/>
-        </p:spPr>
-        <p:txBody>
-          <a:bodyPr wrap="square" lIns="0" tIns="0" rIns="0" bIns="0" anchor="t">
-            <a:spAutoFit/>
-          </a:bodyPr>
-          <a:lstStyle/>
-          <a:p>
-            <a:pPr algn="l">
-              <a:lnSpc>
-                <a:spcPct val="115000"/>
-              </a:lnSpc>
-              <a:spcAft>
-                <a:spcPts val="0"/>
-              </a:spcAft>
-            </a:pPr>
-            <a:r>
-              <a:rPr sz="1250" b="1" i="0">
-                <a:solidFill>
-                  <a:srgbClr val="52605F"/>
-                </a:solidFill>
-                <a:latin typeface="Calibri"/>
-              </a:rPr>
-              <a:t>Où se situe notre F1 face à la référence GPU (D-Terminer)</a:t>
-            </a:r>
-          </a:p>
-        </p:txBody>
-      </p:sp>
-      <p:sp>
-        <p:nvSpPr>
-          <p:cNvPr id="22" name="Rectangle 21"/>
-          <p:cNvSpPr/>
-          <p:nvPr/>
-        </p:nvSpPr>
-        <p:spPr>
-          <a:xfrm>
-            <a:off x="640080" y="4709160"/>
-            <a:ext cx="6949440" cy="365760"/>
-          </a:xfrm>
-          <a:prstGeom prst="rect">
-            <a:avLst/>
-          </a:prstGeom>
-          <a:solidFill>
-            <a:srgbClr val="D9DDD4"/>
-          </a:solidFill>
-          <a:ln>
-            <a:noFill/>
-          </a:ln>
-          <a:effectLst/>
-        </p:spPr>
-        <p:style>
-          <a:lnRef idx="1">
-            <a:schemeClr val="accent1"/>
-          </a:lnRef>
-          <a:fillRef idx="3">
-            <a:schemeClr val="accent1"/>
-          </a:fillRef>
-          <a:effectRef idx="2">
-            <a:schemeClr val="accent1"/>
-          </a:effectRef>
-          <a:fontRef idx="minor">
-            <a:schemeClr val="lt1"/>
-          </a:fontRef>
-        </p:style>
-        <p:txBody>
-          <a:bodyPr rtlCol="0" anchor="ctr"/>
-          <a:lstStyle/>
-          <a:p>
-            <a:pPr algn="ctr"/>
-            <a:endParaRPr/>
-          </a:p>
-        </p:txBody>
-      </p:sp>
-      <p:sp>
-        <p:nvSpPr>
-          <p:cNvPr id="23" name="Rectangle 22"/>
-          <p:cNvSpPr/>
-          <p:nvPr/>
-        </p:nvSpPr>
-        <p:spPr>
-          <a:xfrm>
-            <a:off x="2863900" y="4709160"/>
-            <a:ext cx="1250899" cy="365760"/>
-          </a:xfrm>
-          <a:prstGeom prst="rect">
-            <a:avLst/>
-          </a:prstGeom>
-          <a:solidFill>
-            <a:srgbClr val="A8752A"/>
-          </a:solidFill>
-          <a:ln>
-            <a:noFill/>
-          </a:ln>
-          <a:effectLst/>
-        </p:spPr>
-        <p:style>
-          <a:lnRef idx="1">
-            <a:schemeClr val="accent1"/>
-          </a:lnRef>
-          <a:fillRef idx="3">
-            <a:schemeClr val="accent1"/>
-          </a:fillRef>
-          <a:effectRef idx="2">
-            <a:schemeClr val="accent1"/>
-          </a:effectRef>
-          <a:fontRef idx="minor">
-            <a:schemeClr val="lt1"/>
-          </a:fontRef>
-        </p:style>
-        <p:txBody>
-          <a:bodyPr rtlCol="0" anchor="ctr"/>
-          <a:lstStyle/>
-          <a:p>
-            <a:pPr algn="ctr"/>
-            <a:endParaRPr/>
-          </a:p>
-        </p:txBody>
-      </p:sp>
-      <p:sp>
-        <p:nvSpPr>
-          <p:cNvPr id="24" name="TextBox 23"/>
-          <p:cNvSpPr txBox="1"/>
-          <p:nvPr/>
-        </p:nvSpPr>
-        <p:spPr>
-          <a:xfrm>
-            <a:off x="2422744" y="5129784"/>
-            <a:ext cx="1250899" cy="256032"/>
-          </a:xfrm>
-          <a:prstGeom prst="rect">
-            <a:avLst/>
-          </a:prstGeom>
-          <a:noFill/>
-        </p:spPr>
-        <p:txBody>
-          <a:bodyPr wrap="square" lIns="0" tIns="0" rIns="0" bIns="0" anchor="t">
-            <a:spAutoFit/>
-          </a:bodyPr>
-          <a:lstStyle/>
-          <a:p>
-            <a:pPr algn="ctr">
-              <a:lnSpc>
-                <a:spcPct val="115000"/>
-              </a:lnSpc>
-              <a:spcAft>
-                <a:spcPts val="0"/>
-              </a:spcAft>
-            </a:pPr>
-            <a:r>
-              <a:rPr sz="1050" b="1" i="0" dirty="0">
-                <a:solidFill>
-                  <a:srgbClr val="A8752A"/>
-                </a:solidFill>
-                <a:latin typeface="Consolas"/>
-              </a:rPr>
-              <a:t>D-</a:t>
-            </a:r>
-            <a:r>
-              <a:rPr sz="1050" b="1" i="0" dirty="0" err="1">
-                <a:solidFill>
-                  <a:srgbClr val="A8752A"/>
-                </a:solidFill>
-                <a:latin typeface="Consolas"/>
-              </a:rPr>
-              <a:t>Terminer</a:t>
-            </a:r>
-            <a:r>
-              <a:rPr sz="1050" b="1" i="0" dirty="0">
-                <a:solidFill>
-                  <a:srgbClr val="A8752A"/>
-                </a:solidFill>
-                <a:latin typeface="Consolas"/>
-              </a:rPr>
-              <a:t>  0.32–0.50</a:t>
-            </a:r>
-          </a:p>
-        </p:txBody>
-      </p:sp>
-      <p:sp>
-        <p:nvSpPr>
-          <p:cNvPr id="25" name="Rectangle 24"/>
-          <p:cNvSpPr/>
-          <p:nvPr/>
-        </p:nvSpPr>
-        <p:spPr>
-          <a:xfrm>
-            <a:off x="4088201" y="4636008"/>
-            <a:ext cx="25400" cy="512064"/>
-          </a:xfrm>
-          <a:prstGeom prst="rect">
-            <a:avLst/>
-          </a:prstGeom>
-          <a:solidFill>
-            <a:srgbClr val="0E6B66"/>
-          </a:solidFill>
-          <a:ln>
-            <a:noFill/>
-          </a:ln>
-          <a:effectLst/>
-        </p:spPr>
-        <p:style>
-          <a:lnRef idx="1">
-            <a:schemeClr val="accent1"/>
-          </a:lnRef>
-          <a:fillRef idx="3">
-            <a:schemeClr val="accent1"/>
-          </a:fillRef>
-          <a:effectRef idx="2">
-            <a:schemeClr val="accent1"/>
-          </a:effectRef>
-          <a:fontRef idx="minor">
-            <a:schemeClr val="lt1"/>
-          </a:fontRef>
-        </p:style>
-        <p:txBody>
-          <a:bodyPr rtlCol="0" anchor="ctr"/>
-          <a:lstStyle/>
-          <a:p>
-            <a:pPr algn="ctr"/>
-            <a:endParaRPr/>
-          </a:p>
-        </p:txBody>
-      </p:sp>
-      <p:sp>
-        <p:nvSpPr>
-          <p:cNvPr id="26" name="TextBox 25"/>
-          <p:cNvSpPr txBox="1"/>
-          <p:nvPr/>
-        </p:nvSpPr>
-        <p:spPr>
-          <a:xfrm>
-            <a:off x="3597981" y="5129784"/>
-            <a:ext cx="1005840" cy="256032"/>
-          </a:xfrm>
-          <a:prstGeom prst="rect">
-            <a:avLst/>
-          </a:prstGeom>
-          <a:noFill/>
-        </p:spPr>
-        <p:txBody>
-          <a:bodyPr wrap="square" lIns="0" tIns="0" rIns="0" bIns="0" anchor="t">
-            <a:spAutoFit/>
-          </a:bodyPr>
-          <a:lstStyle/>
-          <a:p>
-            <a:pPr algn="ctr">
-              <a:lnSpc>
-                <a:spcPct val="115000"/>
-              </a:lnSpc>
-              <a:spcAft>
-                <a:spcPts val="0"/>
-              </a:spcAft>
-            </a:pPr>
-            <a:r>
-              <a:rPr sz="1050" b="1" i="0">
-                <a:solidFill>
-                  <a:srgbClr val="0E6B66"/>
-                </a:solidFill>
-                <a:latin typeface="Consolas"/>
-              </a:rPr>
-              <a:t>notre F1  0.498</a:t>
-            </a:r>
-          </a:p>
-        </p:txBody>
-      </p:sp>
-      <p:sp>
-        <p:nvSpPr>
-          <p:cNvPr id="27" name="TextBox 26"/>
-          <p:cNvSpPr txBox="1"/>
-          <p:nvPr/>
-        </p:nvSpPr>
-        <p:spPr>
-          <a:xfrm>
-            <a:off x="365760" y="5486400"/>
-            <a:ext cx="548640" cy="274320"/>
-          </a:xfrm>
-          <a:prstGeom prst="rect">
-            <a:avLst/>
-          </a:prstGeom>
-          <a:noFill/>
-        </p:spPr>
-        <p:txBody>
-          <a:bodyPr wrap="square" lIns="0" tIns="0" rIns="0" bIns="0" anchor="t">
-            <a:spAutoFit/>
-          </a:bodyPr>
-          <a:lstStyle/>
-          <a:p>
-            <a:pPr algn="ctr">
-              <a:lnSpc>
-                <a:spcPct val="115000"/>
-              </a:lnSpc>
-              <a:spcAft>
-                <a:spcPts val="0"/>
-              </a:spcAft>
-            </a:pPr>
-            <a:r>
-              <a:rPr sz="1050" b="0" i="0">
+            <a:pPr algn="l"/>
+            <a:r>
+              <a:rPr sz="1050" b="0">
                 <a:solidFill>
                   <a:srgbClr val="7C8886"/>
                 </a:solidFill>
-                <a:latin typeface="Consolas"/>
-              </a:rPr>
-              <a:t>0.0</a:t>
-            </a:r>
-          </a:p>
-        </p:txBody>
-      </p:sp>
-      <p:sp>
-        <p:nvSpPr>
-          <p:cNvPr id="28" name="TextBox 27"/>
-          <p:cNvSpPr txBox="1"/>
-          <p:nvPr/>
-        </p:nvSpPr>
-        <p:spPr>
-          <a:xfrm>
-            <a:off x="2103120" y="5486400"/>
-            <a:ext cx="548640" cy="274320"/>
-          </a:xfrm>
-          <a:prstGeom prst="rect">
-            <a:avLst/>
-          </a:prstGeom>
-          <a:noFill/>
-        </p:spPr>
-        <p:txBody>
-          <a:bodyPr wrap="square" lIns="0" tIns="0" rIns="0" bIns="0" anchor="t">
-            <a:spAutoFit/>
-          </a:bodyPr>
-          <a:lstStyle/>
-          <a:p>
-            <a:pPr algn="ctr">
-              <a:lnSpc>
-                <a:spcPct val="115000"/>
-              </a:lnSpc>
-              <a:spcAft>
-                <a:spcPts val="0"/>
-              </a:spcAft>
-            </a:pPr>
-            <a:r>
-              <a:rPr sz="1050" b="0" i="0">
-                <a:solidFill>
-                  <a:srgbClr val="7C8886"/>
-                </a:solidFill>
-                <a:latin typeface="Consolas"/>
-              </a:rPr>
-              <a:t>0.25</a:t>
-            </a:r>
-          </a:p>
-        </p:txBody>
-      </p:sp>
-      <p:sp>
-        <p:nvSpPr>
-          <p:cNvPr id="29" name="TextBox 28"/>
-          <p:cNvSpPr txBox="1"/>
-          <p:nvPr/>
-        </p:nvSpPr>
-        <p:spPr>
-          <a:xfrm>
-            <a:off x="3840480" y="5486400"/>
-            <a:ext cx="548640" cy="274320"/>
-          </a:xfrm>
-          <a:prstGeom prst="rect">
-            <a:avLst/>
-          </a:prstGeom>
-          <a:noFill/>
-        </p:spPr>
-        <p:txBody>
-          <a:bodyPr wrap="square" lIns="0" tIns="0" rIns="0" bIns="0" anchor="t">
-            <a:spAutoFit/>
-          </a:bodyPr>
-          <a:lstStyle/>
-          <a:p>
-            <a:pPr algn="ctr">
-              <a:lnSpc>
-                <a:spcPct val="115000"/>
-              </a:lnSpc>
-              <a:spcAft>
-                <a:spcPts val="0"/>
-              </a:spcAft>
-            </a:pPr>
-            <a:r>
-              <a:rPr sz="1050" b="0" i="0">
-                <a:solidFill>
-                  <a:srgbClr val="7C8886"/>
-                </a:solidFill>
-                <a:latin typeface="Consolas"/>
-              </a:rPr>
-              <a:t>0.5</a:t>
-            </a:r>
-          </a:p>
-        </p:txBody>
-      </p:sp>
-      <p:sp>
-        <p:nvSpPr>
-          <p:cNvPr id="30" name="TextBox 29"/>
-          <p:cNvSpPr txBox="1"/>
-          <p:nvPr/>
-        </p:nvSpPr>
-        <p:spPr>
-          <a:xfrm>
-            <a:off x="5577840" y="5486400"/>
-            <a:ext cx="548640" cy="274320"/>
-          </a:xfrm>
-          <a:prstGeom prst="rect">
-            <a:avLst/>
-          </a:prstGeom>
-          <a:noFill/>
-        </p:spPr>
-        <p:txBody>
-          <a:bodyPr wrap="square" lIns="0" tIns="0" rIns="0" bIns="0" anchor="t">
-            <a:spAutoFit/>
-          </a:bodyPr>
-          <a:lstStyle/>
-          <a:p>
-            <a:pPr algn="ctr">
-              <a:lnSpc>
-                <a:spcPct val="115000"/>
-              </a:lnSpc>
-              <a:spcAft>
-                <a:spcPts val="0"/>
-              </a:spcAft>
-            </a:pPr>
-            <a:r>
-              <a:rPr sz="1050" b="0" i="0">
-                <a:solidFill>
-                  <a:srgbClr val="7C8886"/>
-                </a:solidFill>
-                <a:latin typeface="Consolas"/>
-              </a:rPr>
-              <a:t>0.75</a:t>
-            </a:r>
-          </a:p>
-        </p:txBody>
-      </p:sp>
-      <p:sp>
-        <p:nvSpPr>
-          <p:cNvPr id="31" name="TextBox 30"/>
-          <p:cNvSpPr txBox="1"/>
-          <p:nvPr/>
-        </p:nvSpPr>
-        <p:spPr>
-          <a:xfrm>
-            <a:off x="7315200" y="5486400"/>
-            <a:ext cx="548640" cy="274320"/>
-          </a:xfrm>
-          <a:prstGeom prst="rect">
-            <a:avLst/>
-          </a:prstGeom>
-          <a:noFill/>
-        </p:spPr>
-        <p:txBody>
-          <a:bodyPr wrap="square" lIns="0" tIns="0" rIns="0" bIns="0" anchor="t">
-            <a:spAutoFit/>
-          </a:bodyPr>
-          <a:lstStyle/>
-          <a:p>
-            <a:pPr algn="ctr">
-              <a:lnSpc>
-                <a:spcPct val="115000"/>
-              </a:lnSpc>
-              <a:spcAft>
-                <a:spcPts val="0"/>
-              </a:spcAft>
-            </a:pPr>
-            <a:r>
-              <a:rPr sz="1050" b="0" i="0">
-                <a:solidFill>
-                  <a:srgbClr val="7C8886"/>
-                </a:solidFill>
-                <a:latin typeface="Consolas"/>
-              </a:rPr>
-              <a:t>1.0</a:t>
-            </a:r>
-          </a:p>
-        </p:txBody>
-      </p:sp>
-      <p:sp>
-        <p:nvSpPr>
-          <p:cNvPr id="32" name="TextBox 31"/>
-          <p:cNvSpPr txBox="1"/>
-          <p:nvPr/>
-        </p:nvSpPr>
-        <p:spPr>
-          <a:xfrm>
-            <a:off x="11002975" y="6355080"/>
-            <a:ext cx="914400" cy="320040"/>
-          </a:xfrm>
-          <a:prstGeom prst="rect">
-            <a:avLst/>
-          </a:prstGeom>
-          <a:noFill/>
-        </p:spPr>
-        <p:txBody>
-          <a:bodyPr wrap="square" lIns="0" tIns="0" rIns="0" bIns="0" anchor="t">
-            <a:spAutoFit/>
-          </a:bodyPr>
-          <a:lstStyle/>
-          <a:p>
-            <a:pPr algn="r">
-              <a:lnSpc>
-                <a:spcPct val="115000"/>
-              </a:lnSpc>
-              <a:spcAft>
-                <a:spcPts val="0"/>
-              </a:spcAft>
-            </a:pPr>
-            <a:r>
-              <a:rPr sz="1050" b="0" i="0">
-                <a:solidFill>
-                  <a:srgbClr val="7C8886"/>
-                </a:solidFill>
-                <a:latin typeface="Consolas"/>
-              </a:rPr>
-              <a:t>9 / 12</a:t>
+                <a:latin typeface="Calibri"/>
+              </a:rPr>
+              <a:t>Évaluation mot par mot (token-level) : la moitié des termes annotés sert de vocabulaire, l'autre est à retrouver. Sans vocabulaire : F1 0.57 pour TermSuite, 0.50 pour PositionRank.</a:t>
             </a:r>
           </a:p>
         </p:txBody>
@@ -15599,7 +16108,7 @@
         </p:nvSpPr>
         <p:spPr>
           <a:xfrm>
-            <a:off x="452511" y="205740"/>
+            <a:off x="457200" y="149665"/>
             <a:ext cx="5486400" cy="320040"/>
           </a:xfrm>
           <a:prstGeom prst="rect">
@@ -15622,13 +16131,13 @@
               </a:spcAft>
             </a:pPr>
             <a:r>
-              <a:rPr sz="1200" b="0" i="0" spc="140">
+              <a:rPr sz="1200" b="0" i="0" spc="140" dirty="0">
                 <a:solidFill>
                   <a:srgbClr val="7C8886"/>
                 </a:solidFill>
                 <a:latin typeface="Consolas"/>
               </a:rPr>
-              <a:t>SUITE</a:t>
+              <a:t>EXEMPLE RÉEL</a:t>
             </a:r>
           </a:p>
         </p:txBody>
@@ -15670,27 +16179,384 @@
                 </a:solidFill>
                 <a:latin typeface="Cambria"/>
               </a:rPr>
-              <a:t>Prochaines étapes</a:t>
-            </a:r>
-          </a:p>
-        </p:txBody>
-      </p:sp>
-      <p:sp>
-        <p:nvSpPr>
-          <p:cNvPr id="5" name="Rectangle 4"/>
+              <a:t>Passage à l'échelle : RevueESR</a:t>
+            </a:r>
+          </a:p>
+        </p:txBody>
+      </p:sp>
+      <p:sp>
+        <p:nvSpPr>
+          <p:cNvPr id="5" name="TextBox 4"/>
+          <p:cNvSpPr txBox="1"/>
+          <p:nvPr/>
+        </p:nvSpPr>
+        <p:spPr>
+          <a:xfrm>
+            <a:off x="640080" y="1600200"/>
+            <a:ext cx="8961120" cy="822960"/>
+          </a:xfrm>
+          <a:prstGeom prst="rect">
+            <a:avLst/>
+          </a:prstGeom>
+          <a:noFill/>
+        </p:spPr>
+        <p:txBody>
+          <a:bodyPr wrap="square" lIns="0" tIns="0" rIns="0" bIns="0" anchor="t">
+            <a:spAutoFit/>
+          </a:bodyPr>
+          <a:lstStyle/>
+          <a:p>
+            <a:pPr algn="l">
+              <a:lnSpc>
+                <a:spcPct val="125000"/>
+              </a:lnSpc>
+              <a:spcAft>
+                <a:spcPts val="0"/>
+              </a:spcAft>
+            </a:pPr>
+            <a:r>
+              <a:rPr sz="1500" b="0" i="0">
+                <a:solidFill>
+                  <a:srgbClr val="52605F"/>
+                </a:solidFill>
+                <a:latin typeface="Calibri"/>
+              </a:rPr>
+              <a:t>1 539 documents, 5 954 459 tokens, vocabulaire SEN (santé environnementale). Run complet en 28 min 39, sans incident.</a:t>
+            </a:r>
+          </a:p>
+        </p:txBody>
+      </p:sp>
+      <p:sp>
+        <p:nvSpPr>
+          <p:cNvPr id="6" name="TextBox 5"/>
+          <p:cNvSpPr txBox="1"/>
+          <p:nvPr/>
+        </p:nvSpPr>
+        <p:spPr>
+          <a:xfrm>
+            <a:off x="640080" y="2331720"/>
+            <a:ext cx="2377440" cy="381130"/>
+          </a:xfrm>
+          <a:prstGeom prst="rect">
+            <a:avLst/>
+          </a:prstGeom>
+          <a:noFill/>
+        </p:spPr>
+        <p:txBody>
+          <a:bodyPr wrap="square" lIns="0" tIns="0" rIns="0" bIns="0" anchor="t">
+            <a:spAutoFit/>
+          </a:bodyPr>
+          <a:lstStyle/>
+          <a:p>
+            <a:pPr algn="l">
+              <a:lnSpc>
+                <a:spcPct val="115000"/>
+              </a:lnSpc>
+              <a:spcAft>
+                <a:spcPts val="0"/>
+              </a:spcAft>
+            </a:pPr>
+            <a:r>
+              <a:rPr sz="2300" b="1" i="0" dirty="0">
+                <a:solidFill>
+                  <a:srgbClr val="1B2429"/>
+                </a:solidFill>
+                <a:latin typeface="Consolas"/>
+              </a:rPr>
+              <a:t>3</a:t>
+            </a:r>
+            <a:r>
+              <a:rPr lang="fr-FR" sz="2300" b="1" i="0" dirty="0">
+                <a:solidFill>
+                  <a:srgbClr val="1B2429"/>
+                </a:solidFill>
+                <a:latin typeface="Consolas"/>
+              </a:rPr>
+              <a:t>7 054</a:t>
+            </a:r>
+            <a:endParaRPr sz="2300" b="1" i="0" dirty="0">
+              <a:solidFill>
+                <a:srgbClr val="1B2429"/>
+              </a:solidFill>
+              <a:latin typeface="Consolas"/>
+            </a:endParaRPr>
+          </a:p>
+        </p:txBody>
+      </p:sp>
+      <p:sp>
+        <p:nvSpPr>
+          <p:cNvPr id="7" name="TextBox 6"/>
+          <p:cNvSpPr txBox="1"/>
+          <p:nvPr/>
+        </p:nvSpPr>
+        <p:spPr>
+          <a:xfrm>
+            <a:off x="640080" y="2743200"/>
+            <a:ext cx="2377440" cy="274320"/>
+          </a:xfrm>
+          <a:prstGeom prst="rect">
+            <a:avLst/>
+          </a:prstGeom>
+          <a:noFill/>
+        </p:spPr>
+        <p:txBody>
+          <a:bodyPr wrap="square" lIns="0" tIns="0" rIns="0" bIns="0" anchor="t">
+            <a:spAutoFit/>
+          </a:bodyPr>
+          <a:lstStyle/>
+          <a:p>
+            <a:pPr algn="l">
+              <a:lnSpc>
+                <a:spcPct val="115000"/>
+              </a:lnSpc>
+              <a:spcAft>
+                <a:spcPts val="0"/>
+              </a:spcAft>
+            </a:pPr>
+            <a:r>
+              <a:rPr sz="1150" b="0" i="0">
+                <a:solidFill>
+                  <a:srgbClr val="52605F"/>
+                </a:solidFill>
+                <a:latin typeface="Calibri"/>
+              </a:rPr>
+              <a:t>candidats extraits</a:t>
+            </a:r>
+          </a:p>
+        </p:txBody>
+      </p:sp>
+      <p:sp>
+        <p:nvSpPr>
+          <p:cNvPr id="8" name="TextBox 7"/>
+          <p:cNvSpPr txBox="1"/>
+          <p:nvPr/>
+        </p:nvSpPr>
+        <p:spPr>
+          <a:xfrm>
+            <a:off x="3291840" y="2331720"/>
+            <a:ext cx="2377440" cy="381130"/>
+          </a:xfrm>
+          <a:prstGeom prst="rect">
+            <a:avLst/>
+          </a:prstGeom>
+          <a:noFill/>
+        </p:spPr>
+        <p:txBody>
+          <a:bodyPr wrap="square" lIns="0" tIns="0" rIns="0" bIns="0" anchor="t">
+            <a:spAutoFit/>
+          </a:bodyPr>
+          <a:lstStyle/>
+          <a:p>
+            <a:pPr algn="l">
+              <a:lnSpc>
+                <a:spcPct val="115000"/>
+              </a:lnSpc>
+              <a:spcAft>
+                <a:spcPts val="0"/>
+              </a:spcAft>
+            </a:pPr>
+            <a:r>
+              <a:rPr sz="2300" b="1" i="0" dirty="0">
+                <a:solidFill>
+                  <a:srgbClr val="1B2429"/>
+                </a:solidFill>
+                <a:latin typeface="Consolas"/>
+              </a:rPr>
+              <a:t>2</a:t>
+            </a:r>
+            <a:r>
+              <a:rPr lang="fr-FR" sz="2300" b="1" dirty="0">
+                <a:solidFill>
+                  <a:srgbClr val="1B2429"/>
+                </a:solidFill>
+                <a:latin typeface="Consolas"/>
+              </a:rPr>
+              <a:t>50</a:t>
+            </a:r>
+            <a:endParaRPr sz="2300" b="1" i="0" dirty="0">
+              <a:solidFill>
+                <a:srgbClr val="1B2429"/>
+              </a:solidFill>
+              <a:latin typeface="Consolas"/>
+            </a:endParaRPr>
+          </a:p>
+        </p:txBody>
+      </p:sp>
+      <p:sp>
+        <p:nvSpPr>
+          <p:cNvPr id="9" name="TextBox 8"/>
+          <p:cNvSpPr txBox="1"/>
+          <p:nvPr/>
+        </p:nvSpPr>
+        <p:spPr>
+          <a:xfrm>
+            <a:off x="3291840" y="2743200"/>
+            <a:ext cx="2377440" cy="274320"/>
+          </a:xfrm>
+          <a:prstGeom prst="rect">
+            <a:avLst/>
+          </a:prstGeom>
+          <a:noFill/>
+        </p:spPr>
+        <p:txBody>
+          <a:bodyPr wrap="square" lIns="0" tIns="0" rIns="0" bIns="0" anchor="t">
+            <a:spAutoFit/>
+          </a:bodyPr>
+          <a:lstStyle/>
+          <a:p>
+            <a:pPr algn="l">
+              <a:lnSpc>
+                <a:spcPct val="115000"/>
+              </a:lnSpc>
+              <a:spcAft>
+                <a:spcPts val="0"/>
+              </a:spcAft>
+            </a:pPr>
+            <a:r>
+              <a:rPr sz="1150" b="0" i="0">
+                <a:solidFill>
+                  <a:srgbClr val="52605F"/>
+                </a:solidFill>
+                <a:latin typeface="Calibri"/>
+              </a:rPr>
+              <a:t>déjà dans le vocabulaire</a:t>
+            </a:r>
+          </a:p>
+        </p:txBody>
+      </p:sp>
+      <p:sp>
+        <p:nvSpPr>
+          <p:cNvPr id="10" name="TextBox 9"/>
+          <p:cNvSpPr txBox="1"/>
+          <p:nvPr/>
+        </p:nvSpPr>
+        <p:spPr>
+          <a:xfrm>
+            <a:off x="5943600" y="2331720"/>
+            <a:ext cx="2377440" cy="381130"/>
+          </a:xfrm>
+          <a:prstGeom prst="rect">
+            <a:avLst/>
+          </a:prstGeom>
+          <a:noFill/>
+        </p:spPr>
+        <p:txBody>
+          <a:bodyPr wrap="square" lIns="0" tIns="0" rIns="0" bIns="0" anchor="t">
+            <a:spAutoFit/>
+          </a:bodyPr>
+          <a:lstStyle/>
+          <a:p>
+            <a:pPr algn="l">
+              <a:lnSpc>
+                <a:spcPct val="115000"/>
+              </a:lnSpc>
+              <a:spcAft>
+                <a:spcPts val="0"/>
+              </a:spcAft>
+            </a:pPr>
+            <a:r>
+              <a:rPr sz="2300" b="1" i="0" dirty="0">
+                <a:solidFill>
+                  <a:srgbClr val="1B2429"/>
+                </a:solidFill>
+                <a:latin typeface="Consolas"/>
+              </a:rPr>
+              <a:t>3</a:t>
+            </a:r>
+            <a:r>
+              <a:rPr lang="fr-FR" sz="2300" b="1" dirty="0">
+                <a:solidFill>
+                  <a:srgbClr val="1B2429"/>
+                </a:solidFill>
+                <a:latin typeface="Consolas"/>
+              </a:rPr>
+              <a:t>7</a:t>
+            </a:r>
+            <a:r>
+              <a:rPr sz="2300" b="1" i="0" dirty="0">
+                <a:solidFill>
+                  <a:srgbClr val="1B2429"/>
+                </a:solidFill>
+                <a:latin typeface="Consolas"/>
+              </a:rPr>
+              <a:t> </a:t>
+            </a:r>
+            <a:r>
+              <a:rPr lang="fr-FR" sz="2300" b="1" dirty="0">
+                <a:solidFill>
+                  <a:srgbClr val="1B2429"/>
+                </a:solidFill>
+                <a:latin typeface="Consolas"/>
+              </a:rPr>
+              <a:t>004</a:t>
+            </a:r>
+            <a:endParaRPr sz="2300" b="1" i="0" dirty="0">
+              <a:solidFill>
+                <a:srgbClr val="1B2429"/>
+              </a:solidFill>
+              <a:latin typeface="Consolas"/>
+            </a:endParaRPr>
+          </a:p>
+        </p:txBody>
+      </p:sp>
+      <p:sp>
+        <p:nvSpPr>
+          <p:cNvPr id="11" name="TextBox 10"/>
+          <p:cNvSpPr txBox="1"/>
+          <p:nvPr/>
+        </p:nvSpPr>
+        <p:spPr>
+          <a:xfrm>
+            <a:off x="5943600" y="2743200"/>
+            <a:ext cx="2377440" cy="274320"/>
+          </a:xfrm>
+          <a:prstGeom prst="rect">
+            <a:avLst/>
+          </a:prstGeom>
+          <a:noFill/>
+        </p:spPr>
+        <p:txBody>
+          <a:bodyPr wrap="square" lIns="0" tIns="0" rIns="0" bIns="0" anchor="t">
+            <a:spAutoFit/>
+          </a:bodyPr>
+          <a:lstStyle/>
+          <a:p>
+            <a:pPr algn="l">
+              <a:lnSpc>
+                <a:spcPct val="115000"/>
+              </a:lnSpc>
+              <a:spcAft>
+                <a:spcPts val="0"/>
+              </a:spcAft>
+            </a:pPr>
+            <a:r>
+              <a:rPr sz="1150" b="0" i="0">
+                <a:solidFill>
+                  <a:srgbClr val="52605F"/>
+                </a:solidFill>
+                <a:latin typeface="Calibri"/>
+              </a:rPr>
+              <a:t>nouveaux à trier</a:t>
+            </a:r>
+          </a:p>
+        </p:txBody>
+      </p:sp>
+      <p:sp>
+        <p:nvSpPr>
+          <p:cNvPr id="12" name="Rectangle 11"/>
           <p:cNvSpPr/>
           <p:nvPr/>
         </p:nvSpPr>
         <p:spPr>
           <a:xfrm>
-            <a:off x="640080" y="2880360"/>
+            <a:off x="640080" y="3246120"/>
             <a:ext cx="3456432" cy="38100"/>
           </a:xfrm>
           <a:prstGeom prst="rect">
             <a:avLst/>
           </a:prstGeom>
           <a:solidFill>
-            <a:srgbClr val="52605F"/>
+            <a:srgbClr val="0E6B66"/>
           </a:solidFill>
           <a:ln>
             <a:noFill/>
@@ -15716,20 +16582,20 @@
           <a:lstStyle/>
           <a:p>
             <a:pPr algn="ctr"/>
-            <a:endParaRPr sz="2400"/>
-          </a:p>
-        </p:txBody>
-      </p:sp>
-      <p:sp>
-        <p:nvSpPr>
-          <p:cNvPr id="6" name="Rectangle 5"/>
+            <a:endParaRPr/>
+          </a:p>
+        </p:txBody>
+      </p:sp>
+      <p:sp>
+        <p:nvSpPr>
+          <p:cNvPr id="13" name="Rectangle 12"/>
           <p:cNvSpPr/>
           <p:nvPr/>
         </p:nvSpPr>
         <p:spPr>
           <a:xfrm>
-            <a:off x="640080" y="2918460"/>
-            <a:ext cx="3456432" cy="2065020"/>
+            <a:off x="640080" y="3284220"/>
+            <a:ext cx="3456432" cy="1562100"/>
           </a:xfrm>
           <a:prstGeom prst="rect">
             <a:avLst/>
@@ -15763,20 +16629,20 @@
           <a:lstStyle/>
           <a:p>
             <a:pPr algn="ctr"/>
-            <a:endParaRPr sz="2400"/>
-          </a:p>
-        </p:txBody>
-      </p:sp>
-      <p:sp>
-        <p:nvSpPr>
-          <p:cNvPr id="7" name="TextBox 6"/>
+            <a:endParaRPr/>
+          </a:p>
+        </p:txBody>
+      </p:sp>
+      <p:sp>
+        <p:nvSpPr>
+          <p:cNvPr id="14" name="TextBox 13"/>
           <p:cNvSpPr txBox="1"/>
           <p:nvPr/>
         </p:nvSpPr>
         <p:spPr>
           <a:xfrm>
-            <a:off x="804672" y="3046476"/>
-            <a:ext cx="3127248" cy="198837"/>
+            <a:off x="804672" y="3412236"/>
+            <a:ext cx="3127248" cy="274320"/>
           </a:xfrm>
           <a:prstGeom prst="rect">
             <a:avLst/>
@@ -15798,27 +16664,27 @@
               </a:spcAft>
             </a:pPr>
             <a:r>
-              <a:rPr sz="1200" b="1" i="0" spc="80">
-                <a:solidFill>
-                  <a:srgbClr val="52605F"/>
+              <a:rPr sz="1050" b="1" i="0" spc="80">
+                <a:solidFill>
+                  <a:srgbClr val="0E6B66"/>
                 </a:solidFill>
                 <a:latin typeface="Consolas"/>
               </a:rPr>
-              <a:t>RELEASE</a:t>
-            </a:r>
-          </a:p>
-        </p:txBody>
-      </p:sp>
-      <p:sp>
-        <p:nvSpPr>
-          <p:cNvPr id="8" name="TextBox 7"/>
+              <a:t>NIVEAU 1 · SÉMANTIQUE</a:t>
+            </a:r>
+          </a:p>
+        </p:txBody>
+      </p:sp>
+      <p:sp>
+        <p:nvSpPr>
+          <p:cNvPr id="15" name="TextBox 14"/>
           <p:cNvSpPr txBox="1"/>
           <p:nvPr/>
         </p:nvSpPr>
         <p:spPr>
           <a:xfrm>
-            <a:off x="804672" y="3357372"/>
-            <a:ext cx="3127248" cy="291426"/>
+            <a:off x="804672" y="3723132"/>
+            <a:ext cx="3127248" cy="463973"/>
           </a:xfrm>
           <a:prstGeom prst="rect">
             <a:avLst/>
@@ -15840,27 +16706,132 @@
               </a:spcAft>
             </a:pPr>
             <a:r>
-              <a:rPr b="1" i="0">
-                <a:solidFill>
-                  <a:srgbClr val="1B2429"/>
-                </a:solidFill>
-                <a:latin typeface="Cambria"/>
-              </a:rPr>
-              <a:t>Tag officiel</a:t>
-            </a:r>
-          </a:p>
-        </p:txBody>
-      </p:sp>
-      <p:sp>
-        <p:nvSpPr>
-          <p:cNvPr id="9" name="TextBox 8"/>
+              <a:rPr sz="2800" b="1" i="0" dirty="0">
+                <a:solidFill>
+                  <a:srgbClr val="0E6B66"/>
+                </a:solidFill>
+                <a:latin typeface="Consolas"/>
+              </a:rPr>
+              <a:t>1</a:t>
+            </a:r>
+            <a:r>
+              <a:rPr lang="fr-FR" sz="2800" b="1" i="0" dirty="0">
+                <a:solidFill>
+                  <a:srgbClr val="0E6B66"/>
+                </a:solidFill>
+                <a:latin typeface="Consolas"/>
+              </a:rPr>
+              <a:t>91</a:t>
+            </a:r>
+            <a:endParaRPr sz="2800" b="1" i="0" dirty="0">
+              <a:solidFill>
+                <a:srgbClr val="0E6B66"/>
+              </a:solidFill>
+              <a:latin typeface="Consolas"/>
+            </a:endParaRPr>
+          </a:p>
+        </p:txBody>
+      </p:sp>
+      <p:sp>
+        <p:nvSpPr>
+          <p:cNvPr id="16" name="Rectangle 15"/>
+          <p:cNvSpPr/>
+          <p:nvPr/>
+        </p:nvSpPr>
+        <p:spPr>
+          <a:xfrm>
+            <a:off x="804672" y="4180332"/>
+            <a:ext cx="3127248" cy="63500"/>
+          </a:xfrm>
+          <a:prstGeom prst="rect">
+            <a:avLst/>
+          </a:prstGeom>
+          <a:solidFill>
+            <a:srgbClr val="D9DDD4"/>
+          </a:solidFill>
+          <a:ln>
+            <a:noFill/>
+          </a:ln>
+          <a:effectLst/>
+        </p:spPr>
+        <p:style>
+          <a:lnRef idx="1">
+            <a:schemeClr val="accent1"/>
+          </a:lnRef>
+          <a:fillRef idx="3">
+            <a:schemeClr val="accent1"/>
+          </a:fillRef>
+          <a:effectRef idx="2">
+            <a:schemeClr val="accent1"/>
+          </a:effectRef>
+          <a:fontRef idx="minor">
+            <a:schemeClr val="lt1"/>
+          </a:fontRef>
+        </p:style>
+        <p:txBody>
+          <a:bodyPr rtlCol="0" anchor="ctr"/>
+          <a:lstStyle/>
+          <a:p>
+            <a:pPr algn="ctr"/>
+            <a:endParaRPr/>
+          </a:p>
+        </p:txBody>
+      </p:sp>
+      <p:sp>
+        <p:nvSpPr>
+          <p:cNvPr id="17" name="Rectangle 16"/>
+          <p:cNvSpPr/>
+          <p:nvPr/>
+        </p:nvSpPr>
+        <p:spPr>
+          <a:xfrm>
+            <a:off x="804672" y="4180332"/>
+            <a:ext cx="150107" cy="63500"/>
+          </a:xfrm>
+          <a:prstGeom prst="rect">
+            <a:avLst/>
+          </a:prstGeom>
+          <a:solidFill>
+            <a:srgbClr val="0E6B66"/>
+          </a:solidFill>
+          <a:ln>
+            <a:noFill/>
+          </a:ln>
+          <a:effectLst/>
+        </p:spPr>
+        <p:style>
+          <a:lnRef idx="1">
+            <a:schemeClr val="accent1"/>
+          </a:lnRef>
+          <a:fillRef idx="3">
+            <a:schemeClr val="accent1"/>
+          </a:fillRef>
+          <a:effectRef idx="2">
+            <a:schemeClr val="accent1"/>
+          </a:effectRef>
+          <a:fontRef idx="minor">
+            <a:schemeClr val="lt1"/>
+          </a:fontRef>
+        </p:style>
+        <p:txBody>
+          <a:bodyPr rtlCol="0" anchor="ctr"/>
+          <a:lstStyle/>
+          <a:p>
+            <a:pPr algn="ctr"/>
+            <a:endParaRPr/>
+          </a:p>
+        </p:txBody>
+      </p:sp>
+      <p:sp>
+        <p:nvSpPr>
+          <p:cNvPr id="18" name="TextBox 17"/>
           <p:cNvSpPr txBox="1"/>
           <p:nvPr/>
         </p:nvSpPr>
         <p:spPr>
           <a:xfrm>
-            <a:off x="804672" y="3723132"/>
-            <a:ext cx="3127248" cy="241285"/>
+            <a:off x="804672" y="4363212"/>
+            <a:ext cx="3127248" cy="373380"/>
           </a:xfrm>
           <a:prstGeom prst="rect">
             <a:avLst/>
@@ -15882,53 +16853,26 @@
               </a:spcAft>
             </a:pPr>
             <a:r>
-              <a:rPr sz="1400" b="0" i="0" dirty="0" err="1">
-                <a:solidFill>
-                  <a:srgbClr val="52605F"/>
-                </a:solidFill>
-                <a:latin typeface="Calibri"/>
-              </a:rPr>
-              <a:t>Finaliser</a:t>
-            </a:r>
-            <a:r>
-              <a:rPr sz="1400" b="0" i="0" dirty="0">
-                <a:solidFill>
-                  <a:srgbClr val="52605F"/>
-                </a:solidFill>
-                <a:latin typeface="Calibri"/>
-              </a:rPr>
-              <a:t> et </a:t>
-            </a:r>
-            <a:r>
-              <a:rPr sz="1400" b="0" i="0" dirty="0" err="1">
-                <a:solidFill>
-                  <a:srgbClr val="52605F"/>
-                </a:solidFill>
-                <a:latin typeface="Calibri"/>
-              </a:rPr>
-              <a:t>publier</a:t>
-            </a:r>
-            <a:r>
-              <a:rPr sz="1400" b="0" i="0" dirty="0">
-                <a:solidFill>
-                  <a:srgbClr val="52605F"/>
-                </a:solidFill>
-                <a:latin typeface="Calibri"/>
-              </a:rPr>
-              <a:t> la release 2.0.</a:t>
-            </a:r>
-          </a:p>
-        </p:txBody>
-      </p:sp>
-      <p:sp>
-        <p:nvSpPr>
-          <p:cNvPr id="10" name="Rectangle 9"/>
+              <a:rPr sz="1150" b="0" i="0">
+                <a:solidFill>
+                  <a:srgbClr val="52605F"/>
+                </a:solidFill>
+                <a:latin typeface="Calibri"/>
+              </a:rPr>
+              <a:t>candidats proches d'un terme déjà connu</a:t>
+            </a:r>
+          </a:p>
+        </p:txBody>
+      </p:sp>
+      <p:sp>
+        <p:nvSpPr>
+          <p:cNvPr id="19" name="Rectangle 18"/>
           <p:cNvSpPr/>
           <p:nvPr/>
         </p:nvSpPr>
         <p:spPr>
           <a:xfrm>
-            <a:off x="4325112" y="2880360"/>
+            <a:off x="4325112" y="3246120"/>
             <a:ext cx="3456432" cy="38100"/>
           </a:xfrm>
           <a:prstGeom prst="rect">
@@ -15961,20 +16905,20 @@
           <a:lstStyle/>
           <a:p>
             <a:pPr algn="ctr"/>
-            <a:endParaRPr sz="2400"/>
-          </a:p>
-        </p:txBody>
-      </p:sp>
-      <p:sp>
-        <p:nvSpPr>
-          <p:cNvPr id="11" name="Rectangle 10"/>
+            <a:endParaRPr/>
+          </a:p>
+        </p:txBody>
+      </p:sp>
+      <p:sp>
+        <p:nvSpPr>
+          <p:cNvPr id="20" name="Rectangle 19"/>
           <p:cNvSpPr/>
           <p:nvPr/>
         </p:nvSpPr>
         <p:spPr>
           <a:xfrm>
-            <a:off x="4325112" y="2918460"/>
-            <a:ext cx="3456432" cy="2065020"/>
+            <a:off x="4325112" y="3284220"/>
+            <a:ext cx="3456432" cy="1562100"/>
           </a:xfrm>
           <a:prstGeom prst="rect">
             <a:avLst/>
@@ -16008,20 +16952,20 @@
           <a:lstStyle/>
           <a:p>
             <a:pPr algn="ctr"/>
-            <a:endParaRPr sz="2400"/>
-          </a:p>
-        </p:txBody>
-      </p:sp>
-      <p:sp>
-        <p:nvSpPr>
-          <p:cNvPr id="12" name="TextBox 11"/>
+            <a:endParaRPr/>
+          </a:p>
+        </p:txBody>
+      </p:sp>
+      <p:sp>
+        <p:nvSpPr>
+          <p:cNvPr id="21" name="TextBox 20"/>
           <p:cNvSpPr txBox="1"/>
           <p:nvPr/>
         </p:nvSpPr>
         <p:spPr>
           <a:xfrm>
-            <a:off x="4489704" y="3046476"/>
-            <a:ext cx="3127248" cy="198837"/>
+            <a:off x="4489704" y="3412236"/>
+            <a:ext cx="3127248" cy="274320"/>
           </a:xfrm>
           <a:prstGeom prst="rect">
             <a:avLst/>
@@ -16043,27 +16987,27 @@
               </a:spcAft>
             </a:pPr>
             <a:r>
-              <a:rPr sz="1200" b="1" i="0" spc="80">
+              <a:rPr sz="1050" b="1" i="0" spc="80">
                 <a:solidFill>
                   <a:srgbClr val="A8752A"/>
                 </a:solidFill>
                 <a:latin typeface="Consolas"/>
               </a:rPr>
-              <a:t>PERFORMANCE</a:t>
-            </a:r>
-          </a:p>
-        </p:txBody>
-      </p:sp>
-      <p:sp>
-        <p:nvSpPr>
-          <p:cNvPr id="13" name="TextBox 12"/>
+              <a:t>NIVEAU 2 · STRUCTUREL</a:t>
+            </a:r>
+          </a:p>
+        </p:txBody>
+      </p:sp>
+      <p:sp>
+        <p:nvSpPr>
+          <p:cNvPr id="22" name="TextBox 21"/>
           <p:cNvSpPr txBox="1"/>
           <p:nvPr/>
         </p:nvSpPr>
         <p:spPr>
           <a:xfrm>
-            <a:off x="4489704" y="3357372"/>
-            <a:ext cx="3127248" cy="291426"/>
+            <a:off x="4489704" y="3723132"/>
+            <a:ext cx="3127248" cy="463973"/>
           </a:xfrm>
           <a:prstGeom prst="rect">
             <a:avLst/>
@@ -16085,27 +17029,123 @@
               </a:spcAft>
             </a:pPr>
             <a:r>
-              <a:rPr b="1" i="0">
-                <a:solidFill>
-                  <a:srgbClr val="1B2429"/>
-                </a:solidFill>
-                <a:latin typeface="Cambria"/>
-              </a:rPr>
-              <a:t>Gros corpus</a:t>
-            </a:r>
-          </a:p>
-        </p:txBody>
-      </p:sp>
-      <p:sp>
-        <p:nvSpPr>
-          <p:cNvPr id="14" name="TextBox 13"/>
+              <a:rPr lang="fr-FR" sz="2800" b="1" dirty="0">
+                <a:solidFill>
+                  <a:srgbClr val="A8752A"/>
+                </a:solidFill>
+                <a:latin typeface="Consolas"/>
+              </a:rPr>
+              <a:t>666</a:t>
+            </a:r>
+            <a:endParaRPr sz="2800" b="1" i="0" dirty="0">
+              <a:solidFill>
+                <a:srgbClr val="A8752A"/>
+              </a:solidFill>
+              <a:latin typeface="Consolas"/>
+            </a:endParaRPr>
+          </a:p>
+        </p:txBody>
+      </p:sp>
+      <p:sp>
+        <p:nvSpPr>
+          <p:cNvPr id="23" name="Rectangle 22"/>
+          <p:cNvSpPr/>
+          <p:nvPr/>
+        </p:nvSpPr>
+        <p:spPr>
+          <a:xfrm>
+            <a:off x="4489704" y="4180332"/>
+            <a:ext cx="3127248" cy="63500"/>
+          </a:xfrm>
+          <a:prstGeom prst="rect">
+            <a:avLst/>
+          </a:prstGeom>
+          <a:solidFill>
+            <a:srgbClr val="D9DDD4"/>
+          </a:solidFill>
+          <a:ln>
+            <a:noFill/>
+          </a:ln>
+          <a:effectLst/>
+        </p:spPr>
+        <p:style>
+          <a:lnRef idx="1">
+            <a:schemeClr val="accent1"/>
+          </a:lnRef>
+          <a:fillRef idx="3">
+            <a:schemeClr val="accent1"/>
+          </a:fillRef>
+          <a:effectRef idx="2">
+            <a:schemeClr val="accent1"/>
+          </a:effectRef>
+          <a:fontRef idx="minor">
+            <a:schemeClr val="lt1"/>
+          </a:fontRef>
+        </p:style>
+        <p:txBody>
+          <a:bodyPr rtlCol="0" anchor="ctr"/>
+          <a:lstStyle/>
+          <a:p>
+            <a:pPr algn="ctr"/>
+            <a:endParaRPr/>
+          </a:p>
+        </p:txBody>
+      </p:sp>
+      <p:sp>
+        <p:nvSpPr>
+          <p:cNvPr id="24" name="Rectangle 23"/>
+          <p:cNvSpPr/>
+          <p:nvPr/>
+        </p:nvSpPr>
+        <p:spPr>
+          <a:xfrm>
+            <a:off x="4489704" y="4180332"/>
+            <a:ext cx="597304" cy="63500"/>
+          </a:xfrm>
+          <a:prstGeom prst="rect">
+            <a:avLst/>
+          </a:prstGeom>
+          <a:solidFill>
+            <a:srgbClr val="A8752A"/>
+          </a:solidFill>
+          <a:ln>
+            <a:noFill/>
+          </a:ln>
+          <a:effectLst/>
+        </p:spPr>
+        <p:style>
+          <a:lnRef idx="1">
+            <a:schemeClr val="accent1"/>
+          </a:lnRef>
+          <a:fillRef idx="3">
+            <a:schemeClr val="accent1"/>
+          </a:fillRef>
+          <a:effectRef idx="2">
+            <a:schemeClr val="accent1"/>
+          </a:effectRef>
+          <a:fontRef idx="minor">
+            <a:schemeClr val="lt1"/>
+          </a:fontRef>
+        </p:style>
+        <p:txBody>
+          <a:bodyPr rtlCol="0" anchor="ctr"/>
+          <a:lstStyle/>
+          <a:p>
+            <a:pPr algn="ctr"/>
+            <a:endParaRPr/>
+          </a:p>
+        </p:txBody>
+      </p:sp>
+      <p:sp>
+        <p:nvSpPr>
+          <p:cNvPr id="25" name="TextBox 24"/>
           <p:cNvSpPr txBox="1"/>
           <p:nvPr/>
         </p:nvSpPr>
         <p:spPr>
           <a:xfrm>
-            <a:off x="4489704" y="3723132"/>
-            <a:ext cx="3127248" cy="499817"/>
+            <a:off x="4489704" y="4363212"/>
+            <a:ext cx="3127248" cy="373380"/>
           </a:xfrm>
           <a:prstGeom prst="rect">
             <a:avLst/>
@@ -16127,33 +17167,33 @@
               </a:spcAft>
             </a:pPr>
             <a:r>
-              <a:rPr sz="1400" b="0" i="0">
-                <a:solidFill>
-                  <a:srgbClr val="52605F"/>
-                </a:solidFill>
-                <a:latin typeface="Calibri"/>
-              </a:rPr>
-              <a:t>Fiabiliser la détection de variantes sur les très gros volumes.</a:t>
-            </a:r>
-          </a:p>
-        </p:txBody>
-      </p:sp>
-      <p:sp>
-        <p:nvSpPr>
-          <p:cNvPr id="15" name="Rectangle 14"/>
+              <a:rPr sz="1150" b="0" i="0">
+                <a:solidFill>
+                  <a:srgbClr val="52605F"/>
+                </a:solidFill>
+                <a:latin typeface="Calibri"/>
+              </a:rPr>
+              <a:t>profil de terme important dans le texte</a:t>
+            </a:r>
+          </a:p>
+        </p:txBody>
+      </p:sp>
+      <p:sp>
+        <p:nvSpPr>
+          <p:cNvPr id="26" name="Rectangle 25"/>
           <p:cNvSpPr/>
           <p:nvPr/>
         </p:nvSpPr>
         <p:spPr>
           <a:xfrm>
-            <a:off x="8010144" y="2880360"/>
+            <a:off x="8010144" y="3246120"/>
             <a:ext cx="3456432" cy="38100"/>
           </a:xfrm>
           <a:prstGeom prst="rect">
             <a:avLst/>
           </a:prstGeom>
           <a:solidFill>
-            <a:srgbClr val="0E6B66"/>
+            <a:srgbClr val="6E5A8C"/>
           </a:solidFill>
           <a:ln>
             <a:noFill/>
@@ -16179,20 +17219,20 @@
           <a:lstStyle/>
           <a:p>
             <a:pPr algn="ctr"/>
-            <a:endParaRPr sz="2400"/>
-          </a:p>
-        </p:txBody>
-      </p:sp>
-      <p:sp>
-        <p:nvSpPr>
-          <p:cNvPr id="16" name="Rectangle 15"/>
+            <a:endParaRPr/>
+          </a:p>
+        </p:txBody>
+      </p:sp>
+      <p:sp>
+        <p:nvSpPr>
+          <p:cNvPr id="27" name="Rectangle 26"/>
           <p:cNvSpPr/>
           <p:nvPr/>
         </p:nvSpPr>
         <p:spPr>
           <a:xfrm>
-            <a:off x="8010144" y="2918460"/>
-            <a:ext cx="3456432" cy="2065020"/>
+            <a:off x="8010144" y="3284220"/>
+            <a:ext cx="3456432" cy="1562100"/>
           </a:xfrm>
           <a:prstGeom prst="rect">
             <a:avLst/>
@@ -16226,20 +17266,20 @@
           <a:lstStyle/>
           <a:p>
             <a:pPr algn="ctr"/>
-            <a:endParaRPr sz="2400"/>
-          </a:p>
-        </p:txBody>
-      </p:sp>
-      <p:sp>
-        <p:nvSpPr>
-          <p:cNvPr id="17" name="TextBox 16"/>
+            <a:endParaRPr/>
+          </a:p>
+        </p:txBody>
+      </p:sp>
+      <p:sp>
+        <p:nvSpPr>
+          <p:cNvPr id="28" name="TextBox 27"/>
           <p:cNvSpPr txBox="1"/>
           <p:nvPr/>
         </p:nvSpPr>
         <p:spPr>
           <a:xfrm>
-            <a:off x="8174736" y="3046476"/>
-            <a:ext cx="3127248" cy="198837"/>
+            <a:off x="8174736" y="3412236"/>
+            <a:ext cx="3127248" cy="274320"/>
           </a:xfrm>
           <a:prstGeom prst="rect">
             <a:avLst/>
@@ -16261,33 +17301,27 @@
               </a:spcAft>
             </a:pPr>
             <a:r>
-              <a:rPr lang="fr-FR" sz="1200" b="1" i="0" spc="80" dirty="0">
-                <a:solidFill>
-                  <a:srgbClr val="0E6B66"/>
+              <a:rPr sz="1050" b="1" i="0" spc="80">
+                <a:solidFill>
+                  <a:srgbClr val="6E5A8C"/>
                 </a:solidFill>
                 <a:latin typeface="Consolas"/>
               </a:rPr>
-              <a:t>GUIDER</a:t>
-            </a:r>
-            <a:endParaRPr sz="1200" b="1" i="0" spc="80" dirty="0">
-              <a:solidFill>
-                <a:srgbClr val="0E6B66"/>
-              </a:solidFill>
-              <a:latin typeface="Consolas"/>
-            </a:endParaRPr>
-          </a:p>
-        </p:txBody>
-      </p:sp>
-      <p:sp>
-        <p:nvSpPr>
-          <p:cNvPr id="18" name="TextBox 17"/>
+              <a:t>NIVEAU 3 · SPÉCIFICITÉ</a:t>
+            </a:r>
+          </a:p>
+        </p:txBody>
+      </p:sp>
+      <p:sp>
+        <p:nvSpPr>
+          <p:cNvPr id="29" name="TextBox 28"/>
           <p:cNvSpPr txBox="1"/>
           <p:nvPr/>
         </p:nvSpPr>
         <p:spPr>
           <a:xfrm>
-            <a:off x="8174736" y="3357372"/>
-            <a:ext cx="3127248" cy="291426"/>
+            <a:off x="8174736" y="3723132"/>
+            <a:ext cx="3127248" cy="463973"/>
           </a:xfrm>
           <a:prstGeom prst="rect">
             <a:avLst/>
@@ -16309,27 +17343,132 @@
               </a:spcAft>
             </a:pPr>
             <a:r>
-              <a:rPr b="1" i="0">
-                <a:solidFill>
-                  <a:srgbClr val="1B2429"/>
-                </a:solidFill>
-                <a:latin typeface="Cambria"/>
-              </a:rPr>
-              <a:t>Guide du curateur</a:t>
-            </a:r>
-          </a:p>
-        </p:txBody>
-      </p:sp>
-      <p:sp>
-        <p:nvSpPr>
-          <p:cNvPr id="19" name="TextBox 18"/>
+              <a:rPr sz="2800" b="1" i="0" dirty="0">
+                <a:solidFill>
+                  <a:srgbClr val="6E5A8C"/>
+                </a:solidFill>
+                <a:latin typeface="Consolas"/>
+              </a:rPr>
+              <a:t>3 </a:t>
+            </a:r>
+            <a:r>
+              <a:rPr lang="fr-FR" sz="2800" b="1" dirty="0">
+                <a:solidFill>
+                  <a:srgbClr val="6E5A8C"/>
+                </a:solidFill>
+                <a:latin typeface="Consolas"/>
+              </a:rPr>
+              <a:t>540</a:t>
+            </a:r>
+            <a:endParaRPr sz="2800" b="1" i="0" dirty="0">
+              <a:solidFill>
+                <a:srgbClr val="6E5A8C"/>
+              </a:solidFill>
+              <a:latin typeface="Consolas"/>
+            </a:endParaRPr>
+          </a:p>
+        </p:txBody>
+      </p:sp>
+      <p:sp>
+        <p:nvSpPr>
+          <p:cNvPr id="30" name="Rectangle 29"/>
+          <p:cNvSpPr/>
+          <p:nvPr/>
+        </p:nvSpPr>
+        <p:spPr>
+          <a:xfrm>
+            <a:off x="8174736" y="4180332"/>
+            <a:ext cx="3127248" cy="63500"/>
+          </a:xfrm>
+          <a:prstGeom prst="rect">
+            <a:avLst/>
+          </a:prstGeom>
+          <a:solidFill>
+            <a:srgbClr val="D9DDD4"/>
+          </a:solidFill>
+          <a:ln>
+            <a:noFill/>
+          </a:ln>
+          <a:effectLst/>
+        </p:spPr>
+        <p:style>
+          <a:lnRef idx="1">
+            <a:schemeClr val="accent1"/>
+          </a:lnRef>
+          <a:fillRef idx="3">
+            <a:schemeClr val="accent1"/>
+          </a:fillRef>
+          <a:effectRef idx="2">
+            <a:schemeClr val="accent1"/>
+          </a:effectRef>
+          <a:fontRef idx="minor">
+            <a:schemeClr val="lt1"/>
+          </a:fontRef>
+        </p:style>
+        <p:txBody>
+          <a:bodyPr rtlCol="0" anchor="ctr"/>
+          <a:lstStyle/>
+          <a:p>
+            <a:pPr algn="ctr"/>
+            <a:endParaRPr/>
+          </a:p>
+        </p:txBody>
+      </p:sp>
+      <p:sp>
+        <p:nvSpPr>
+          <p:cNvPr id="31" name="Rectangle 30"/>
+          <p:cNvSpPr/>
+          <p:nvPr/>
+        </p:nvSpPr>
+        <p:spPr>
+          <a:xfrm>
+            <a:off x="8174736" y="4180332"/>
+            <a:ext cx="3127248" cy="63500"/>
+          </a:xfrm>
+          <a:prstGeom prst="rect">
+            <a:avLst/>
+          </a:prstGeom>
+          <a:solidFill>
+            <a:srgbClr val="6E5A8C"/>
+          </a:solidFill>
+          <a:ln>
+            <a:noFill/>
+          </a:ln>
+          <a:effectLst/>
+        </p:spPr>
+        <p:style>
+          <a:lnRef idx="1">
+            <a:schemeClr val="accent1"/>
+          </a:lnRef>
+          <a:fillRef idx="3">
+            <a:schemeClr val="accent1"/>
+          </a:fillRef>
+          <a:effectRef idx="2">
+            <a:schemeClr val="accent1"/>
+          </a:effectRef>
+          <a:fontRef idx="minor">
+            <a:schemeClr val="lt1"/>
+          </a:fontRef>
+        </p:style>
+        <p:txBody>
+          <a:bodyPr rtlCol="0" anchor="ctr"/>
+          <a:lstStyle/>
+          <a:p>
+            <a:pPr algn="ctr"/>
+            <a:endParaRPr/>
+          </a:p>
+        </p:txBody>
+      </p:sp>
+      <p:sp>
+        <p:nvSpPr>
+          <p:cNvPr id="32" name="TextBox 31"/>
           <p:cNvSpPr txBox="1"/>
           <p:nvPr/>
         </p:nvSpPr>
         <p:spPr>
           <a:xfrm>
-            <a:off x="8174736" y="3723132"/>
-            <a:ext cx="3127248" cy="499817"/>
+            <a:off x="8174736" y="4363212"/>
+            <a:ext cx="3127248" cy="373380"/>
           </a:xfrm>
           <a:prstGeom prst="rect">
             <a:avLst/>
@@ -16351,43 +17490,219 @@
               </a:spcAft>
             </a:pPr>
             <a:r>
-              <a:rPr sz="1400" b="0" i="0" dirty="0">
-                <a:solidFill>
-                  <a:srgbClr val="52605F"/>
-                </a:solidFill>
-                <a:latin typeface="Calibri"/>
-              </a:rPr>
-              <a:t>Déjà </a:t>
-            </a:r>
-            <a:r>
-              <a:rPr sz="1400" b="0" i="0" dirty="0" err="1">
-                <a:solidFill>
-                  <a:srgbClr val="52605F"/>
-                </a:solidFill>
-                <a:latin typeface="Calibri"/>
-              </a:rPr>
-              <a:t>rédigé</a:t>
-            </a:r>
-            <a:r>
-              <a:rPr sz="1400" b="0" i="0" dirty="0">
-                <a:solidFill>
-                  <a:srgbClr val="52605F"/>
-                </a:solidFill>
-                <a:latin typeface="Calibri"/>
-              </a:rPr>
-              <a:t> — prêt à </a:t>
-            </a:r>
-            <a:r>
-              <a:rPr sz="1400" b="0" i="0" dirty="0" err="1">
-                <a:solidFill>
-                  <a:srgbClr val="52605F"/>
-                </a:solidFill>
-                <a:latin typeface="Calibri"/>
-              </a:rPr>
-              <a:t>l'usage</a:t>
-            </a:r>
-            <a:r>
-              <a:rPr sz="1400" b="0" i="0" dirty="0">
+              <a:rPr sz="1150" b="0" i="0">
+                <a:solidFill>
+                  <a:srgbClr val="52605F"/>
+                </a:solidFill>
+                <a:latin typeface="Calibri"/>
+              </a:rPr>
+              <a:t>mots rares vs langue courante</a:t>
+            </a:r>
+          </a:p>
+        </p:txBody>
+      </p:sp>
+      <p:sp>
+        <p:nvSpPr>
+          <p:cNvPr id="33" name="Rectangle 32"/>
+          <p:cNvSpPr/>
+          <p:nvPr/>
+        </p:nvSpPr>
+        <p:spPr>
+          <a:xfrm>
+            <a:off x="640080" y="5074920"/>
+            <a:ext cx="38100" cy="1051560"/>
+          </a:xfrm>
+          <a:prstGeom prst="rect">
+            <a:avLst/>
+          </a:prstGeom>
+          <a:solidFill>
+            <a:srgbClr val="6E5A8C"/>
+          </a:solidFill>
+          <a:ln>
+            <a:noFill/>
+          </a:ln>
+          <a:effectLst/>
+        </p:spPr>
+        <p:style>
+          <a:lnRef idx="1">
+            <a:schemeClr val="accent1"/>
+          </a:lnRef>
+          <a:fillRef idx="3">
+            <a:schemeClr val="accent1"/>
+          </a:fillRef>
+          <a:effectRef idx="2">
+            <a:schemeClr val="accent1"/>
+          </a:effectRef>
+          <a:fontRef idx="minor">
+            <a:schemeClr val="lt1"/>
+          </a:fontRef>
+        </p:style>
+        <p:txBody>
+          <a:bodyPr rtlCol="0" anchor="ctr"/>
+          <a:lstStyle/>
+          <a:p>
+            <a:pPr algn="ctr"/>
+            <a:endParaRPr/>
+          </a:p>
+        </p:txBody>
+      </p:sp>
+      <p:sp>
+        <p:nvSpPr>
+          <p:cNvPr id="34" name="Rectangle 33"/>
+          <p:cNvSpPr/>
+          <p:nvPr/>
+        </p:nvSpPr>
+        <p:spPr>
+          <a:xfrm>
+            <a:off x="678180" y="5074920"/>
+            <a:ext cx="10843260" cy="1051560"/>
+          </a:xfrm>
+          <a:prstGeom prst="rect">
+            <a:avLst/>
+          </a:prstGeom>
+          <a:solidFill>
+            <a:srgbClr val="FBFBF8"/>
+          </a:solidFill>
+          <a:ln w="9525">
+            <a:solidFill>
+              <a:srgbClr val="D9DDD4"/>
+            </a:solidFill>
+          </a:ln>
+          <a:effectLst/>
+        </p:spPr>
+        <p:style>
+          <a:lnRef idx="1">
+            <a:schemeClr val="accent1"/>
+          </a:lnRef>
+          <a:fillRef idx="3">
+            <a:schemeClr val="accent1"/>
+          </a:fillRef>
+          <a:effectRef idx="2">
+            <a:schemeClr val="accent1"/>
+          </a:effectRef>
+          <a:fontRef idx="minor">
+            <a:schemeClr val="lt1"/>
+          </a:fontRef>
+        </p:style>
+        <p:txBody>
+          <a:bodyPr rtlCol="0" anchor="ctr"/>
+          <a:lstStyle/>
+          <a:p>
+            <a:pPr algn="ctr"/>
+            <a:endParaRPr/>
+          </a:p>
+        </p:txBody>
+      </p:sp>
+      <p:sp>
+        <p:nvSpPr>
+          <p:cNvPr id="35" name="TextBox 34"/>
+          <p:cNvSpPr txBox="1"/>
+          <p:nvPr/>
+        </p:nvSpPr>
+        <p:spPr>
+          <a:xfrm>
+            <a:off x="914400" y="5212080"/>
+            <a:ext cx="10241280" cy="274320"/>
+          </a:xfrm>
+          <a:prstGeom prst="rect">
+            <a:avLst/>
+          </a:prstGeom>
+          <a:noFill/>
+        </p:spPr>
+        <p:txBody>
+          <a:bodyPr wrap="square" lIns="0" tIns="0" rIns="0" bIns="0" anchor="t">
+            <a:spAutoFit/>
+          </a:bodyPr>
+          <a:lstStyle/>
+          <a:p>
+            <a:pPr algn="l">
+              <a:lnSpc>
+                <a:spcPct val="115000"/>
+              </a:lnSpc>
+              <a:spcAft>
+                <a:spcPts val="0"/>
+              </a:spcAft>
+            </a:pPr>
+            <a:r>
+              <a:rPr sz="1050" b="1" i="0" spc="80">
+                <a:solidFill>
+                  <a:srgbClr val="6E5A8C"/>
+                </a:solidFill>
+                <a:latin typeface="Consolas"/>
+              </a:rPr>
+              <a:t>ÉCHANTILLON NIVEAU 3</a:t>
+            </a:r>
+          </a:p>
+        </p:txBody>
+      </p:sp>
+      <p:sp>
+        <p:nvSpPr>
+          <p:cNvPr id="36" name="TextBox 35"/>
+          <p:cNvSpPr txBox="1"/>
+          <p:nvPr/>
+        </p:nvSpPr>
+        <p:spPr>
+          <a:xfrm>
+            <a:off x="914400" y="5513832"/>
+            <a:ext cx="10241280" cy="206851"/>
+          </a:xfrm>
+          <a:prstGeom prst="rect">
+            <a:avLst/>
+          </a:prstGeom>
+          <a:noFill/>
+        </p:spPr>
+        <p:txBody>
+          <a:bodyPr wrap="square" lIns="0" tIns="0" rIns="0" bIns="0" anchor="t">
+            <a:spAutoFit/>
+          </a:bodyPr>
+          <a:lstStyle/>
+          <a:p>
+            <a:pPr algn="l">
+              <a:lnSpc>
+                <a:spcPct val="120000"/>
+              </a:lnSpc>
+              <a:spcAft>
+                <a:spcPts val="0"/>
+              </a:spcAft>
+            </a:pPr>
+            <a:r>
+              <a:rPr sz="1200" b="0" i="0" dirty="0">
+                <a:solidFill>
+                  <a:srgbClr val="52605F"/>
+                </a:solidFill>
+                <a:latin typeface="Calibri"/>
+              </a:rPr>
+              <a:t>« intoxication </a:t>
+            </a:r>
+            <a:r>
+              <a:rPr sz="1200" b="0" i="0" dirty="0" err="1">
+                <a:solidFill>
+                  <a:srgbClr val="52605F"/>
+                </a:solidFill>
+                <a:latin typeface="Calibri"/>
+              </a:rPr>
+              <a:t>ciguatérique</a:t>
+            </a:r>
+            <a:r>
+              <a:rPr sz="1200" b="0" i="0" dirty="0">
+                <a:solidFill>
+                  <a:srgbClr val="52605F"/>
+                </a:solidFill>
+                <a:latin typeface="Calibri"/>
+              </a:rPr>
+              <a:t> »  ·  « </a:t>
+            </a:r>
+            <a:r>
+              <a:rPr sz="1200" b="0" i="0" dirty="0" err="1">
+                <a:solidFill>
+                  <a:srgbClr val="52605F"/>
+                </a:solidFill>
+                <a:latin typeface="Calibri"/>
+              </a:rPr>
+              <a:t>toxicité</a:t>
+            </a:r>
+            <a:r>
+              <a:rPr sz="1200" b="0" i="0" dirty="0">
                 <a:solidFill>
                   <a:srgbClr val="52605F"/>
                 </a:solidFill>
@@ -16396,16 +17711,34 @@
               <a:t> </a:t>
             </a:r>
             <a:r>
-              <a:rPr sz="1400" b="0" i="0" dirty="0" err="1">
-                <a:solidFill>
-                  <a:srgbClr val="52605F"/>
-                </a:solidFill>
-                <a:latin typeface="Calibri"/>
-              </a:rPr>
-              <a:t>dès</a:t>
-            </a:r>
-            <a:r>
-              <a:rPr sz="1400" b="0" i="0" dirty="0">
+              <a:rPr sz="1200" b="0" i="0" dirty="0" err="1">
+                <a:solidFill>
+                  <a:srgbClr val="52605F"/>
+                </a:solidFill>
+                <a:latin typeface="Calibri"/>
+              </a:rPr>
+              <a:t>chimique</a:t>
+            </a:r>
+            <a:r>
+              <a:rPr sz="1200" b="0" i="0" dirty="0">
+                <a:solidFill>
+                  <a:srgbClr val="52605F"/>
+                </a:solidFill>
+                <a:latin typeface="Calibri"/>
+              </a:rPr>
+              <a:t> »  ·  « micro-</a:t>
+            </a:r>
+            <a:r>
+              <a:rPr sz="1200" b="0" i="0" dirty="0" err="1">
+                <a:solidFill>
+                  <a:srgbClr val="52605F"/>
+                </a:solidFill>
+                <a:latin typeface="Calibri"/>
+              </a:rPr>
+              <a:t>organismes</a:t>
+            </a:r>
+            <a:r>
+              <a:rPr sz="1200" b="0" i="0" dirty="0">
                 <a:solidFill>
                   <a:srgbClr val="52605F"/>
                 </a:solidFill>
@@ -16414,29 +17747,80 @@
               <a:t> </a:t>
             </a:r>
             <a:r>
-              <a:rPr sz="1400" b="0" i="0" dirty="0" err="1">
-                <a:solidFill>
-                  <a:srgbClr val="52605F"/>
-                </a:solidFill>
-                <a:latin typeface="Calibri"/>
-              </a:rPr>
-              <a:t>aujourd'hui</a:t>
-            </a:r>
-            <a:r>
-              <a:rPr sz="1400" b="0" i="0" dirty="0">
-                <a:solidFill>
-                  <a:srgbClr val="52605F"/>
-                </a:solidFill>
-                <a:latin typeface="Calibri"/>
-              </a:rPr>
-              <a:t>.</a:t>
-            </a:r>
-          </a:p>
-        </p:txBody>
-      </p:sp>
-      <p:sp>
-        <p:nvSpPr>
-          <p:cNvPr id="21" name="TextBox 20"/>
+              <a:rPr sz="1200" b="0" i="0" dirty="0" err="1">
+                <a:solidFill>
+                  <a:srgbClr val="52605F"/>
+                </a:solidFill>
+                <a:latin typeface="Calibri"/>
+              </a:rPr>
+              <a:t>infectieux</a:t>
+            </a:r>
+            <a:r>
+              <a:rPr sz="1200" b="0" i="0" dirty="0">
+                <a:solidFill>
+                  <a:srgbClr val="52605F"/>
+                </a:solidFill>
+                <a:latin typeface="Calibri"/>
+              </a:rPr>
+              <a:t> » — </a:t>
+            </a:r>
+            <a:r>
+              <a:rPr sz="1200" b="0" i="0" dirty="0" err="1">
+                <a:solidFill>
+                  <a:srgbClr val="52605F"/>
+                </a:solidFill>
+                <a:latin typeface="Calibri"/>
+              </a:rPr>
+              <a:t>cohérent</a:t>
+            </a:r>
+            <a:r>
+              <a:rPr sz="1200" b="0" i="0" dirty="0">
+                <a:solidFill>
+                  <a:srgbClr val="52605F"/>
+                </a:solidFill>
+                <a:latin typeface="Calibri"/>
+              </a:rPr>
+              <a:t> avec le </a:t>
+            </a:r>
+            <a:r>
+              <a:rPr sz="1200" b="0" i="0" dirty="0" err="1">
+                <a:solidFill>
+                  <a:srgbClr val="52605F"/>
+                </a:solidFill>
+                <a:latin typeface="Calibri"/>
+              </a:rPr>
+              <a:t>domaine</a:t>
+            </a:r>
+            <a:r>
+              <a:rPr sz="1200" b="0" i="0" dirty="0">
+                <a:solidFill>
+                  <a:srgbClr val="52605F"/>
+                </a:solidFill>
+                <a:latin typeface="Calibri"/>
+              </a:rPr>
+              <a:t> du corpus </a:t>
+            </a:r>
+            <a:r>
+              <a:rPr sz="1200" b="0" i="0" dirty="0" err="1">
+                <a:solidFill>
+                  <a:srgbClr val="52605F"/>
+                </a:solidFill>
+                <a:latin typeface="Calibri"/>
+              </a:rPr>
+              <a:t>toxicologie</a:t>
+            </a:r>
+            <a:endParaRPr sz="1200" b="0" i="0" dirty="0">
+              <a:solidFill>
+                <a:srgbClr val="52605F"/>
+              </a:solidFill>
+              <a:latin typeface="Calibri"/>
+            </a:endParaRPr>
+          </a:p>
+        </p:txBody>
+      </p:sp>
+      <p:sp>
+        <p:nvSpPr>
+          <p:cNvPr id="37" name="TextBox 36"/>
           <p:cNvSpPr txBox="1"/>
           <p:nvPr/>
         </p:nvSpPr>
@@ -16471,7 +17855,7 @@
                 </a:solidFill>
                 <a:latin typeface="Consolas"/>
               </a:rPr>
-              <a:t>12 / 12</a:t>
+              <a:t>8 / 12</a:t>
             </a:r>
           </a:p>
         </p:txBody>
